--- a/docs/lecture_slides/Week 7/2026/Week7_Lecture16_Slides_10_7_2026.pptx
+++ b/docs/lecture_slides/Week 7/2026/Week7_Lecture16_Slides_10_7_2026.pptx
@@ -16,17 +16,6 @@
     <p:sldId id="394" r:id="rId10"/>
     <p:sldId id="395" r:id="rId11"/>
     <p:sldId id="396" r:id="rId12"/>
-    <p:sldId id="397" r:id="rId13"/>
-    <p:sldId id="398" r:id="rId14"/>
-    <p:sldId id="399" r:id="rId15"/>
-    <p:sldId id="400" r:id="rId16"/>
-    <p:sldId id="401" r:id="rId17"/>
-    <p:sldId id="402" r:id="rId18"/>
-    <p:sldId id="403" r:id="rId19"/>
-    <p:sldId id="404" r:id="rId20"/>
-    <p:sldId id="405" r:id="rId21"/>
-    <p:sldId id="406" r:id="rId22"/>
-    <p:sldId id="389" r:id="rId23"/>
   </p:sldIdLst>
   <p:sldSz cx="12192000" cy="6858000"/>
   <p:notesSz cx="6858000" cy="9144000"/>
@@ -3397,7 +3386,7 @@
                   <a:srgbClr val="1F3864"/>
                 </a:solidFill>
               </a:rPr>
-              <a:t>Discrete and Continuous Probability Distributions</a:t>
+              <a:t>Expected Value, Bernoulli and Binomial Distributions</a:t>
             </a:r>
             <a:endParaRPr lang="en-US" dirty="0">
               <a:solidFill>
@@ -4336,4504 +4325,6 @@
     <p:extLst>
       <p:ext uri="{BB962C8B-B14F-4D97-AF65-F5344CB8AC3E}">
         <p14:creationId xmlns:p14="http://schemas.microsoft.com/office/powerpoint/2010/main" val="3707685446"/>
-      </p:ext>
-    </p:extLst>
-  </p:cSld>
-  <p:clrMapOvr>
-    <a:masterClrMapping/>
-  </p:clrMapOvr>
-  <p:timing>
-    <p:tnLst>
-      <p:par>
-        <p:cTn id="1" dur="indefinite" restart="never" nodeType="tmRoot">
-          <p:childTnLst>
-            <p:seq concurrent="1" nextAc="seek">
-              <p:cTn id="2" dur="indefinite" nodeType="mainSeq">
-                <p:childTnLst>
-                  <p:par>
-                    <p:cTn id="3" fill="hold">
-                      <p:stCondLst>
-                        <p:cond delay="indefinite"/>
-                      </p:stCondLst>
-                      <p:childTnLst>
-                        <p:par>
-                          <p:cTn id="4" fill="hold">
-                            <p:stCondLst>
-                              <p:cond delay="0"/>
-                            </p:stCondLst>
-                            <p:childTnLst>
-                              <p:par>
-                                <p:cTn id="5" presetID="1" presetClass="entr" presetSubtype="0" fill="hold" grpId="0" nodeType="clickEffect">
-                                  <p:stCondLst>
-                                    <p:cond delay="0"/>
-                                  </p:stCondLst>
-                                  <p:childTnLst>
-                                    <p:set>
-                                      <p:cBhvr>
-                                        <p:cTn id="6" dur="1" fill="hold">
-                                          <p:stCondLst>
-                                            <p:cond delay="0"/>
-                                          </p:stCondLst>
-                                        </p:cTn>
-                                        <p:tgtEl>
-                                          <p:spTgt spid="11"/>
-                                        </p:tgtEl>
-                                        <p:attrNameLst>
-                                          <p:attrName>style.visibility</p:attrName>
-                                        </p:attrNameLst>
-                                      </p:cBhvr>
-                                      <p:to>
-                                        <p:strVal val="visible"/>
-                                      </p:to>
-                                    </p:set>
-                                  </p:childTnLst>
-                                </p:cTn>
-                              </p:par>
-                            </p:childTnLst>
-                          </p:cTn>
-                        </p:par>
-                      </p:childTnLst>
-                    </p:cTn>
-                  </p:par>
-                </p:childTnLst>
-              </p:cTn>
-              <p:prevCondLst>
-                <p:cond evt="onPrev" delay="0">
-                  <p:tgtEl>
-                    <p:sldTgt/>
-                  </p:tgtEl>
-                </p:cond>
-              </p:prevCondLst>
-              <p:nextCondLst>
-                <p:cond evt="onNext" delay="0">
-                  <p:tgtEl>
-                    <p:sldTgt/>
-                  </p:tgtEl>
-                </p:cond>
-              </p:nextCondLst>
-            </p:seq>
-          </p:childTnLst>
-        </p:cTn>
-      </p:par>
-    </p:tnLst>
-    <p:bldLst>
-      <p:bldP spid="11" grpId="0" animBg="1"/>
-    </p:bldLst>
-  </p:timing>
-</p:sld>
-</file>
-
-<file path=ppt/slides/slide12.xml><?xml version="1.0" encoding="utf-8"?>
-<p:sld xmlns:a="http://schemas.openxmlformats.org/drawingml/2006/main" xmlns:r="http://schemas.openxmlformats.org/officeDocument/2006/relationships" xmlns:p="http://schemas.openxmlformats.org/presentationml/2006/main">
-  <p:cSld>
-    <p:spTree>
-      <p:nvGrpSpPr>
-        <p:cNvPr id="1" name=""/>
-        <p:cNvGrpSpPr/>
-        <p:nvPr/>
-      </p:nvGrpSpPr>
-      <p:grpSpPr>
-        <a:xfrm>
-          <a:off x="0" y="0"/>
-          <a:ext cx="0" cy="0"/>
-          <a:chOff x="0" y="0"/>
-          <a:chExt cx="0" cy="0"/>
-        </a:xfrm>
-      </p:grpSpPr>
-      <p:sp>
-        <p:nvSpPr>
-          <p:cNvPr id="2" name="Title 1">
-            <a:extLst>
-              <a:ext uri="{FF2B5EF4-FFF2-40B4-BE49-F238E27FC236}">
-                <a16:creationId xmlns:a16="http://schemas.microsoft.com/office/drawing/2014/main" id="{C08D30B1-1864-30EF-7EAB-9BEE656C0012}"/>
-              </a:ext>
-            </a:extLst>
-          </p:cNvPr>
-          <p:cNvSpPr>
-            <a:spLocks noGrp="1"/>
-          </p:cNvSpPr>
-          <p:nvPr>
-            <p:ph type="title"/>
-          </p:nvPr>
-        </p:nvSpPr>
-        <p:spPr/>
-        <p:txBody>
-          <a:bodyPr>
-            <a:noAutofit/>
-          </a:bodyPr>
-          <a:lstStyle/>
-          <a:p>
-            <a:r>
-              <a:rPr lang="en-US">
-                <a:solidFill>
-                  <a:srgbClr val="1F3864"/>
-                </a:solidFill>
-              </a:rPr>
-              <a:t>Example: free throws</a:t>
-            </a:r>
-          </a:p>
-        </p:txBody>
-      </p:sp>
-      <p:sp>
-        <p:nvSpPr>
-          <p:cNvPr id="4" name="Slide Number Placeholder 3">
-            <a:extLst>
-              <a:ext uri="{FF2B5EF4-FFF2-40B4-BE49-F238E27FC236}">
-                <a16:creationId xmlns:a16="http://schemas.microsoft.com/office/drawing/2014/main" id="{3F875068-D051-44AE-498E-1BEBEDE3A7C8}"/>
-              </a:ext>
-            </a:extLst>
-          </p:cNvPr>
-          <p:cNvSpPr>
-            <a:spLocks noGrp="1"/>
-          </p:cNvSpPr>
-          <p:nvPr>
-            <p:ph type="sldNum" sz="quarter" idx="12"/>
-          </p:nvPr>
-        </p:nvSpPr>
-        <p:spPr/>
-        <p:txBody>
-          <a:bodyPr/>
-          <a:lstStyle/>
-          <a:p>
-            <a:fld id="{A80A81DD-F10A-4B1C-963A-0ABBB4865886}" type="slidenum">
-              <a:rPr lang="en-US" sz="1600" smtClean="0"/>
-              <a:t>12</a:t>
-            </a:fld>
-            <a:endParaRPr lang="en-US" sz="1600"/>
-          </a:p>
-        </p:txBody>
-      </p:sp>
-      <p:sp>
-        <p:nvSpPr>
-          <p:cNvPr id="3" name="Title rule">
-            <a:extLst>
-              <a:ext uri="{FF2B5EF4-FFF2-40B4-BE49-F238E27FC236}">
-                <a16:creationId xmlns:a16="http://schemas.microsoft.com/office/drawing/2014/main" id="{30656AA8-9645-F028-C769-A313710853CC}"/>
-              </a:ext>
-            </a:extLst>
-          </p:cNvPr>
-          <p:cNvSpPr/>
-          <p:nvPr/>
-        </p:nvSpPr>
-        <p:spPr>
-          <a:xfrm>
-            <a:off x="838200" y="1600200"/>
-            <a:ext cx="10515600" cy="38100"/>
-          </a:xfrm>
-          <a:prstGeom prst="rect">
-            <a:avLst/>
-          </a:prstGeom>
-          <a:solidFill>
-            <a:srgbClr val="4472C4"/>
-          </a:solidFill>
-          <a:ln w="12700" cap="flat" cmpd="sng" algn="ctr">
-            <a:noFill/>
-            <a:prstDash val="solid"/>
-            <a:miter lim="800000"/>
-          </a:ln>
-          <a:effectLst/>
-          <a:extLst>
-            <a:ext uri="{91240B29-F687-4F45-9708-019B960494DF}">
-              <a14:hiddenLine xmlns:a14="http://schemas.microsoft.com/office/drawing/2010/main" w="12700" cap="flat" cmpd="sng" algn="ctr">
-                <a:solidFill>
-                  <a:schemeClr val="accent1">
-                    <a:shade val="15000"/>
-                  </a:schemeClr>
-                </a:solidFill>
-                <a:prstDash val="solid"/>
-                <a:miter lim="800000"/>
-              </a14:hiddenLine>
-            </a:ext>
-          </a:extLst>
-        </p:spPr>
-        <p:style>
-          <a:lnRef idx="2">
-            <a:schemeClr val="accent1">
-              <a:shade val="15000"/>
-            </a:schemeClr>
-          </a:lnRef>
-          <a:fillRef idx="1">
-            <a:schemeClr val="accent1"/>
-          </a:fillRef>
-          <a:effectRef idx="0">
-            <a:schemeClr val="accent1"/>
-          </a:effectRef>
-          <a:fontRef idx="minor">
-            <a:schemeClr val="lt1"/>
-          </a:fontRef>
-        </p:style>
-        <p:txBody>
-          <a:bodyPr rtlCol="0" anchor="ctr"/>
-          <a:lstStyle/>
-          <a:p>
-            <a:pPr algn="ctr"/>
-            <a:endParaRPr lang="en-US"/>
-          </a:p>
-        </p:txBody>
-      </p:sp>
-      <p:sp>
-        <p:nvSpPr>
-          <p:cNvPr id="8" name="Context">
-            <a:extLst>
-              <a:ext uri="{FF2B5EF4-FFF2-40B4-BE49-F238E27FC236}">
-                <a16:creationId xmlns:a16="http://schemas.microsoft.com/office/drawing/2014/main" id="{71E3EA8C-31B4-DAD4-BC4A-65D72E59AD46}"/>
-              </a:ext>
-            </a:extLst>
-          </p:cNvPr>
-          <p:cNvSpPr txBox="1"/>
-          <p:nvPr/>
-        </p:nvSpPr>
-        <p:spPr>
-          <a:xfrm>
-            <a:off x="762000" y="1879600"/>
-            <a:ext cx="10668000" cy="381000"/>
-          </a:xfrm>
-          <a:prstGeom prst="rect">
-            <a:avLst/>
-          </a:prstGeom>
-          <a:noFill/>
-        </p:spPr>
-        <p:txBody>
-          <a:bodyPr vert="horz" wrap="square" rtlCol="0">
-            <a:spAutoFit/>
-          </a:bodyPr>
-          <a:lstStyle/>
-          <a:p>
-            <a:pPr>
-              <a:spcAft>
-                <a:spcPts val="200"/>
-              </a:spcAft>
-            </a:pPr>
-            <a:r>
-              <a:rPr lang="en-US">
-                <a:solidFill>
-                  <a:srgbClr val="000000"/>
-                </a:solidFill>
-                <a:latin typeface="Calibri" panose="020F0502020204030204" pitchFamily="34" charset="0"/>
-              </a:rPr>
-              <a:t>Stephen Curry has made 4,236 of the 4,645 free throws he has attempted in the NBA.</a:t>
-            </a:r>
-          </a:p>
-        </p:txBody>
-      </p:sp>
-      <p:sp>
-        <p:nvSpPr>
-          <p:cNvPr id="9" name="Numbers">
-            <a:extLst>
-              <a:ext uri="{FF2B5EF4-FFF2-40B4-BE49-F238E27FC236}">
-                <a16:creationId xmlns:a16="http://schemas.microsoft.com/office/drawing/2014/main" id="{C419F151-05B2-3E4B-BAE8-BB1F06D9D1FD}"/>
-              </a:ext>
-            </a:extLst>
-          </p:cNvPr>
-          <p:cNvSpPr txBox="1"/>
-          <p:nvPr/>
-        </p:nvSpPr>
-        <p:spPr>
-          <a:xfrm>
-            <a:off x="762000" y="2286000"/>
-            <a:ext cx="10668000" cy="400110"/>
-          </a:xfrm>
-          <a:prstGeom prst="rect">
-            <a:avLst/>
-          </a:prstGeom>
-          <a:noFill/>
-        </p:spPr>
-        <p:txBody>
-          <a:bodyPr vert="horz" wrap="square" rtlCol="0">
-            <a:spAutoFit/>
-          </a:bodyPr>
-          <a:lstStyle/>
-          <a:p>
-            <a:pPr>
-              <a:spcAft>
-                <a:spcPts val="200"/>
-              </a:spcAft>
-            </a:pPr>
-            <a:r>
-              <a:rPr lang="en-US" sz="2000" b="1">
-                <a:solidFill>
-                  <a:srgbClr val="000000"/>
-                </a:solidFill>
-                <a:latin typeface="Calibri" panose="020F0502020204030204" pitchFamily="34" charset="0"/>
-              </a:rPr>
-              <a:t>p = 4,236 / 4,645 ≈ 0.912;     he shoots n = 10;     X = free throws made</a:t>
-            </a:r>
-          </a:p>
-        </p:txBody>
-      </p:sp>
-      <p:sp>
-        <p:nvSpPr>
-          <p:cNvPr id="10" name="Question">
-            <a:extLst>
-              <a:ext uri="{FF2B5EF4-FFF2-40B4-BE49-F238E27FC236}">
-                <a16:creationId xmlns:a16="http://schemas.microsoft.com/office/drawing/2014/main" id="{B31E395F-B84E-D1E9-D22A-222467FC4105}"/>
-              </a:ext>
-            </a:extLst>
-          </p:cNvPr>
-          <p:cNvSpPr txBox="1"/>
-          <p:nvPr/>
-        </p:nvSpPr>
-        <p:spPr>
-          <a:xfrm>
-            <a:off x="762000" y="2711510"/>
-            <a:ext cx="10668000" cy="974626"/>
-          </a:xfrm>
-          <a:prstGeom prst="rect">
-            <a:avLst/>
-          </a:prstGeom>
-          <a:noFill/>
-        </p:spPr>
-        <p:txBody>
-          <a:bodyPr vert="horz" wrap="square" rtlCol="0">
-            <a:spAutoFit/>
-          </a:bodyPr>
-          <a:lstStyle/>
-          <a:p>
-            <a:pPr>
-              <a:spcAft>
-                <a:spcPts val="200"/>
-              </a:spcAft>
-            </a:pPr>
-            <a:r>
-              <a:rPr lang="en-US" b="1">
-                <a:solidFill>
-                  <a:srgbClr val="C00000"/>
-                </a:solidFill>
-                <a:latin typeface="Calibri" panose="020F0502020204030204" pitchFamily="34" charset="0"/>
-              </a:rPr>
-              <a:t>(a)  What is P(he makes all 10)?</a:t>
-            </a:r>
-          </a:p>
-          <a:p>
-            <a:pPr>
-              <a:spcAft>
-                <a:spcPts val="200"/>
-              </a:spcAft>
-            </a:pPr>
-            <a:r>
-              <a:rPr lang="en-US" b="1">
-                <a:solidFill>
-                  <a:srgbClr val="C00000"/>
-                </a:solidFill>
-                <a:latin typeface="Calibri" panose="020F0502020204030204" pitchFamily="34" charset="0"/>
-              </a:rPr>
-              <a:t>(b)  What is P(he misses at least one)?</a:t>
-            </a:r>
-          </a:p>
-          <a:p>
-            <a:pPr>
-              <a:spcAft>
-                <a:spcPts val="200"/>
-              </a:spcAft>
-            </a:pPr>
-            <a:r>
-              <a:rPr lang="en-US" b="1">
-                <a:solidFill>
-                  <a:srgbClr val="C00000"/>
-                </a:solidFill>
-                <a:latin typeface="Calibri" panose="020F0502020204030204" pitchFamily="34" charset="0"/>
-              </a:rPr>
-              <a:t>(c)  How many does he make, on average?</a:t>
-            </a:r>
-          </a:p>
-        </p:txBody>
-      </p:sp>
-      <p:sp>
-        <p:nvSpPr>
-          <p:cNvPr id="11" name="Result">
-            <a:extLst>
-              <a:ext uri="{FF2B5EF4-FFF2-40B4-BE49-F238E27FC236}">
-                <a16:creationId xmlns:a16="http://schemas.microsoft.com/office/drawing/2014/main" id="{5A70F68E-0D93-07B8-82B2-4D8F2F681D0D}"/>
-              </a:ext>
-            </a:extLst>
-          </p:cNvPr>
-          <p:cNvSpPr/>
-          <p:nvPr/>
-        </p:nvSpPr>
-        <p:spPr>
-          <a:xfrm>
-            <a:off x="762000" y="3838536"/>
-            <a:ext cx="10668000" cy="1098054"/>
-          </a:xfrm>
-          <a:prstGeom prst="roundRect">
-            <a:avLst>
-              <a:gd name="adj" fmla="val 4000"/>
-            </a:avLst>
-          </a:prstGeom>
-          <a:solidFill>
-            <a:srgbClr val="F2F6FC"/>
-          </a:solidFill>
-          <a:ln w="15875">
-            <a:solidFill>
-              <a:srgbClr val="4472C4"/>
-            </a:solidFill>
-          </a:ln>
-        </p:spPr>
-        <p:style>
-          <a:lnRef idx="2">
-            <a:schemeClr val="accent1">
-              <a:shade val="15000"/>
-            </a:schemeClr>
-          </a:lnRef>
-          <a:fillRef idx="1">
-            <a:schemeClr val="accent1"/>
-          </a:fillRef>
-          <a:effectRef idx="0">
-            <a:schemeClr val="accent1"/>
-          </a:effectRef>
-          <a:fontRef idx="minor">
-            <a:schemeClr val="lt1"/>
-          </a:fontRef>
-        </p:style>
-        <p:txBody>
-          <a:bodyPr wrap="square" lIns="152400" tIns="76200" rIns="152400" bIns="76200" rtlCol="0" anchor="ctr">
-            <a:spAutoFit/>
-          </a:bodyPr>
-          <a:lstStyle/>
-          <a:p>
-            <a:r>
-              <a:rPr lang="pl-PL" sz="2000" b="1">
-                <a:solidFill>
-                  <a:srgbClr val="C00000"/>
-                </a:solidFill>
-                <a:latin typeface="Calibri" panose="020F0502020204030204" pitchFamily="34" charset="0"/>
-              </a:rPr>
-              <a:t>(a)  0.912</a:t>
-            </a:r>
-            <a:r>
-              <a:rPr lang="pl-PL" sz="2000" b="1" baseline="30000">
-                <a:solidFill>
-                  <a:srgbClr val="C00000"/>
-                </a:solidFill>
-                <a:latin typeface="Calibri" panose="020F0502020204030204" pitchFamily="34" charset="0"/>
-              </a:rPr>
-              <a:t>10</a:t>
-            </a:r>
-            <a:r>
-              <a:rPr lang="pl-PL" sz="2000" b="1">
-                <a:solidFill>
-                  <a:srgbClr val="C00000"/>
-                </a:solidFill>
-                <a:latin typeface="Calibri" panose="020F0502020204030204" pitchFamily="34" charset="0"/>
-              </a:rPr>
-              <a:t> ≈ 0.40</a:t>
-            </a:r>
-          </a:p>
-          <a:p>
-            <a:r>
-              <a:rPr lang="pl-PL" sz="2000" b="1">
-                <a:solidFill>
-                  <a:srgbClr val="C00000"/>
-                </a:solidFill>
-                <a:latin typeface="Calibri" panose="020F0502020204030204" pitchFamily="34" charset="0"/>
-              </a:rPr>
-              <a:t>(b)  1 − 0.40 = 0.60</a:t>
-            </a:r>
-          </a:p>
-          <a:p>
-            <a:r>
-              <a:rPr lang="pl-PL" sz="2000" b="1">
-                <a:solidFill>
-                  <a:srgbClr val="C00000"/>
-                </a:solidFill>
-                <a:latin typeface="Calibri" panose="020F0502020204030204" pitchFamily="34" charset="0"/>
-              </a:rPr>
-              <a:t>(c)  μ = np = 10 × 0.912 ≈ 9.1</a:t>
-            </a:r>
-            <a:endParaRPr lang="en-US" sz="2000" b="1">
-              <a:solidFill>
-                <a:srgbClr val="C00000"/>
-              </a:solidFill>
-              <a:latin typeface="Calibri" panose="020F0502020204030204" pitchFamily="34" charset="0"/>
-            </a:endParaRPr>
-          </a:p>
-        </p:txBody>
-      </p:sp>
-    </p:spTree>
-    <p:extLst>
-      <p:ext uri="{BB962C8B-B14F-4D97-AF65-F5344CB8AC3E}">
-        <p14:creationId xmlns:p14="http://schemas.microsoft.com/office/powerpoint/2010/main" val="3299294071"/>
-      </p:ext>
-    </p:extLst>
-  </p:cSld>
-  <p:clrMapOvr>
-    <a:masterClrMapping/>
-  </p:clrMapOvr>
-  <p:timing>
-    <p:tnLst>
-      <p:par>
-        <p:cTn id="1" dur="indefinite" restart="never" nodeType="tmRoot">
-          <p:childTnLst>
-            <p:seq concurrent="1" nextAc="seek">
-              <p:cTn id="2" dur="indefinite" nodeType="mainSeq">
-                <p:childTnLst>
-                  <p:par>
-                    <p:cTn id="3" fill="hold">
-                      <p:stCondLst>
-                        <p:cond delay="indefinite"/>
-                      </p:stCondLst>
-                      <p:childTnLst>
-                        <p:par>
-                          <p:cTn id="4" fill="hold">
-                            <p:stCondLst>
-                              <p:cond delay="0"/>
-                            </p:stCondLst>
-                            <p:childTnLst>
-                              <p:par>
-                                <p:cTn id="5" presetID="1" presetClass="entr" presetSubtype="0" fill="hold" grpId="0" nodeType="clickEffect">
-                                  <p:stCondLst>
-                                    <p:cond delay="0"/>
-                                  </p:stCondLst>
-                                  <p:childTnLst>
-                                    <p:set>
-                                      <p:cBhvr>
-                                        <p:cTn id="6" dur="1" fill="hold">
-                                          <p:stCondLst>
-                                            <p:cond delay="0"/>
-                                          </p:stCondLst>
-                                        </p:cTn>
-                                        <p:tgtEl>
-                                          <p:spTgt spid="11"/>
-                                        </p:tgtEl>
-                                        <p:attrNameLst>
-                                          <p:attrName>style.visibility</p:attrName>
-                                        </p:attrNameLst>
-                                      </p:cBhvr>
-                                      <p:to>
-                                        <p:strVal val="visible"/>
-                                      </p:to>
-                                    </p:set>
-                                  </p:childTnLst>
-                                </p:cTn>
-                              </p:par>
-                            </p:childTnLst>
-                          </p:cTn>
-                        </p:par>
-                      </p:childTnLst>
-                    </p:cTn>
-                  </p:par>
-                </p:childTnLst>
-              </p:cTn>
-              <p:prevCondLst>
-                <p:cond evt="onPrev" delay="0">
-                  <p:tgtEl>
-                    <p:sldTgt/>
-                  </p:tgtEl>
-                </p:cond>
-              </p:prevCondLst>
-              <p:nextCondLst>
-                <p:cond evt="onNext" delay="0">
-                  <p:tgtEl>
-                    <p:sldTgt/>
-                  </p:tgtEl>
-                </p:cond>
-              </p:nextCondLst>
-            </p:seq>
-          </p:childTnLst>
-        </p:cTn>
-      </p:par>
-    </p:tnLst>
-    <p:bldLst>
-      <p:bldP spid="11" grpId="0" animBg="1"/>
-    </p:bldLst>
-  </p:timing>
-</p:sld>
-</file>
-
-<file path=ppt/slides/slide13.xml><?xml version="1.0" encoding="utf-8"?>
-<p:sld xmlns:a="http://schemas.openxmlformats.org/drawingml/2006/main" xmlns:r="http://schemas.openxmlformats.org/officeDocument/2006/relationships" xmlns:p="http://schemas.openxmlformats.org/presentationml/2006/main">
-  <p:cSld>
-    <p:spTree>
-      <p:nvGrpSpPr>
-        <p:cNvPr id="1" name=""/>
-        <p:cNvGrpSpPr/>
-        <p:nvPr/>
-      </p:nvGrpSpPr>
-      <p:grpSpPr>
-        <a:xfrm>
-          <a:off x="0" y="0"/>
-          <a:ext cx="0" cy="0"/>
-          <a:chOff x="0" y="0"/>
-          <a:chExt cx="0" cy="0"/>
-        </a:xfrm>
-      </p:grpSpPr>
-      <p:sp>
-        <p:nvSpPr>
-          <p:cNvPr id="2" name="Title 1">
-            <a:extLst>
-              <a:ext uri="{FF2B5EF4-FFF2-40B4-BE49-F238E27FC236}">
-                <a16:creationId xmlns:a16="http://schemas.microsoft.com/office/drawing/2014/main" id="{C08D30B1-1864-30EF-7EAB-9BEE656C0012}"/>
-              </a:ext>
-            </a:extLst>
-          </p:cNvPr>
-          <p:cNvSpPr>
-            <a:spLocks noGrp="1"/>
-          </p:cNvSpPr>
-          <p:nvPr>
-            <p:ph type="title"/>
-          </p:nvPr>
-        </p:nvSpPr>
-        <p:spPr/>
-        <p:txBody>
-          <a:bodyPr>
-            <a:noAutofit/>
-          </a:bodyPr>
-          <a:lstStyle/>
-          <a:p>
-            <a:r>
-              <a:rPr lang="en-US">
-                <a:solidFill>
-                  <a:srgbClr val="1F3864"/>
-                </a:solidFill>
-              </a:rPr>
-              <a:t>Is it binomial?</a:t>
-            </a:r>
-          </a:p>
-        </p:txBody>
-      </p:sp>
-      <p:sp>
-        <p:nvSpPr>
-          <p:cNvPr id="4" name="Slide Number Placeholder 3">
-            <a:extLst>
-              <a:ext uri="{FF2B5EF4-FFF2-40B4-BE49-F238E27FC236}">
-                <a16:creationId xmlns:a16="http://schemas.microsoft.com/office/drawing/2014/main" id="{3F875068-D051-44AE-498E-1BEBEDE3A7C8}"/>
-              </a:ext>
-            </a:extLst>
-          </p:cNvPr>
-          <p:cNvSpPr>
-            <a:spLocks noGrp="1"/>
-          </p:cNvSpPr>
-          <p:nvPr>
-            <p:ph type="sldNum" sz="quarter" idx="12"/>
-          </p:nvPr>
-        </p:nvSpPr>
-        <p:spPr/>
-        <p:txBody>
-          <a:bodyPr/>
-          <a:lstStyle/>
-          <a:p>
-            <a:fld id="{A80A81DD-F10A-4B1C-963A-0ABBB4865886}" type="slidenum">
-              <a:rPr lang="en-US" sz="1600" smtClean="0"/>
-              <a:t>13</a:t>
-            </a:fld>
-            <a:endParaRPr lang="en-US" sz="1600"/>
-          </a:p>
-        </p:txBody>
-      </p:sp>
-      <p:sp>
-        <p:nvSpPr>
-          <p:cNvPr id="3" name="Title rule">
-            <a:extLst>
-              <a:ext uri="{FF2B5EF4-FFF2-40B4-BE49-F238E27FC236}">
-                <a16:creationId xmlns:a16="http://schemas.microsoft.com/office/drawing/2014/main" id="{30656AA8-9645-F028-C769-A313710853CC}"/>
-              </a:ext>
-            </a:extLst>
-          </p:cNvPr>
-          <p:cNvSpPr/>
-          <p:nvPr/>
-        </p:nvSpPr>
-        <p:spPr>
-          <a:xfrm>
-            <a:off x="838200" y="1600200"/>
-            <a:ext cx="10515600" cy="38100"/>
-          </a:xfrm>
-          <a:prstGeom prst="rect">
-            <a:avLst/>
-          </a:prstGeom>
-          <a:solidFill>
-            <a:srgbClr val="4472C4"/>
-          </a:solidFill>
-          <a:ln w="12700" cap="flat" cmpd="sng" algn="ctr">
-            <a:noFill/>
-            <a:prstDash val="solid"/>
-            <a:miter lim="800000"/>
-          </a:ln>
-          <a:effectLst/>
-          <a:extLst>
-            <a:ext uri="{91240B29-F687-4F45-9708-019B960494DF}">
-              <a14:hiddenLine xmlns:a14="http://schemas.microsoft.com/office/drawing/2010/main" w="12700" cap="flat" cmpd="sng" algn="ctr">
-                <a:solidFill>
-                  <a:schemeClr val="accent1">
-                    <a:shade val="15000"/>
-                  </a:schemeClr>
-                </a:solidFill>
-                <a:prstDash val="solid"/>
-                <a:miter lim="800000"/>
-              </a14:hiddenLine>
-            </a:ext>
-          </a:extLst>
-        </p:spPr>
-        <p:style>
-          <a:lnRef idx="2">
-            <a:schemeClr val="accent1">
-              <a:shade val="15000"/>
-            </a:schemeClr>
-          </a:lnRef>
-          <a:fillRef idx="1">
-            <a:schemeClr val="accent1"/>
-          </a:fillRef>
-          <a:effectRef idx="0">
-            <a:schemeClr val="accent1"/>
-          </a:effectRef>
-          <a:fontRef idx="minor">
-            <a:schemeClr val="lt1"/>
-          </a:fontRef>
-        </p:style>
-        <p:txBody>
-          <a:bodyPr rtlCol="0" anchor="ctr"/>
-          <a:lstStyle/>
-          <a:p>
-            <a:pPr algn="ctr"/>
-            <a:endParaRPr lang="en-US"/>
-          </a:p>
-        </p:txBody>
-      </p:sp>
-      <p:sp>
-        <p:nvSpPr>
-          <p:cNvPr id="8" name="Context">
-            <a:extLst>
-              <a:ext uri="{FF2B5EF4-FFF2-40B4-BE49-F238E27FC236}">
-                <a16:creationId xmlns:a16="http://schemas.microsoft.com/office/drawing/2014/main" id="{71E3EA8C-31B4-DAD4-BC4A-65D72E59AD46}"/>
-              </a:ext>
-            </a:extLst>
-          </p:cNvPr>
-          <p:cNvSpPr txBox="1"/>
-          <p:nvPr/>
-        </p:nvSpPr>
-        <p:spPr>
-          <a:xfrm>
-            <a:off x="762000" y="1879600"/>
-            <a:ext cx="10668000" cy="381000"/>
-          </a:xfrm>
-          <a:prstGeom prst="rect">
-            <a:avLst/>
-          </a:prstGeom>
-          <a:noFill/>
-        </p:spPr>
-        <p:txBody>
-          <a:bodyPr vert="horz" wrap="square" rtlCol="0">
-            <a:spAutoFit/>
-          </a:bodyPr>
-          <a:lstStyle/>
-          <a:p>
-            <a:pPr>
-              <a:spcAft>
-                <a:spcPts val="200"/>
-              </a:spcAft>
-            </a:pPr>
-            <a:r>
-              <a:rPr lang="en-US">
-                <a:solidFill>
-                  <a:srgbClr val="000000"/>
-                </a:solidFill>
-                <a:latin typeface="Calibri" panose="020F0502020204030204" pitchFamily="34" charset="0"/>
-              </a:rPr>
-              <a:t>For each X, check the three conditions:  fixed n,  the same p,  independent trials.</a:t>
-            </a:r>
-          </a:p>
-        </p:txBody>
-      </p:sp>
-      <p:sp>
-        <p:nvSpPr>
-          <p:cNvPr id="10" name="Question">
-            <a:extLst>
-              <a:ext uri="{FF2B5EF4-FFF2-40B4-BE49-F238E27FC236}">
-                <a16:creationId xmlns:a16="http://schemas.microsoft.com/office/drawing/2014/main" id="{B31E395F-B84E-D1E9-D22A-222467FC4105}"/>
-              </a:ext>
-            </a:extLst>
-          </p:cNvPr>
-          <p:cNvSpPr txBox="1"/>
-          <p:nvPr/>
-        </p:nvSpPr>
-        <p:spPr>
-          <a:xfrm>
-            <a:off x="762000" y="2286000"/>
-            <a:ext cx="10668000" cy="974626"/>
-          </a:xfrm>
-          <a:prstGeom prst="rect">
-            <a:avLst/>
-          </a:prstGeom>
-          <a:noFill/>
-        </p:spPr>
-        <p:txBody>
-          <a:bodyPr vert="horz" wrap="square" rtlCol="0">
-            <a:spAutoFit/>
-          </a:bodyPr>
-          <a:lstStyle/>
-          <a:p>
-            <a:pPr>
-              <a:spcAft>
-                <a:spcPts val="200"/>
-              </a:spcAft>
-            </a:pPr>
-            <a:r>
-              <a:rPr lang="en-US" b="1">
-                <a:solidFill>
-                  <a:srgbClr val="C00000"/>
-                </a:solidFill>
-                <a:latin typeface="Calibri" panose="020F0502020204030204" pitchFamily="34" charset="0"/>
-              </a:rPr>
-              <a:t>(a)  X = the number of heads in 20 flips of a coin</a:t>
-            </a:r>
-          </a:p>
-          <a:p>
-            <a:pPr>
-              <a:spcAft>
-                <a:spcPts val="200"/>
-              </a:spcAft>
-            </a:pPr>
-            <a:r>
-              <a:rPr lang="en-US" b="1">
-                <a:solidFill>
-                  <a:srgbClr val="C00000"/>
-                </a:solidFill>
-                <a:latin typeface="Calibri" panose="020F0502020204030204" pitchFamily="34" charset="0"/>
-              </a:rPr>
-              <a:t>(b)  X = the number of aces in a 5-card hand</a:t>
-            </a:r>
-          </a:p>
-          <a:p>
-            <a:pPr>
-              <a:spcAft>
-                <a:spcPts val="200"/>
-              </a:spcAft>
-            </a:pPr>
-            <a:r>
-              <a:rPr lang="en-US" b="1">
-                <a:solidFill>
-                  <a:srgbClr val="C00000"/>
-                </a:solidFill>
-                <a:latin typeface="Calibri" panose="020F0502020204030204" pitchFamily="34" charset="0"/>
-              </a:rPr>
-              <a:t>(c)  X = the number of rolls of a die until the first six</a:t>
-            </a:r>
-          </a:p>
-        </p:txBody>
-      </p:sp>
-      <p:sp>
-        <p:nvSpPr>
-          <p:cNvPr id="11" name="Result">
-            <a:extLst>
-              <a:ext uri="{FF2B5EF4-FFF2-40B4-BE49-F238E27FC236}">
-                <a16:creationId xmlns:a16="http://schemas.microsoft.com/office/drawing/2014/main" id="{5A70F68E-0D93-07B8-82B2-4D8F2F681D0D}"/>
-              </a:ext>
-            </a:extLst>
-          </p:cNvPr>
-          <p:cNvSpPr/>
-          <p:nvPr/>
-        </p:nvSpPr>
-        <p:spPr>
-          <a:xfrm>
-            <a:off x="762000" y="3413026"/>
-            <a:ext cx="10668000" cy="1098054"/>
-          </a:xfrm>
-          <a:prstGeom prst="roundRect">
-            <a:avLst>
-              <a:gd name="adj" fmla="val 4000"/>
-            </a:avLst>
-          </a:prstGeom>
-          <a:solidFill>
-            <a:srgbClr val="F2F6FC"/>
-          </a:solidFill>
-          <a:ln w="15875">
-            <a:solidFill>
-              <a:srgbClr val="4472C4"/>
-            </a:solidFill>
-          </a:ln>
-        </p:spPr>
-        <p:style>
-          <a:lnRef idx="2">
-            <a:schemeClr val="accent1">
-              <a:shade val="15000"/>
-            </a:schemeClr>
-          </a:lnRef>
-          <a:fillRef idx="1">
-            <a:schemeClr val="accent1"/>
-          </a:fillRef>
-          <a:effectRef idx="0">
-            <a:schemeClr val="accent1"/>
-          </a:effectRef>
-          <a:fontRef idx="minor">
-            <a:schemeClr val="lt1"/>
-          </a:fontRef>
-        </p:style>
-        <p:txBody>
-          <a:bodyPr wrap="square" lIns="152400" tIns="76200" rIns="152400" bIns="76200" rtlCol="0" anchor="ctr">
-            <a:spAutoFit/>
-          </a:bodyPr>
-          <a:lstStyle/>
-          <a:p>
-            <a:r>
-              <a:rPr lang="en-US" sz="2000" b="1">
-                <a:solidFill>
-                  <a:srgbClr val="C00000"/>
-                </a:solidFill>
-                <a:latin typeface="Calibri" panose="020F0502020204030204" pitchFamily="34" charset="0"/>
-              </a:rPr>
-              <a:t>(a)  Yes:  n = 20,  p = 0.5,  and the flips are independent</a:t>
-            </a:r>
-          </a:p>
-          <a:p>
-            <a:r>
-              <a:rPr lang="en-US" sz="2000" b="1">
-                <a:solidFill>
-                  <a:srgbClr val="C00000"/>
-                </a:solidFill>
-                <a:latin typeface="Calibri" panose="020F0502020204030204" pitchFamily="34" charset="0"/>
-              </a:rPr>
-              <a:t>(b)  No:  the cards are dealt without replacement, so the draws are not independent</a:t>
-            </a:r>
-          </a:p>
-          <a:p>
-            <a:r>
-              <a:rPr lang="en-US" sz="2000" b="1">
-                <a:solidFill>
-                  <a:srgbClr val="C00000"/>
-                </a:solidFill>
-                <a:latin typeface="Calibri" panose="020F0502020204030204" pitchFamily="34" charset="0"/>
-              </a:rPr>
-              <a:t>(c)  No:  the number of trials n is not fixed</a:t>
-            </a:r>
-          </a:p>
-        </p:txBody>
-      </p:sp>
-    </p:spTree>
-    <p:extLst>
-      <p:ext uri="{BB962C8B-B14F-4D97-AF65-F5344CB8AC3E}">
-        <p14:creationId xmlns:p14="http://schemas.microsoft.com/office/powerpoint/2010/main" val="4166570039"/>
-      </p:ext>
-    </p:extLst>
-  </p:cSld>
-  <p:clrMapOvr>
-    <a:masterClrMapping/>
-  </p:clrMapOvr>
-  <p:timing>
-    <p:tnLst>
-      <p:par>
-        <p:cTn id="1" dur="indefinite" restart="never" nodeType="tmRoot">
-          <p:childTnLst>
-            <p:seq concurrent="1" nextAc="seek">
-              <p:cTn id="2" dur="indefinite" nodeType="mainSeq">
-                <p:childTnLst>
-                  <p:par>
-                    <p:cTn id="3" fill="hold">
-                      <p:stCondLst>
-                        <p:cond delay="indefinite"/>
-                      </p:stCondLst>
-                      <p:childTnLst>
-                        <p:par>
-                          <p:cTn id="4" fill="hold">
-                            <p:stCondLst>
-                              <p:cond delay="0"/>
-                            </p:stCondLst>
-                            <p:childTnLst>
-                              <p:par>
-                                <p:cTn id="5" presetID="1" presetClass="entr" presetSubtype="0" fill="hold" grpId="0" nodeType="clickEffect">
-                                  <p:stCondLst>
-                                    <p:cond delay="0"/>
-                                  </p:stCondLst>
-                                  <p:childTnLst>
-                                    <p:set>
-                                      <p:cBhvr>
-                                        <p:cTn id="6" dur="1" fill="hold">
-                                          <p:stCondLst>
-                                            <p:cond delay="0"/>
-                                          </p:stCondLst>
-                                        </p:cTn>
-                                        <p:tgtEl>
-                                          <p:spTgt spid="11"/>
-                                        </p:tgtEl>
-                                        <p:attrNameLst>
-                                          <p:attrName>style.visibility</p:attrName>
-                                        </p:attrNameLst>
-                                      </p:cBhvr>
-                                      <p:to>
-                                        <p:strVal val="visible"/>
-                                      </p:to>
-                                    </p:set>
-                                  </p:childTnLst>
-                                </p:cTn>
-                              </p:par>
-                            </p:childTnLst>
-                          </p:cTn>
-                        </p:par>
-                      </p:childTnLst>
-                    </p:cTn>
-                  </p:par>
-                </p:childTnLst>
-              </p:cTn>
-              <p:prevCondLst>
-                <p:cond evt="onPrev" delay="0">
-                  <p:tgtEl>
-                    <p:sldTgt/>
-                  </p:tgtEl>
-                </p:cond>
-              </p:prevCondLst>
-              <p:nextCondLst>
-                <p:cond evt="onNext" delay="0">
-                  <p:tgtEl>
-                    <p:sldTgt/>
-                  </p:tgtEl>
-                </p:cond>
-              </p:nextCondLst>
-            </p:seq>
-          </p:childTnLst>
-        </p:cTn>
-      </p:par>
-    </p:tnLst>
-    <p:bldLst>
-      <p:bldP spid="11" grpId="0" animBg="1"/>
-    </p:bldLst>
-  </p:timing>
-</p:sld>
-</file>
-
-<file path=ppt/slides/slide14.xml><?xml version="1.0" encoding="utf-8"?>
-<p:sld xmlns:a="http://schemas.openxmlformats.org/drawingml/2006/main" xmlns:r="http://schemas.openxmlformats.org/officeDocument/2006/relationships" xmlns:p="http://schemas.openxmlformats.org/presentationml/2006/main">
-  <p:cSld>
-    <p:spTree>
-      <p:nvGrpSpPr>
-        <p:cNvPr id="1" name=""/>
-        <p:cNvGrpSpPr/>
-        <p:nvPr/>
-      </p:nvGrpSpPr>
-      <p:grpSpPr>
-        <a:xfrm>
-          <a:off x="0" y="0"/>
-          <a:ext cx="0" cy="0"/>
-          <a:chOff x="0" y="0"/>
-          <a:chExt cx="0" cy="0"/>
-        </a:xfrm>
-      </p:grpSpPr>
-      <p:sp>
-        <p:nvSpPr>
-          <p:cNvPr id="2" name="Title 1">
-            <a:extLst>
-              <a:ext uri="{FF2B5EF4-FFF2-40B4-BE49-F238E27FC236}">
-                <a16:creationId xmlns:a16="http://schemas.microsoft.com/office/drawing/2014/main" id="{D617AB41-6AD1-9EF2-7F95-46A904399681}"/>
-              </a:ext>
-            </a:extLst>
-          </p:cNvPr>
-          <p:cNvSpPr>
-            <a:spLocks noGrp="1"/>
-          </p:cNvSpPr>
-          <p:nvPr>
-            <p:ph type="title"/>
-          </p:nvPr>
-        </p:nvSpPr>
-        <p:spPr/>
-        <p:txBody>
-          <a:bodyPr>
-            <a:noAutofit/>
-          </a:bodyPr>
-          <a:lstStyle/>
-          <a:p>
-            <a:r>
-              <a:rPr lang="en-US">
-                <a:solidFill>
-                  <a:srgbClr val="1F3864"/>
-                </a:solidFill>
-              </a:rPr>
-              <a:t>The Poisson distribution</a:t>
-            </a:r>
-          </a:p>
-        </p:txBody>
-      </p:sp>
-      <p:sp>
-        <p:nvSpPr>
-          <p:cNvPr id="4" name="Slide Number Placeholder 3">
-            <a:extLst>
-              <a:ext uri="{FF2B5EF4-FFF2-40B4-BE49-F238E27FC236}">
-                <a16:creationId xmlns:a16="http://schemas.microsoft.com/office/drawing/2014/main" id="{97D44AE5-98B5-B840-6B8A-D345C7C2E2F0}"/>
-              </a:ext>
-            </a:extLst>
-          </p:cNvPr>
-          <p:cNvSpPr>
-            <a:spLocks noGrp="1"/>
-          </p:cNvSpPr>
-          <p:nvPr>
-            <p:ph type="sldNum" sz="quarter" idx="12"/>
-          </p:nvPr>
-        </p:nvSpPr>
-        <p:spPr/>
-        <p:txBody>
-          <a:bodyPr/>
-          <a:lstStyle/>
-          <a:p>
-            <a:fld id="{A80A81DD-F10A-4B1C-963A-0ABBB4865886}" type="slidenum">
-              <a:rPr lang="en-US" sz="1600" smtClean="0"/>
-              <a:t>14</a:t>
-            </a:fld>
-            <a:endParaRPr lang="en-US" sz="1600"/>
-          </a:p>
-        </p:txBody>
-      </p:sp>
-      <p:sp>
-        <p:nvSpPr>
-          <p:cNvPr id="5" name="TextBox 4">
-            <a:extLst>
-              <a:ext uri="{FF2B5EF4-FFF2-40B4-BE49-F238E27FC236}">
-                <a16:creationId xmlns:a16="http://schemas.microsoft.com/office/drawing/2014/main" id="{A34AAE17-27CE-D7A3-C663-11BB48ACBF5B}"/>
-              </a:ext>
-            </a:extLst>
-          </p:cNvPr>
-          <p:cNvSpPr txBox="1"/>
-          <p:nvPr/>
-        </p:nvSpPr>
-        <p:spPr>
-          <a:xfrm>
-            <a:off x="762000" y="1879600"/>
-            <a:ext cx="10668000" cy="345440"/>
-          </a:xfrm>
-          <a:prstGeom prst="rect">
-            <a:avLst/>
-          </a:prstGeom>
-          <a:noFill/>
-        </p:spPr>
-        <p:txBody>
-          <a:bodyPr vert="horz" wrap="square" rtlCol="0">
-            <a:spAutoFit/>
-          </a:bodyPr>
-          <a:lstStyle/>
-          <a:p>
-            <a:pPr marL="304800" indent="-304800"/>
-            <a:r>
-              <a:rPr lang="en-US" sz="1600">
-                <a:solidFill>
-                  <a:srgbClr val="000000"/>
-                </a:solidFill>
-              </a:rPr>
-              <a:t>X ~ Poisson(</a:t>
-            </a:r>
-            <a:r>
-              <a:rPr lang="el-GR" sz="1600">
-                <a:solidFill>
-                  <a:srgbClr val="000000"/>
-                </a:solidFill>
-              </a:rPr>
-              <a:t>λ)</a:t>
-            </a:r>
-            <a:endParaRPr lang="en-US" sz="1600">
-              <a:solidFill>
-                <a:srgbClr val="000000"/>
-              </a:solidFill>
-            </a:endParaRPr>
-          </a:p>
-        </p:txBody>
-      </p:sp>
-      <p:sp>
-        <p:nvSpPr>
-          <p:cNvPr id="6" name="TextBox 5">
-            <a:extLst>
-              <a:ext uri="{FF2B5EF4-FFF2-40B4-BE49-F238E27FC236}">
-                <a16:creationId xmlns:a16="http://schemas.microsoft.com/office/drawing/2014/main" id="{E410A0F8-5E1E-9A1D-B64C-50827EE6C9B2}"/>
-              </a:ext>
-            </a:extLst>
-          </p:cNvPr>
-          <p:cNvSpPr txBox="1"/>
-          <p:nvPr/>
-        </p:nvSpPr>
-        <p:spPr>
-          <a:xfrm>
-            <a:off x="1117600" y="2225040"/>
-            <a:ext cx="10312400" cy="338554"/>
-          </a:xfrm>
-          <a:prstGeom prst="rect">
-            <a:avLst/>
-          </a:prstGeom>
-          <a:noFill/>
-        </p:spPr>
-        <p:txBody>
-          <a:bodyPr vert="horz" wrap="square" rtlCol="0">
-            <a:spAutoFit/>
-          </a:bodyPr>
-          <a:lstStyle/>
-          <a:p>
-            <a:r>
-              <a:rPr lang="en-US" sz="1600" b="1">
-                <a:solidFill>
-                  <a:srgbClr val="C00000"/>
-                </a:solidFill>
-              </a:rPr>
-              <a:t>X = the number of events in a fixed interval of time or space, when events occur independently at an average rate λ</a:t>
-            </a:r>
-          </a:p>
-        </p:txBody>
-      </p:sp>
-      <p:sp>
-        <p:nvSpPr>
-          <p:cNvPr id="7" name="TextBox 6">
-            <a:extLst>
-              <a:ext uri="{FF2B5EF4-FFF2-40B4-BE49-F238E27FC236}">
-                <a16:creationId xmlns:a16="http://schemas.microsoft.com/office/drawing/2014/main" id="{47D3CD95-D52E-5227-B663-7C0A72677B6E}"/>
-              </a:ext>
-            </a:extLst>
-          </p:cNvPr>
-          <p:cNvSpPr txBox="1"/>
-          <p:nvPr/>
-        </p:nvSpPr>
-        <p:spPr>
-          <a:xfrm>
-            <a:off x="762000" y="2741394"/>
-            <a:ext cx="10668000" cy="345440"/>
-          </a:xfrm>
-          <a:prstGeom prst="rect">
-            <a:avLst/>
-          </a:prstGeom>
-          <a:noFill/>
-        </p:spPr>
-        <p:txBody>
-          <a:bodyPr vert="horz" wrap="square" rtlCol="0">
-            <a:spAutoFit/>
-          </a:bodyPr>
-          <a:lstStyle/>
-          <a:p>
-            <a:pPr marL="304800" indent="-304800"/>
-            <a:r>
-              <a:rPr lang="en-US" sz="1600">
-                <a:solidFill>
-                  <a:srgbClr val="000000"/>
-                </a:solidFill>
-              </a:rPr>
-              <a:t>P(X = k)</a:t>
-            </a:r>
-          </a:p>
-        </p:txBody>
-      </p:sp>
-      <p:sp>
-        <p:nvSpPr>
-          <p:cNvPr id="8" name="TextBox 7">
-            <a:extLst>
-              <a:ext uri="{FF2B5EF4-FFF2-40B4-BE49-F238E27FC236}">
-                <a16:creationId xmlns:a16="http://schemas.microsoft.com/office/drawing/2014/main" id="{1CE3E601-601D-C6B1-8265-C079CB8C9269}"/>
-              </a:ext>
-            </a:extLst>
-          </p:cNvPr>
-          <p:cNvSpPr txBox="1"/>
-          <p:nvPr/>
-        </p:nvSpPr>
-        <p:spPr>
-          <a:xfrm>
-            <a:off x="1117600" y="3086834"/>
-            <a:ext cx="10312400" cy="338554"/>
-          </a:xfrm>
-          <a:prstGeom prst="rect">
-            <a:avLst/>
-          </a:prstGeom>
-          <a:noFill/>
-        </p:spPr>
-        <p:txBody>
-          <a:bodyPr vert="horz" wrap="square" rtlCol="0">
-            <a:spAutoFit/>
-          </a:bodyPr>
-          <a:lstStyle/>
-          <a:p>
-            <a:r>
-              <a:rPr lang="el-GR" sz="1600" b="1">
-                <a:solidFill>
-                  <a:srgbClr val="C00000"/>
-                </a:solidFill>
-              </a:rPr>
-              <a:t>λ</a:t>
-            </a:r>
-            <a:r>
-              <a:rPr lang="en-US" sz="1600" b="1" baseline="30000">
-                <a:solidFill>
-                  <a:srgbClr val="C00000"/>
-                </a:solidFill>
-              </a:rPr>
-              <a:t>k</a:t>
-            </a:r>
-            <a:r>
-              <a:rPr lang="en-US" sz="1600" b="1">
-                <a:solidFill>
-                  <a:srgbClr val="C00000"/>
-                </a:solidFill>
-              </a:rPr>
-              <a:t> e</a:t>
-            </a:r>
-            <a:r>
-              <a:rPr lang="en-US" sz="1600" b="1" baseline="30000">
-                <a:solidFill>
-                  <a:srgbClr val="C00000"/>
-                </a:solidFill>
-              </a:rPr>
-              <a:t>−</a:t>
-            </a:r>
-            <a:r>
-              <a:rPr lang="el-GR" sz="1600" b="1" baseline="30000">
-                <a:solidFill>
-                  <a:srgbClr val="C00000"/>
-                </a:solidFill>
-              </a:rPr>
-              <a:t>λ</a:t>
-            </a:r>
-            <a:r>
-              <a:rPr lang="el-GR" sz="1600" b="1">
-                <a:solidFill>
-                  <a:srgbClr val="C00000"/>
-                </a:solidFill>
-              </a:rPr>
-              <a:t> / </a:t>
-            </a:r>
-            <a:r>
-              <a:rPr lang="en-US" sz="1600" b="1">
-                <a:solidFill>
-                  <a:srgbClr val="C00000"/>
-                </a:solidFill>
-              </a:rPr>
-              <a:t>k!,     k = 0, 1, 2, …     (e ≈ 2.718)</a:t>
-            </a:r>
-          </a:p>
-        </p:txBody>
-      </p:sp>
-      <p:sp>
-        <p:nvSpPr>
-          <p:cNvPr id="9" name="TextBox 8">
-            <a:extLst>
-              <a:ext uri="{FF2B5EF4-FFF2-40B4-BE49-F238E27FC236}">
-                <a16:creationId xmlns:a16="http://schemas.microsoft.com/office/drawing/2014/main" id="{FB002BF4-8037-2F73-E27A-7A453477E389}"/>
-              </a:ext>
-            </a:extLst>
-          </p:cNvPr>
-          <p:cNvSpPr txBox="1"/>
-          <p:nvPr/>
-        </p:nvSpPr>
-        <p:spPr>
-          <a:xfrm>
-            <a:off x="762000" y="3603188"/>
-            <a:ext cx="10668000" cy="345440"/>
-          </a:xfrm>
-          <a:prstGeom prst="rect">
-            <a:avLst/>
-          </a:prstGeom>
-          <a:noFill/>
-        </p:spPr>
-        <p:txBody>
-          <a:bodyPr vert="horz" wrap="square" rtlCol="0">
-            <a:spAutoFit/>
-          </a:bodyPr>
-          <a:lstStyle/>
-          <a:p>
-            <a:pPr marL="304800" indent="-304800"/>
-            <a:r>
-              <a:rPr lang="en-US" sz="1600">
-                <a:solidFill>
-                  <a:srgbClr val="000000"/>
-                </a:solidFill>
-              </a:rPr>
-              <a:t>mean and variance</a:t>
-            </a:r>
-          </a:p>
-        </p:txBody>
-      </p:sp>
-      <p:sp>
-        <p:nvSpPr>
-          <p:cNvPr id="10" name="TextBox 9">
-            <a:extLst>
-              <a:ext uri="{FF2B5EF4-FFF2-40B4-BE49-F238E27FC236}">
-                <a16:creationId xmlns:a16="http://schemas.microsoft.com/office/drawing/2014/main" id="{10F3B3E3-D27C-E008-C93E-ED70BD2A4754}"/>
-              </a:ext>
-            </a:extLst>
-          </p:cNvPr>
-          <p:cNvSpPr txBox="1"/>
-          <p:nvPr/>
-        </p:nvSpPr>
-        <p:spPr>
-          <a:xfrm>
-            <a:off x="1117600" y="3948628"/>
-            <a:ext cx="10312400" cy="338554"/>
-          </a:xfrm>
-          <a:prstGeom prst="rect">
-            <a:avLst/>
-          </a:prstGeom>
-          <a:noFill/>
-        </p:spPr>
-        <p:txBody>
-          <a:bodyPr vert="horz" wrap="square" rtlCol="0">
-            <a:spAutoFit/>
-          </a:bodyPr>
-          <a:lstStyle/>
-          <a:p>
-            <a:r>
-              <a:rPr lang="el-GR" sz="1600" b="1">
-                <a:solidFill>
-                  <a:srgbClr val="C00000"/>
-                </a:solidFill>
-              </a:rPr>
-              <a:t>μ = λ     and     σ² = λ</a:t>
-            </a:r>
-            <a:endParaRPr lang="en-US" sz="1600" b="1" dirty="0">
-              <a:solidFill>
-                <a:srgbClr val="C00000"/>
-              </a:solidFill>
-            </a:endParaRPr>
-          </a:p>
-        </p:txBody>
-      </p:sp>
-      <p:sp>
-        <p:nvSpPr>
-          <p:cNvPr id="3" name="Title rule">
-            <a:extLst>
-              <a:ext uri="{FF2B5EF4-FFF2-40B4-BE49-F238E27FC236}">
-                <a16:creationId xmlns:a16="http://schemas.microsoft.com/office/drawing/2014/main" id="{B469CAAB-2B69-6863-7C28-0C5959E5734B}"/>
-              </a:ext>
-            </a:extLst>
-          </p:cNvPr>
-          <p:cNvSpPr/>
-          <p:nvPr/>
-        </p:nvSpPr>
-        <p:spPr>
-          <a:xfrm>
-            <a:off x="838200" y="1600200"/>
-            <a:ext cx="10515600" cy="38100"/>
-          </a:xfrm>
-          <a:prstGeom prst="rect">
-            <a:avLst/>
-          </a:prstGeom>
-          <a:solidFill>
-            <a:srgbClr val="4472C4"/>
-          </a:solidFill>
-          <a:ln w="12700" cap="flat" cmpd="sng" algn="ctr">
-            <a:noFill/>
-            <a:prstDash val="solid"/>
-            <a:miter lim="800000"/>
-          </a:ln>
-          <a:effectLst/>
-          <a:extLst>
-            <a:ext uri="{91240B29-F687-4F45-9708-019B960494DF}">
-              <a14:hiddenLine xmlns:a14="http://schemas.microsoft.com/office/drawing/2010/main" w="12700" cap="flat" cmpd="sng" algn="ctr">
-                <a:solidFill>
-                  <a:schemeClr val="accent1">
-                    <a:shade val="15000"/>
-                  </a:schemeClr>
-                </a:solidFill>
-                <a:prstDash val="solid"/>
-                <a:miter lim="800000"/>
-              </a14:hiddenLine>
-            </a:ext>
-          </a:extLst>
-        </p:spPr>
-        <p:style>
-          <a:lnRef idx="2">
-            <a:schemeClr val="accent1">
-              <a:shade val="15000"/>
-            </a:schemeClr>
-          </a:lnRef>
-          <a:fillRef idx="1">
-            <a:schemeClr val="accent1"/>
-          </a:fillRef>
-          <a:effectRef idx="0">
-            <a:schemeClr val="accent1"/>
-          </a:effectRef>
-          <a:fontRef idx="minor">
-            <a:schemeClr val="lt1"/>
-          </a:fontRef>
-        </p:style>
-        <p:txBody>
-          <a:bodyPr rtlCol="0" anchor="ctr"/>
-          <a:lstStyle/>
-          <a:p>
-            <a:pPr algn="ctr"/>
-            <a:endParaRPr lang="en-US"/>
-          </a:p>
-        </p:txBody>
-      </p:sp>
-    </p:spTree>
-    <p:extLst>
-      <p:ext uri="{BB962C8B-B14F-4D97-AF65-F5344CB8AC3E}">
-        <p14:creationId xmlns:p14="http://schemas.microsoft.com/office/powerpoint/2010/main" val="424350618"/>
-      </p:ext>
-    </p:extLst>
-  </p:cSld>
-  <p:clrMapOvr>
-    <a:masterClrMapping/>
-  </p:clrMapOvr>
-  <p:timing>
-    <p:tnLst>
-      <p:par>
-        <p:cTn id="1" dur="indefinite" restart="never" nodeType="tmRoot">
-          <p:childTnLst>
-            <p:seq concurrent="1" nextAc="seek">
-              <p:cTn id="2" dur="indefinite" nodeType="mainSeq">
-                <p:childTnLst>
-                  <p:par>
-                    <p:cTn id="3" fill="hold">
-                      <p:stCondLst>
-                        <p:cond delay="indefinite"/>
-                      </p:stCondLst>
-                      <p:childTnLst>
-                        <p:par>
-                          <p:cTn id="4" fill="hold">
-                            <p:stCondLst>
-                              <p:cond delay="0"/>
-                            </p:stCondLst>
-                            <p:childTnLst>
-                              <p:par>
-                                <p:cTn id="5" presetID="34" presetClass="entr" presetSubtype="0" fill="hold" grpId="0" nodeType="clickEffect">
-                                  <p:stCondLst>
-                                    <p:cond delay="0"/>
-                                  </p:stCondLst>
-                                  <p:childTnLst>
-                                    <p:set>
-                                      <p:cBhvr>
-                                        <p:cTn id="6" dur="1" fill="hold">
-                                          <p:stCondLst>
-                                            <p:cond delay="0"/>
-                                          </p:stCondLst>
-                                        </p:cTn>
-                                        <p:tgtEl>
-                                          <p:spTgt spid="6"/>
-                                        </p:tgtEl>
-                                        <p:attrNameLst>
-                                          <p:attrName>style.visibility</p:attrName>
-                                        </p:attrNameLst>
-                                      </p:cBhvr>
-                                      <p:to>
-                                        <p:strVal val="visible"/>
-                                      </p:to>
-                                    </p:set>
-                                    <p:anim from="(-#ppt_w/2)" to="(#ppt_x)" calcmode="lin" valueType="num">
-                                      <p:cBhvr>
-                                        <p:cTn id="7" dur="600" fill="hold">
-                                          <p:stCondLst>
-                                            <p:cond delay="0"/>
-                                          </p:stCondLst>
-                                        </p:cTn>
-                                        <p:tgtEl>
-                                          <p:spTgt spid="6"/>
-                                        </p:tgtEl>
-                                        <p:attrNameLst>
-                                          <p:attrName>ppt_x</p:attrName>
-                                        </p:attrNameLst>
-                                      </p:cBhvr>
-                                    </p:anim>
-                                    <p:anim from="0" to="-1.0" calcmode="lin" valueType="num">
-                                      <p:cBhvr>
-                                        <p:cTn id="8" dur="200" decel="50000" autoRev="1" fill="hold">
-                                          <p:stCondLst>
-                                            <p:cond delay="600"/>
-                                          </p:stCondLst>
-                                        </p:cTn>
-                                        <p:tgtEl>
-                                          <p:spTgt spid="6"/>
-                                        </p:tgtEl>
-                                        <p:attrNameLst>
-                                          <p:attrName>xshear</p:attrName>
-                                        </p:attrNameLst>
-                                      </p:cBhvr>
-                                    </p:anim>
-                                    <p:animScale>
-                                      <p:cBhvr>
-                                        <p:cTn id="9" dur="200" decel="100000" autoRev="1" fill="hold">
-                                          <p:stCondLst>
-                                            <p:cond delay="600"/>
-                                          </p:stCondLst>
-                                        </p:cTn>
-                                        <p:tgtEl>
-                                          <p:spTgt spid="6"/>
-                                        </p:tgtEl>
-                                      </p:cBhvr>
-                                      <p:from x="100000" y="100000"/>
-                                      <p:to x="80000" y="100000"/>
-                                    </p:animScale>
-                                    <p:anim by="(#ppt_h/3+#ppt_w*0.1)" calcmode="lin" valueType="num">
-                                      <p:cBhvr additive="sum">
-                                        <p:cTn id="10" dur="200" decel="100000" autoRev="1" fill="hold">
-                                          <p:stCondLst>
-                                            <p:cond delay="600"/>
-                                          </p:stCondLst>
-                                        </p:cTn>
-                                        <p:tgtEl>
-                                          <p:spTgt spid="6"/>
-                                        </p:tgtEl>
-                                        <p:attrNameLst>
-                                          <p:attrName>ppt_x</p:attrName>
-                                        </p:attrNameLst>
-                                      </p:cBhvr>
-                                    </p:anim>
-                                  </p:childTnLst>
-                                </p:cTn>
-                              </p:par>
-                            </p:childTnLst>
-                          </p:cTn>
-                        </p:par>
-                      </p:childTnLst>
-                    </p:cTn>
-                  </p:par>
-                  <p:par>
-                    <p:cTn id="11" fill="hold">
-                      <p:stCondLst>
-                        <p:cond delay="indefinite"/>
-                      </p:stCondLst>
-                      <p:childTnLst>
-                        <p:par>
-                          <p:cTn id="12" fill="hold">
-                            <p:stCondLst>
-                              <p:cond delay="0"/>
-                            </p:stCondLst>
-                            <p:childTnLst>
-                              <p:par>
-                                <p:cTn id="13" presetID="34" presetClass="entr" presetSubtype="0" fill="hold" grpId="0" nodeType="clickEffect">
-                                  <p:stCondLst>
-                                    <p:cond delay="0"/>
-                                  </p:stCondLst>
-                                  <p:childTnLst>
-                                    <p:set>
-                                      <p:cBhvr>
-                                        <p:cTn id="14" dur="1" fill="hold">
-                                          <p:stCondLst>
-                                            <p:cond delay="0"/>
-                                          </p:stCondLst>
-                                        </p:cTn>
-                                        <p:tgtEl>
-                                          <p:spTgt spid="8"/>
-                                        </p:tgtEl>
-                                        <p:attrNameLst>
-                                          <p:attrName>style.visibility</p:attrName>
-                                        </p:attrNameLst>
-                                      </p:cBhvr>
-                                      <p:to>
-                                        <p:strVal val="visible"/>
-                                      </p:to>
-                                    </p:set>
-                                    <p:anim from="(-#ppt_w/2)" to="(#ppt_x)" calcmode="lin" valueType="num">
-                                      <p:cBhvr>
-                                        <p:cTn id="15" dur="600" fill="hold">
-                                          <p:stCondLst>
-                                            <p:cond delay="0"/>
-                                          </p:stCondLst>
-                                        </p:cTn>
-                                        <p:tgtEl>
-                                          <p:spTgt spid="8"/>
-                                        </p:tgtEl>
-                                        <p:attrNameLst>
-                                          <p:attrName>ppt_x</p:attrName>
-                                        </p:attrNameLst>
-                                      </p:cBhvr>
-                                    </p:anim>
-                                    <p:anim from="0" to="-1.0" calcmode="lin" valueType="num">
-                                      <p:cBhvr>
-                                        <p:cTn id="16" dur="200" decel="50000" autoRev="1" fill="hold">
-                                          <p:stCondLst>
-                                            <p:cond delay="600"/>
-                                          </p:stCondLst>
-                                        </p:cTn>
-                                        <p:tgtEl>
-                                          <p:spTgt spid="8"/>
-                                        </p:tgtEl>
-                                        <p:attrNameLst>
-                                          <p:attrName>xshear</p:attrName>
-                                        </p:attrNameLst>
-                                      </p:cBhvr>
-                                    </p:anim>
-                                    <p:animScale>
-                                      <p:cBhvr>
-                                        <p:cTn id="17" dur="200" decel="100000" autoRev="1" fill="hold">
-                                          <p:stCondLst>
-                                            <p:cond delay="600"/>
-                                          </p:stCondLst>
-                                        </p:cTn>
-                                        <p:tgtEl>
-                                          <p:spTgt spid="8"/>
-                                        </p:tgtEl>
-                                      </p:cBhvr>
-                                      <p:from x="100000" y="100000"/>
-                                      <p:to x="80000" y="100000"/>
-                                    </p:animScale>
-                                    <p:anim by="(#ppt_h/3+#ppt_w*0.1)" calcmode="lin" valueType="num">
-                                      <p:cBhvr additive="sum">
-                                        <p:cTn id="18" dur="200" decel="100000" autoRev="1" fill="hold">
-                                          <p:stCondLst>
-                                            <p:cond delay="600"/>
-                                          </p:stCondLst>
-                                        </p:cTn>
-                                        <p:tgtEl>
-                                          <p:spTgt spid="8"/>
-                                        </p:tgtEl>
-                                        <p:attrNameLst>
-                                          <p:attrName>ppt_x</p:attrName>
-                                        </p:attrNameLst>
-                                      </p:cBhvr>
-                                    </p:anim>
-                                  </p:childTnLst>
-                                </p:cTn>
-                              </p:par>
-                            </p:childTnLst>
-                          </p:cTn>
-                        </p:par>
-                      </p:childTnLst>
-                    </p:cTn>
-                  </p:par>
-                  <p:par>
-                    <p:cTn id="19" fill="hold">
-                      <p:stCondLst>
-                        <p:cond delay="indefinite"/>
-                      </p:stCondLst>
-                      <p:childTnLst>
-                        <p:par>
-                          <p:cTn id="20" fill="hold">
-                            <p:stCondLst>
-                              <p:cond delay="0"/>
-                            </p:stCondLst>
-                            <p:childTnLst>
-                              <p:par>
-                                <p:cTn id="21" presetID="34" presetClass="entr" presetSubtype="0" fill="hold" grpId="0" nodeType="clickEffect">
-                                  <p:stCondLst>
-                                    <p:cond delay="0"/>
-                                  </p:stCondLst>
-                                  <p:childTnLst>
-                                    <p:set>
-                                      <p:cBhvr>
-                                        <p:cTn id="22" dur="1" fill="hold">
-                                          <p:stCondLst>
-                                            <p:cond delay="0"/>
-                                          </p:stCondLst>
-                                        </p:cTn>
-                                        <p:tgtEl>
-                                          <p:spTgt spid="10"/>
-                                        </p:tgtEl>
-                                        <p:attrNameLst>
-                                          <p:attrName>style.visibility</p:attrName>
-                                        </p:attrNameLst>
-                                      </p:cBhvr>
-                                      <p:to>
-                                        <p:strVal val="visible"/>
-                                      </p:to>
-                                    </p:set>
-                                    <p:anim from="(-#ppt_w/2)" to="(#ppt_x)" calcmode="lin" valueType="num">
-                                      <p:cBhvr>
-                                        <p:cTn id="23" dur="600" fill="hold">
-                                          <p:stCondLst>
-                                            <p:cond delay="0"/>
-                                          </p:stCondLst>
-                                        </p:cTn>
-                                        <p:tgtEl>
-                                          <p:spTgt spid="10"/>
-                                        </p:tgtEl>
-                                        <p:attrNameLst>
-                                          <p:attrName>ppt_x</p:attrName>
-                                        </p:attrNameLst>
-                                      </p:cBhvr>
-                                    </p:anim>
-                                    <p:anim from="0" to="-1.0" calcmode="lin" valueType="num">
-                                      <p:cBhvr>
-                                        <p:cTn id="24" dur="200" decel="50000" autoRev="1" fill="hold">
-                                          <p:stCondLst>
-                                            <p:cond delay="600"/>
-                                          </p:stCondLst>
-                                        </p:cTn>
-                                        <p:tgtEl>
-                                          <p:spTgt spid="10"/>
-                                        </p:tgtEl>
-                                        <p:attrNameLst>
-                                          <p:attrName>xshear</p:attrName>
-                                        </p:attrNameLst>
-                                      </p:cBhvr>
-                                    </p:anim>
-                                    <p:animScale>
-                                      <p:cBhvr>
-                                        <p:cTn id="25" dur="200" decel="100000" autoRev="1" fill="hold">
-                                          <p:stCondLst>
-                                            <p:cond delay="600"/>
-                                          </p:stCondLst>
-                                        </p:cTn>
-                                        <p:tgtEl>
-                                          <p:spTgt spid="10"/>
-                                        </p:tgtEl>
-                                      </p:cBhvr>
-                                      <p:from x="100000" y="100000"/>
-                                      <p:to x="80000" y="100000"/>
-                                    </p:animScale>
-                                    <p:anim by="(#ppt_h/3+#ppt_w*0.1)" calcmode="lin" valueType="num">
-                                      <p:cBhvr additive="sum">
-                                        <p:cTn id="26" dur="200" decel="100000" autoRev="1" fill="hold">
-                                          <p:stCondLst>
-                                            <p:cond delay="600"/>
-                                          </p:stCondLst>
-                                        </p:cTn>
-                                        <p:tgtEl>
-                                          <p:spTgt spid="10"/>
-                                        </p:tgtEl>
-                                        <p:attrNameLst>
-                                          <p:attrName>ppt_x</p:attrName>
-                                        </p:attrNameLst>
-                                      </p:cBhvr>
-                                    </p:anim>
-                                  </p:childTnLst>
-                                </p:cTn>
-                              </p:par>
-                            </p:childTnLst>
-                          </p:cTn>
-                        </p:par>
-                      </p:childTnLst>
-                    </p:cTn>
-                  </p:par>
-                </p:childTnLst>
-              </p:cTn>
-              <p:prevCondLst>
-                <p:cond evt="onPrev" delay="0">
-                  <p:tgtEl>
-                    <p:sldTgt/>
-                  </p:tgtEl>
-                </p:cond>
-              </p:prevCondLst>
-              <p:nextCondLst>
-                <p:cond evt="onNext" delay="0">
-                  <p:tgtEl>
-                    <p:sldTgt/>
-                  </p:tgtEl>
-                </p:cond>
-              </p:nextCondLst>
-            </p:seq>
-          </p:childTnLst>
-        </p:cTn>
-      </p:par>
-    </p:tnLst>
-    <p:bldLst>
-      <p:bldP spid="6" grpId="0"/>
-      <p:bldP spid="8" grpId="0"/>
-      <p:bldP spid="10" grpId="0"/>
-    </p:bldLst>
-  </p:timing>
-</p:sld>
-</file>
-
-<file path=ppt/slides/slide15.xml><?xml version="1.0" encoding="utf-8"?>
-<p:sld xmlns:a="http://schemas.openxmlformats.org/drawingml/2006/main" xmlns:r="http://schemas.openxmlformats.org/officeDocument/2006/relationships" xmlns:p="http://schemas.openxmlformats.org/presentationml/2006/main">
-  <p:cSld>
-    <p:spTree>
-      <p:nvGrpSpPr>
-        <p:cNvPr id="1" name=""/>
-        <p:cNvGrpSpPr/>
-        <p:nvPr/>
-      </p:nvGrpSpPr>
-      <p:grpSpPr>
-        <a:xfrm>
-          <a:off x="0" y="0"/>
-          <a:ext cx="0" cy="0"/>
-          <a:chOff x="0" y="0"/>
-          <a:chExt cx="0" cy="0"/>
-        </a:xfrm>
-      </p:grpSpPr>
-      <p:sp>
-        <p:nvSpPr>
-          <p:cNvPr id="2" name="Title 1">
-            <a:extLst>
-              <a:ext uri="{FF2B5EF4-FFF2-40B4-BE49-F238E27FC236}">
-                <a16:creationId xmlns:a16="http://schemas.microsoft.com/office/drawing/2014/main" id="{C08D30B1-1864-30EF-7EAB-9BEE656C0012}"/>
-              </a:ext>
-            </a:extLst>
-          </p:cNvPr>
-          <p:cNvSpPr>
-            <a:spLocks noGrp="1"/>
-          </p:cNvSpPr>
-          <p:nvPr>
-            <p:ph type="title"/>
-          </p:nvPr>
-        </p:nvSpPr>
-        <p:spPr/>
-        <p:txBody>
-          <a:bodyPr>
-            <a:noAutofit/>
-          </a:bodyPr>
-          <a:lstStyle/>
-          <a:p>
-            <a:r>
-              <a:rPr lang="en-US">
-                <a:solidFill>
-                  <a:srgbClr val="1F3864"/>
-                </a:solidFill>
-              </a:rPr>
-              <a:t>Example: World Cup goals</a:t>
-            </a:r>
-          </a:p>
-        </p:txBody>
-      </p:sp>
-      <p:sp>
-        <p:nvSpPr>
-          <p:cNvPr id="4" name="Slide Number Placeholder 3">
-            <a:extLst>
-              <a:ext uri="{FF2B5EF4-FFF2-40B4-BE49-F238E27FC236}">
-                <a16:creationId xmlns:a16="http://schemas.microsoft.com/office/drawing/2014/main" id="{3F875068-D051-44AE-498E-1BEBEDE3A7C8}"/>
-              </a:ext>
-            </a:extLst>
-          </p:cNvPr>
-          <p:cNvSpPr>
-            <a:spLocks noGrp="1"/>
-          </p:cNvSpPr>
-          <p:nvPr>
-            <p:ph type="sldNum" sz="quarter" idx="12"/>
-          </p:nvPr>
-        </p:nvSpPr>
-        <p:spPr/>
-        <p:txBody>
-          <a:bodyPr/>
-          <a:lstStyle/>
-          <a:p>
-            <a:fld id="{A80A81DD-F10A-4B1C-963A-0ABBB4865886}" type="slidenum">
-              <a:rPr lang="en-US" sz="1600" smtClean="0"/>
-              <a:t>15</a:t>
-            </a:fld>
-            <a:endParaRPr lang="en-US" sz="1600"/>
-          </a:p>
-        </p:txBody>
-      </p:sp>
-      <p:sp>
-        <p:nvSpPr>
-          <p:cNvPr id="3" name="Title rule">
-            <a:extLst>
-              <a:ext uri="{FF2B5EF4-FFF2-40B4-BE49-F238E27FC236}">
-                <a16:creationId xmlns:a16="http://schemas.microsoft.com/office/drawing/2014/main" id="{30656AA8-9645-F028-C769-A313710853CC}"/>
-              </a:ext>
-            </a:extLst>
-          </p:cNvPr>
-          <p:cNvSpPr/>
-          <p:nvPr/>
-        </p:nvSpPr>
-        <p:spPr>
-          <a:xfrm>
-            <a:off x="838200" y="1600200"/>
-            <a:ext cx="10515600" cy="38100"/>
-          </a:xfrm>
-          <a:prstGeom prst="rect">
-            <a:avLst/>
-          </a:prstGeom>
-          <a:solidFill>
-            <a:srgbClr val="4472C4"/>
-          </a:solidFill>
-          <a:ln w="12700" cap="flat" cmpd="sng" algn="ctr">
-            <a:noFill/>
-            <a:prstDash val="solid"/>
-            <a:miter lim="800000"/>
-          </a:ln>
-          <a:effectLst/>
-          <a:extLst>
-            <a:ext uri="{91240B29-F687-4F45-9708-019B960494DF}">
-              <a14:hiddenLine xmlns:a14="http://schemas.microsoft.com/office/drawing/2010/main" w="12700" cap="flat" cmpd="sng" algn="ctr">
-                <a:solidFill>
-                  <a:schemeClr val="accent1">
-                    <a:shade val="15000"/>
-                  </a:schemeClr>
-                </a:solidFill>
-                <a:prstDash val="solid"/>
-                <a:miter lim="800000"/>
-              </a14:hiddenLine>
-            </a:ext>
-          </a:extLst>
-        </p:spPr>
-        <p:style>
-          <a:lnRef idx="2">
-            <a:schemeClr val="accent1">
-              <a:shade val="15000"/>
-            </a:schemeClr>
-          </a:lnRef>
-          <a:fillRef idx="1">
-            <a:schemeClr val="accent1"/>
-          </a:fillRef>
-          <a:effectRef idx="0">
-            <a:schemeClr val="accent1"/>
-          </a:effectRef>
-          <a:fontRef idx="minor">
-            <a:schemeClr val="lt1"/>
-          </a:fontRef>
-        </p:style>
-        <p:txBody>
-          <a:bodyPr rtlCol="0" anchor="ctr"/>
-          <a:lstStyle/>
-          <a:p>
-            <a:pPr algn="ctr"/>
-            <a:endParaRPr lang="en-US"/>
-          </a:p>
-        </p:txBody>
-      </p:sp>
-      <p:sp>
-        <p:nvSpPr>
-          <p:cNvPr id="8" name="Context">
-            <a:extLst>
-              <a:ext uri="{FF2B5EF4-FFF2-40B4-BE49-F238E27FC236}">
-                <a16:creationId xmlns:a16="http://schemas.microsoft.com/office/drawing/2014/main" id="{71E3EA8C-31B4-DAD4-BC4A-65D72E59AD46}"/>
-              </a:ext>
-            </a:extLst>
-          </p:cNvPr>
-          <p:cNvSpPr txBox="1"/>
-          <p:nvPr/>
-        </p:nvSpPr>
-        <p:spPr>
-          <a:xfrm>
-            <a:off x="762000" y="1879600"/>
-            <a:ext cx="10668000" cy="381000"/>
-          </a:xfrm>
-          <a:prstGeom prst="rect">
-            <a:avLst/>
-          </a:prstGeom>
-          <a:noFill/>
-        </p:spPr>
-        <p:txBody>
-          <a:bodyPr vert="horz" wrap="square" rtlCol="0">
-            <a:spAutoFit/>
-          </a:bodyPr>
-          <a:lstStyle/>
-          <a:p>
-            <a:pPr>
-              <a:spcAft>
-                <a:spcPts val="200"/>
-              </a:spcAft>
-            </a:pPr>
-            <a:r>
-              <a:rPr lang="en-US">
-                <a:solidFill>
-                  <a:srgbClr val="000000"/>
-                </a:solidFill>
-                <a:latin typeface="Calibri" panose="020F0502020204030204" pitchFamily="34" charset="0"/>
-              </a:rPr>
-              <a:t>The 2022 FIFA World Cup had 172 goals in 64 matches.</a:t>
-            </a:r>
-          </a:p>
-        </p:txBody>
-      </p:sp>
-      <p:sp>
-        <p:nvSpPr>
-          <p:cNvPr id="9" name="Numbers">
-            <a:extLst>
-              <a:ext uri="{FF2B5EF4-FFF2-40B4-BE49-F238E27FC236}">
-                <a16:creationId xmlns:a16="http://schemas.microsoft.com/office/drawing/2014/main" id="{C419F151-05B2-3E4B-BAE8-BB1F06D9D1FD}"/>
-              </a:ext>
-            </a:extLst>
-          </p:cNvPr>
-          <p:cNvSpPr txBox="1"/>
-          <p:nvPr/>
-        </p:nvSpPr>
-        <p:spPr>
-          <a:xfrm>
-            <a:off x="762000" y="2286000"/>
-            <a:ext cx="10668000" cy="400110"/>
-          </a:xfrm>
-          <a:prstGeom prst="rect">
-            <a:avLst/>
-          </a:prstGeom>
-          <a:noFill/>
-        </p:spPr>
-        <p:txBody>
-          <a:bodyPr vert="horz" wrap="square" rtlCol="0">
-            <a:spAutoFit/>
-          </a:bodyPr>
-          <a:lstStyle/>
-          <a:p>
-            <a:pPr>
-              <a:spcAft>
-                <a:spcPts val="200"/>
-              </a:spcAft>
-            </a:pPr>
-            <a:r>
-              <a:rPr lang="en-US" sz="2000" b="1">
-                <a:solidFill>
-                  <a:srgbClr val="000000"/>
-                </a:solidFill>
-                <a:latin typeface="Calibri" panose="020F0502020204030204" pitchFamily="34" charset="0"/>
-              </a:rPr>
-              <a:t>λ = 172 / 64 ≈ 2.69 goals per match;     X = goals in one match</a:t>
-            </a:r>
-          </a:p>
-        </p:txBody>
-      </p:sp>
-      <p:sp>
-        <p:nvSpPr>
-          <p:cNvPr id="10" name="Question">
-            <a:extLst>
-              <a:ext uri="{FF2B5EF4-FFF2-40B4-BE49-F238E27FC236}">
-                <a16:creationId xmlns:a16="http://schemas.microsoft.com/office/drawing/2014/main" id="{B31E395F-B84E-D1E9-D22A-222467FC4105}"/>
-              </a:ext>
-            </a:extLst>
-          </p:cNvPr>
-          <p:cNvSpPr txBox="1"/>
-          <p:nvPr/>
-        </p:nvSpPr>
-        <p:spPr>
-          <a:xfrm>
-            <a:off x="762000" y="2711510"/>
-            <a:ext cx="10668000" cy="974626"/>
-          </a:xfrm>
-          <a:prstGeom prst="rect">
-            <a:avLst/>
-          </a:prstGeom>
-          <a:noFill/>
-        </p:spPr>
-        <p:txBody>
-          <a:bodyPr vert="horz" wrap="square" rtlCol="0">
-            <a:spAutoFit/>
-          </a:bodyPr>
-          <a:lstStyle/>
-          <a:p>
-            <a:pPr>
-              <a:spcAft>
-                <a:spcPts val="200"/>
-              </a:spcAft>
-            </a:pPr>
-            <a:r>
-              <a:rPr lang="en-US" b="1">
-                <a:solidFill>
-                  <a:srgbClr val="C00000"/>
-                </a:solidFill>
-                <a:latin typeface="Calibri" panose="020F0502020204030204" pitchFamily="34" charset="0"/>
-              </a:rPr>
-              <a:t>(a)  What is P(X = 0)?</a:t>
-            </a:r>
-          </a:p>
-          <a:p>
-            <a:pPr>
-              <a:spcAft>
-                <a:spcPts val="200"/>
-              </a:spcAft>
-            </a:pPr>
-            <a:r>
-              <a:rPr lang="en-US" b="1">
-                <a:solidFill>
-                  <a:srgbClr val="C00000"/>
-                </a:solidFill>
-                <a:latin typeface="Calibri" panose="020F0502020204030204" pitchFamily="34" charset="0"/>
-              </a:rPr>
-              <a:t>(b)  How many of the 64 matches does the model expect to end 0–0?  (There were 7.)</a:t>
-            </a:r>
-          </a:p>
-          <a:p>
-            <a:pPr>
-              <a:spcAft>
-                <a:spcPts val="200"/>
-              </a:spcAft>
-            </a:pPr>
-            <a:r>
-              <a:rPr lang="en-US" b="1">
-                <a:solidFill>
-                  <a:srgbClr val="C00000"/>
-                </a:solidFill>
-                <a:latin typeface="Calibri" panose="020F0502020204030204" pitchFamily="34" charset="0"/>
-              </a:rPr>
-              <a:t>(c)  What is λ for one 45-minute half, and P(no goals in a half)?</a:t>
-            </a:r>
-          </a:p>
-        </p:txBody>
-      </p:sp>
-      <p:sp>
-        <p:nvSpPr>
-          <p:cNvPr id="11" name="Result">
-            <a:extLst>
-              <a:ext uri="{FF2B5EF4-FFF2-40B4-BE49-F238E27FC236}">
-                <a16:creationId xmlns:a16="http://schemas.microsoft.com/office/drawing/2014/main" id="{5A70F68E-0D93-07B8-82B2-4D8F2F681D0D}"/>
-              </a:ext>
-            </a:extLst>
-          </p:cNvPr>
-          <p:cNvSpPr/>
-          <p:nvPr/>
-        </p:nvSpPr>
-        <p:spPr>
-          <a:xfrm>
-            <a:off x="762000" y="3838536"/>
-            <a:ext cx="10668000" cy="1098054"/>
-          </a:xfrm>
-          <a:prstGeom prst="roundRect">
-            <a:avLst>
-              <a:gd name="adj" fmla="val 4000"/>
-            </a:avLst>
-          </a:prstGeom>
-          <a:solidFill>
-            <a:srgbClr val="F2F6FC"/>
-          </a:solidFill>
-          <a:ln w="15875">
-            <a:solidFill>
-              <a:srgbClr val="4472C4"/>
-            </a:solidFill>
-          </a:ln>
-        </p:spPr>
-        <p:style>
-          <a:lnRef idx="2">
-            <a:schemeClr val="accent1">
-              <a:shade val="15000"/>
-            </a:schemeClr>
-          </a:lnRef>
-          <a:fillRef idx="1">
-            <a:schemeClr val="accent1"/>
-          </a:fillRef>
-          <a:effectRef idx="0">
-            <a:schemeClr val="accent1"/>
-          </a:effectRef>
-          <a:fontRef idx="minor">
-            <a:schemeClr val="lt1"/>
-          </a:fontRef>
-        </p:style>
-        <p:txBody>
-          <a:bodyPr wrap="square" lIns="152400" tIns="76200" rIns="152400" bIns="76200" rtlCol="0" anchor="ctr">
-            <a:spAutoFit/>
-          </a:bodyPr>
-          <a:lstStyle/>
-          <a:p>
-            <a:r>
-              <a:rPr lang="en-US" sz="2000" b="1">
-                <a:solidFill>
-                  <a:srgbClr val="C00000"/>
-                </a:solidFill>
-                <a:latin typeface="Calibri" panose="020F0502020204030204" pitchFamily="34" charset="0"/>
-              </a:rPr>
-              <a:t>(a)  e</a:t>
-            </a:r>
-            <a:r>
-              <a:rPr lang="en-US" sz="2000" b="1" baseline="30000">
-                <a:solidFill>
-                  <a:srgbClr val="C00000"/>
-                </a:solidFill>
-                <a:latin typeface="Calibri" panose="020F0502020204030204" pitchFamily="34" charset="0"/>
-              </a:rPr>
-              <a:t>−2.69</a:t>
-            </a:r>
-            <a:r>
-              <a:rPr lang="en-US" sz="2000" b="1">
-                <a:solidFill>
-                  <a:srgbClr val="C00000"/>
-                </a:solidFill>
-                <a:latin typeface="Calibri" panose="020F0502020204030204" pitchFamily="34" charset="0"/>
-              </a:rPr>
-              <a:t> ≈ 0.068</a:t>
-            </a:r>
-          </a:p>
-          <a:p>
-            <a:r>
-              <a:rPr lang="en-US" sz="2000" b="1">
-                <a:solidFill>
-                  <a:srgbClr val="C00000"/>
-                </a:solidFill>
-                <a:latin typeface="Calibri" panose="020F0502020204030204" pitchFamily="34" charset="0"/>
-              </a:rPr>
-              <a:t>(b)  64 × 0.068 ≈ 4.4:  close, but a model is never a perfect fit</a:t>
-            </a:r>
-          </a:p>
-          <a:p>
-            <a:r>
-              <a:rPr lang="en-US" sz="2000" b="1">
-                <a:solidFill>
-                  <a:srgbClr val="C00000"/>
-                </a:solidFill>
-                <a:latin typeface="Calibri" panose="020F0502020204030204" pitchFamily="34" charset="0"/>
-              </a:rPr>
-              <a:t>(c)  λ = 2.69 / 2 ≈ 1.34,     P(X = 0) = e</a:t>
-            </a:r>
-            <a:r>
-              <a:rPr lang="en-US" sz="2000" b="1" baseline="30000">
-                <a:solidFill>
-                  <a:srgbClr val="C00000"/>
-                </a:solidFill>
-                <a:latin typeface="Calibri" panose="020F0502020204030204" pitchFamily="34" charset="0"/>
-              </a:rPr>
-              <a:t>−1.34</a:t>
-            </a:r>
-            <a:r>
-              <a:rPr lang="en-US" sz="2000" b="1">
-                <a:solidFill>
-                  <a:srgbClr val="C00000"/>
-                </a:solidFill>
-                <a:latin typeface="Calibri" panose="020F0502020204030204" pitchFamily="34" charset="0"/>
-              </a:rPr>
-              <a:t> ≈ 0.26</a:t>
-            </a:r>
-          </a:p>
-        </p:txBody>
-      </p:sp>
-    </p:spTree>
-    <p:extLst>
-      <p:ext uri="{BB962C8B-B14F-4D97-AF65-F5344CB8AC3E}">
-        <p14:creationId xmlns:p14="http://schemas.microsoft.com/office/powerpoint/2010/main" val="1954285749"/>
-      </p:ext>
-    </p:extLst>
-  </p:cSld>
-  <p:clrMapOvr>
-    <a:masterClrMapping/>
-  </p:clrMapOvr>
-  <p:timing>
-    <p:tnLst>
-      <p:par>
-        <p:cTn id="1" dur="indefinite" restart="never" nodeType="tmRoot">
-          <p:childTnLst>
-            <p:seq concurrent="1" nextAc="seek">
-              <p:cTn id="2" dur="indefinite" nodeType="mainSeq">
-                <p:childTnLst>
-                  <p:par>
-                    <p:cTn id="3" fill="hold">
-                      <p:stCondLst>
-                        <p:cond delay="indefinite"/>
-                      </p:stCondLst>
-                      <p:childTnLst>
-                        <p:par>
-                          <p:cTn id="4" fill="hold">
-                            <p:stCondLst>
-                              <p:cond delay="0"/>
-                            </p:stCondLst>
-                            <p:childTnLst>
-                              <p:par>
-                                <p:cTn id="5" presetID="1" presetClass="entr" presetSubtype="0" fill="hold" grpId="0" nodeType="clickEffect">
-                                  <p:stCondLst>
-                                    <p:cond delay="0"/>
-                                  </p:stCondLst>
-                                  <p:childTnLst>
-                                    <p:set>
-                                      <p:cBhvr>
-                                        <p:cTn id="6" dur="1" fill="hold">
-                                          <p:stCondLst>
-                                            <p:cond delay="0"/>
-                                          </p:stCondLst>
-                                        </p:cTn>
-                                        <p:tgtEl>
-                                          <p:spTgt spid="11"/>
-                                        </p:tgtEl>
-                                        <p:attrNameLst>
-                                          <p:attrName>style.visibility</p:attrName>
-                                        </p:attrNameLst>
-                                      </p:cBhvr>
-                                      <p:to>
-                                        <p:strVal val="visible"/>
-                                      </p:to>
-                                    </p:set>
-                                  </p:childTnLst>
-                                </p:cTn>
-                              </p:par>
-                            </p:childTnLst>
-                          </p:cTn>
-                        </p:par>
-                      </p:childTnLst>
-                    </p:cTn>
-                  </p:par>
-                </p:childTnLst>
-              </p:cTn>
-              <p:prevCondLst>
-                <p:cond evt="onPrev" delay="0">
-                  <p:tgtEl>
-                    <p:sldTgt/>
-                  </p:tgtEl>
-                </p:cond>
-              </p:prevCondLst>
-              <p:nextCondLst>
-                <p:cond evt="onNext" delay="0">
-                  <p:tgtEl>
-                    <p:sldTgt/>
-                  </p:tgtEl>
-                </p:cond>
-              </p:nextCondLst>
-            </p:seq>
-          </p:childTnLst>
-        </p:cTn>
-      </p:par>
-    </p:tnLst>
-    <p:bldLst>
-      <p:bldP spid="11" grpId="0" animBg="1"/>
-    </p:bldLst>
-  </p:timing>
-</p:sld>
-</file>
-
-<file path=ppt/slides/slide16.xml><?xml version="1.0" encoding="utf-8"?>
-<p:sld xmlns:a="http://schemas.openxmlformats.org/drawingml/2006/main" xmlns:r="http://schemas.openxmlformats.org/officeDocument/2006/relationships" xmlns:p="http://schemas.openxmlformats.org/presentationml/2006/main">
-  <p:cSld>
-    <p:spTree>
-      <p:nvGrpSpPr>
-        <p:cNvPr id="1" name=""/>
-        <p:cNvGrpSpPr/>
-        <p:nvPr/>
-      </p:nvGrpSpPr>
-      <p:grpSpPr>
-        <a:xfrm>
-          <a:off x="0" y="0"/>
-          <a:ext cx="0" cy="0"/>
-          <a:chOff x="0" y="0"/>
-          <a:chExt cx="0" cy="0"/>
-        </a:xfrm>
-      </p:grpSpPr>
-      <p:sp>
-        <p:nvSpPr>
-          <p:cNvPr id="2" name="Title 1">
-            <a:extLst>
-              <a:ext uri="{FF2B5EF4-FFF2-40B4-BE49-F238E27FC236}">
-                <a16:creationId xmlns:a16="http://schemas.microsoft.com/office/drawing/2014/main" id="{C08D30B1-1864-30EF-7EAB-9BEE656C0012}"/>
-              </a:ext>
-            </a:extLst>
-          </p:cNvPr>
-          <p:cNvSpPr>
-            <a:spLocks noGrp="1"/>
-          </p:cNvSpPr>
-          <p:nvPr>
-            <p:ph type="title"/>
-          </p:nvPr>
-        </p:nvSpPr>
-        <p:spPr/>
-        <p:txBody>
-          <a:bodyPr>
-            <a:noAutofit/>
-          </a:bodyPr>
-          <a:lstStyle/>
-          <a:p>
-            <a:r>
-              <a:rPr lang="en-US">
-                <a:solidFill>
-                  <a:srgbClr val="1F3864"/>
-                </a:solidFill>
-              </a:rPr>
-              <a:t>Goals per match: the Poisson model</a:t>
-            </a:r>
-          </a:p>
-        </p:txBody>
-      </p:sp>
-      <p:sp>
-        <p:nvSpPr>
-          <p:cNvPr id="4" name="Slide Number Placeholder 3">
-            <a:extLst>
-              <a:ext uri="{FF2B5EF4-FFF2-40B4-BE49-F238E27FC236}">
-                <a16:creationId xmlns:a16="http://schemas.microsoft.com/office/drawing/2014/main" id="{3F875068-D051-44AE-498E-1BEBEDE3A7C8}"/>
-              </a:ext>
-            </a:extLst>
-          </p:cNvPr>
-          <p:cNvSpPr>
-            <a:spLocks noGrp="1"/>
-          </p:cNvSpPr>
-          <p:nvPr>
-            <p:ph type="sldNum" sz="quarter" idx="12"/>
-          </p:nvPr>
-        </p:nvSpPr>
-        <p:spPr/>
-        <p:txBody>
-          <a:bodyPr/>
-          <a:lstStyle/>
-          <a:p>
-            <a:fld id="{A80A81DD-F10A-4B1C-963A-0ABBB4865886}" type="slidenum">
-              <a:rPr lang="en-US" sz="1600" smtClean="0"/>
-              <a:t>16</a:t>
-            </a:fld>
-            <a:endParaRPr lang="en-US" sz="1600"/>
-          </a:p>
-        </p:txBody>
-      </p:sp>
-      <p:sp>
-        <p:nvSpPr>
-          <p:cNvPr id="3" name="Title rule">
-            <a:extLst>
-              <a:ext uri="{FF2B5EF4-FFF2-40B4-BE49-F238E27FC236}">
-                <a16:creationId xmlns:a16="http://schemas.microsoft.com/office/drawing/2014/main" id="{30656AA8-9645-F028-C769-A313710853CC}"/>
-              </a:ext>
-            </a:extLst>
-          </p:cNvPr>
-          <p:cNvSpPr/>
-          <p:nvPr/>
-        </p:nvSpPr>
-        <p:spPr>
-          <a:xfrm>
-            <a:off x="838200" y="1600200"/>
-            <a:ext cx="10515600" cy="38100"/>
-          </a:xfrm>
-          <a:prstGeom prst="rect">
-            <a:avLst/>
-          </a:prstGeom>
-          <a:solidFill>
-            <a:srgbClr val="4472C4"/>
-          </a:solidFill>
-          <a:ln w="12700" cap="flat" cmpd="sng" algn="ctr">
-            <a:noFill/>
-            <a:prstDash val="solid"/>
-            <a:miter lim="800000"/>
-          </a:ln>
-          <a:effectLst/>
-          <a:extLst>
-            <a:ext uri="{91240B29-F687-4F45-9708-019B960494DF}">
-              <a14:hiddenLine xmlns:a14="http://schemas.microsoft.com/office/drawing/2010/main" w="12700" cap="flat" cmpd="sng" algn="ctr">
-                <a:solidFill>
-                  <a:schemeClr val="accent1">
-                    <a:shade val="15000"/>
-                  </a:schemeClr>
-                </a:solidFill>
-                <a:prstDash val="solid"/>
-                <a:miter lim="800000"/>
-              </a14:hiddenLine>
-            </a:ext>
-          </a:extLst>
-        </p:spPr>
-        <p:style>
-          <a:lnRef idx="2">
-            <a:schemeClr val="accent1">
-              <a:shade val="15000"/>
-            </a:schemeClr>
-          </a:lnRef>
-          <a:fillRef idx="1">
-            <a:schemeClr val="accent1"/>
-          </a:fillRef>
-          <a:effectRef idx="0">
-            <a:schemeClr val="accent1"/>
-          </a:effectRef>
-          <a:fontRef idx="minor">
-            <a:schemeClr val="lt1"/>
-          </a:fontRef>
-        </p:style>
-        <p:txBody>
-          <a:bodyPr rtlCol="0" anchor="ctr"/>
-          <a:lstStyle/>
-          <a:p>
-            <a:pPr algn="ctr"/>
-            <a:endParaRPr lang="en-US"/>
-          </a:p>
-        </p:txBody>
-      </p:sp>
-      <p:sp>
-        <p:nvSpPr>
-          <p:cNvPr id="8" name="Context">
-            <a:extLst>
-              <a:ext uri="{FF2B5EF4-FFF2-40B4-BE49-F238E27FC236}">
-                <a16:creationId xmlns:a16="http://schemas.microsoft.com/office/drawing/2014/main" id="{71E3EA8C-31B4-DAD4-BC4A-65D72E59AD46}"/>
-              </a:ext>
-            </a:extLst>
-          </p:cNvPr>
-          <p:cNvSpPr txBox="1"/>
-          <p:nvPr/>
-        </p:nvSpPr>
-        <p:spPr>
-          <a:xfrm>
-            <a:off x="762000" y="1879600"/>
-            <a:ext cx="10668000" cy="381000"/>
-          </a:xfrm>
-          <a:prstGeom prst="rect">
-            <a:avLst/>
-          </a:prstGeom>
-          <a:noFill/>
-        </p:spPr>
-        <p:txBody>
-          <a:bodyPr vert="horz" wrap="square" rtlCol="0">
-            <a:spAutoFit/>
-          </a:bodyPr>
-          <a:lstStyle/>
-          <a:p>
-            <a:pPr>
-              <a:spcAft>
-                <a:spcPts val="200"/>
-              </a:spcAft>
-            </a:pPr>
-            <a:r>
-              <a:rPr lang="en-US">
-                <a:solidFill>
-                  <a:srgbClr val="000000"/>
-                </a:solidFill>
-                <a:latin typeface="Calibri" panose="020F0502020204030204" pitchFamily="34" charset="0"/>
-              </a:rPr>
-              <a:t>X ~ Poisson(λ = 2.69): the probability of each number of goals in a match.</a:t>
-            </a:r>
-          </a:p>
-        </p:txBody>
-      </p:sp>
-      <p:sp>
-        <p:nvSpPr>
-          <p:cNvPr id="10" name="Question">
-            <a:extLst>
-              <a:ext uri="{FF2B5EF4-FFF2-40B4-BE49-F238E27FC236}">
-                <a16:creationId xmlns:a16="http://schemas.microsoft.com/office/drawing/2014/main" id="{B31E395F-B84E-D1E9-D22A-222467FC4105}"/>
-              </a:ext>
-            </a:extLst>
-          </p:cNvPr>
-          <p:cNvSpPr txBox="1"/>
-          <p:nvPr/>
-        </p:nvSpPr>
-        <p:spPr>
-          <a:xfrm>
-            <a:off x="762000" y="2286000"/>
-            <a:ext cx="10668000" cy="369332"/>
-          </a:xfrm>
-          <a:prstGeom prst="rect">
-            <a:avLst/>
-          </a:prstGeom>
-          <a:noFill/>
-        </p:spPr>
-        <p:txBody>
-          <a:bodyPr vert="horz" wrap="square" rtlCol="0">
-            <a:spAutoFit/>
-          </a:bodyPr>
-          <a:lstStyle/>
-          <a:p>
-            <a:pPr>
-              <a:spcAft>
-                <a:spcPts val="200"/>
-              </a:spcAft>
-            </a:pPr>
-            <a:r>
-              <a:rPr lang="en-US" b="1">
-                <a:solidFill>
-                  <a:srgbClr val="C00000"/>
-                </a:solidFill>
-                <a:latin typeface="Calibri" panose="020F0502020204030204" pitchFamily="34" charset="0"/>
-              </a:rPr>
-              <a:t>Which number of goals is most likely? Is the distribution symmetric?</a:t>
-            </a:r>
-          </a:p>
-        </p:txBody>
-      </p:sp>
-      <p:sp>
-        <p:nvSpPr>
-          <p:cNvPr id="11" name="Result">
-            <a:extLst>
-              <a:ext uri="{FF2B5EF4-FFF2-40B4-BE49-F238E27FC236}">
-                <a16:creationId xmlns:a16="http://schemas.microsoft.com/office/drawing/2014/main" id="{5A70F68E-0D93-07B8-82B2-4D8F2F681D0D}"/>
-              </a:ext>
-            </a:extLst>
-          </p:cNvPr>
-          <p:cNvSpPr/>
-          <p:nvPr/>
-        </p:nvSpPr>
-        <p:spPr>
-          <a:xfrm>
-            <a:off x="762000" y="5639832"/>
-            <a:ext cx="10668000" cy="470595"/>
-          </a:xfrm>
-          <a:prstGeom prst="roundRect">
-            <a:avLst>
-              <a:gd name="adj" fmla="val 4000"/>
-            </a:avLst>
-          </a:prstGeom>
-          <a:solidFill>
-            <a:srgbClr val="F2F6FC"/>
-          </a:solidFill>
-          <a:ln w="15875">
-            <a:solidFill>
-              <a:srgbClr val="4472C4"/>
-            </a:solidFill>
-          </a:ln>
-        </p:spPr>
-        <p:style>
-          <a:lnRef idx="2">
-            <a:schemeClr val="accent1">
-              <a:shade val="15000"/>
-            </a:schemeClr>
-          </a:lnRef>
-          <a:fillRef idx="1">
-            <a:schemeClr val="accent1"/>
-          </a:fillRef>
-          <a:effectRef idx="0">
-            <a:schemeClr val="accent1"/>
-          </a:effectRef>
-          <a:fontRef idx="minor">
-            <a:schemeClr val="lt1"/>
-          </a:fontRef>
-        </p:style>
-        <p:txBody>
-          <a:bodyPr wrap="square" lIns="152400" tIns="76200" rIns="152400" bIns="76200" rtlCol="0" anchor="ctr">
-            <a:spAutoFit/>
-          </a:bodyPr>
-          <a:lstStyle/>
-          <a:p>
-            <a:r>
-              <a:rPr lang="en-US" sz="2000" b="1">
-                <a:solidFill>
-                  <a:srgbClr val="C00000"/>
-                </a:solidFill>
-                <a:latin typeface="Calibri" panose="020F0502020204030204" pitchFamily="34" charset="0"/>
-              </a:rPr>
-              <a:t>Two goals (0.25), then three (0.22);  skewed right:  X cannot go below 0 but has no upper limit</a:t>
-            </a:r>
-          </a:p>
-        </p:txBody>
-      </p:sp>
-      <p:pic>
-        <p:nvPicPr>
-          <p:cNvPr id="6" name="l15_poisson_goals.png">
-            <a:extLst>
-              <a:ext uri="{FF2B5EF4-FFF2-40B4-BE49-F238E27FC236}">
-                <a16:creationId xmlns:a16="http://schemas.microsoft.com/office/drawing/2014/main" id="{AC90B376-2A68-DB13-3770-4696990C57A0}"/>
-              </a:ext>
-            </a:extLst>
-          </p:cNvPr>
-          <p:cNvPicPr>
-            <a:picLocks/>
-          </p:cNvPicPr>
-          <p:nvPr/>
-        </p:nvPicPr>
-        <p:blipFill>
-          <a:blip r:embed="rId2">
-            <a:extLst>
-              <a:ext uri="{28A0092B-C50C-407E-A947-70E740481C1C}">
-                <a14:useLocalDpi xmlns:a14="http://schemas.microsoft.com/office/drawing/2010/main" val="0"/>
-              </a:ext>
-            </a:extLst>
-          </a:blip>
-          <a:stretch>
-            <a:fillRect/>
-          </a:stretch>
-        </p:blipFill>
-        <p:spPr>
-          <a:xfrm>
-            <a:off x="2032000" y="2706132"/>
-            <a:ext cx="8128000" cy="2857500"/>
-          </a:xfrm>
-          <a:prstGeom prst="rect">
-            <a:avLst/>
-          </a:prstGeom>
-        </p:spPr>
-      </p:pic>
-    </p:spTree>
-    <p:extLst>
-      <p:ext uri="{BB962C8B-B14F-4D97-AF65-F5344CB8AC3E}">
-        <p14:creationId xmlns:p14="http://schemas.microsoft.com/office/powerpoint/2010/main" val="4138504504"/>
-      </p:ext>
-    </p:extLst>
-  </p:cSld>
-  <p:clrMapOvr>
-    <a:masterClrMapping/>
-  </p:clrMapOvr>
-  <p:timing>
-    <p:tnLst>
-      <p:par>
-        <p:cTn id="1" dur="indefinite" restart="never" nodeType="tmRoot">
-          <p:childTnLst>
-            <p:seq concurrent="1" nextAc="seek">
-              <p:cTn id="2" dur="indefinite" nodeType="mainSeq">
-                <p:childTnLst>
-                  <p:par>
-                    <p:cTn id="3" fill="hold">
-                      <p:stCondLst>
-                        <p:cond delay="indefinite"/>
-                      </p:stCondLst>
-                      <p:childTnLst>
-                        <p:par>
-                          <p:cTn id="4" fill="hold">
-                            <p:stCondLst>
-                              <p:cond delay="0"/>
-                            </p:stCondLst>
-                            <p:childTnLst>
-                              <p:par>
-                                <p:cTn id="5" presetID="1" presetClass="entr" presetSubtype="0" fill="hold" grpId="0" nodeType="clickEffect">
-                                  <p:stCondLst>
-                                    <p:cond delay="0"/>
-                                  </p:stCondLst>
-                                  <p:childTnLst>
-                                    <p:set>
-                                      <p:cBhvr>
-                                        <p:cTn id="6" dur="1" fill="hold">
-                                          <p:stCondLst>
-                                            <p:cond delay="0"/>
-                                          </p:stCondLst>
-                                        </p:cTn>
-                                        <p:tgtEl>
-                                          <p:spTgt spid="11"/>
-                                        </p:tgtEl>
-                                        <p:attrNameLst>
-                                          <p:attrName>style.visibility</p:attrName>
-                                        </p:attrNameLst>
-                                      </p:cBhvr>
-                                      <p:to>
-                                        <p:strVal val="visible"/>
-                                      </p:to>
-                                    </p:set>
-                                  </p:childTnLst>
-                                </p:cTn>
-                              </p:par>
-                            </p:childTnLst>
-                          </p:cTn>
-                        </p:par>
-                      </p:childTnLst>
-                    </p:cTn>
-                  </p:par>
-                </p:childTnLst>
-              </p:cTn>
-              <p:prevCondLst>
-                <p:cond evt="onPrev" delay="0">
-                  <p:tgtEl>
-                    <p:sldTgt/>
-                  </p:tgtEl>
-                </p:cond>
-              </p:prevCondLst>
-              <p:nextCondLst>
-                <p:cond evt="onNext" delay="0">
-                  <p:tgtEl>
-                    <p:sldTgt/>
-                  </p:tgtEl>
-                </p:cond>
-              </p:nextCondLst>
-            </p:seq>
-          </p:childTnLst>
-        </p:cTn>
-      </p:par>
-    </p:tnLst>
-    <p:bldLst>
-      <p:bldP spid="11" grpId="0" animBg="1"/>
-    </p:bldLst>
-  </p:timing>
-</p:sld>
-</file>
-
-<file path=ppt/slides/slide17.xml><?xml version="1.0" encoding="utf-8"?>
-<p:sld xmlns:a="http://schemas.openxmlformats.org/drawingml/2006/main" xmlns:r="http://schemas.openxmlformats.org/officeDocument/2006/relationships" xmlns:p="http://schemas.openxmlformats.org/presentationml/2006/main">
-  <p:cSld>
-    <p:spTree>
-      <p:nvGrpSpPr>
-        <p:cNvPr id="1" name=""/>
-        <p:cNvGrpSpPr/>
-        <p:nvPr/>
-      </p:nvGrpSpPr>
-      <p:grpSpPr>
-        <a:xfrm>
-          <a:off x="0" y="0"/>
-          <a:ext cx="0" cy="0"/>
-          <a:chOff x="0" y="0"/>
-          <a:chExt cx="0" cy="0"/>
-        </a:xfrm>
-      </p:grpSpPr>
-      <p:sp>
-        <p:nvSpPr>
-          <p:cNvPr id="2" name="Title 1">
-            <a:extLst>
-              <a:ext uri="{FF2B5EF4-FFF2-40B4-BE49-F238E27FC236}">
-                <a16:creationId xmlns:a16="http://schemas.microsoft.com/office/drawing/2014/main" id="{D617AB41-6AD1-9EF2-7F95-46A904399681}"/>
-              </a:ext>
-            </a:extLst>
-          </p:cNvPr>
-          <p:cNvSpPr>
-            <a:spLocks noGrp="1"/>
-          </p:cNvSpPr>
-          <p:nvPr>
-            <p:ph type="title"/>
-          </p:nvPr>
-        </p:nvSpPr>
-        <p:spPr/>
-        <p:txBody>
-          <a:bodyPr>
-            <a:noAutofit/>
-          </a:bodyPr>
-          <a:lstStyle/>
-          <a:p>
-            <a:r>
-              <a:rPr lang="en-US">
-                <a:solidFill>
-                  <a:srgbClr val="1F3864"/>
-                </a:solidFill>
-              </a:rPr>
-              <a:t>Continuous random variables</a:t>
-            </a:r>
-          </a:p>
-        </p:txBody>
-      </p:sp>
-      <p:sp>
-        <p:nvSpPr>
-          <p:cNvPr id="4" name="Slide Number Placeholder 3">
-            <a:extLst>
-              <a:ext uri="{FF2B5EF4-FFF2-40B4-BE49-F238E27FC236}">
-                <a16:creationId xmlns:a16="http://schemas.microsoft.com/office/drawing/2014/main" id="{97D44AE5-98B5-B840-6B8A-D345C7C2E2F0}"/>
-              </a:ext>
-            </a:extLst>
-          </p:cNvPr>
-          <p:cNvSpPr>
-            <a:spLocks noGrp="1"/>
-          </p:cNvSpPr>
-          <p:nvPr>
-            <p:ph type="sldNum" sz="quarter" idx="12"/>
-          </p:nvPr>
-        </p:nvSpPr>
-        <p:spPr/>
-        <p:txBody>
-          <a:bodyPr/>
-          <a:lstStyle/>
-          <a:p>
-            <a:fld id="{A80A81DD-F10A-4B1C-963A-0ABBB4865886}" type="slidenum">
-              <a:rPr lang="en-US" sz="1600" smtClean="0"/>
-              <a:t>17</a:t>
-            </a:fld>
-            <a:endParaRPr lang="en-US" sz="1600"/>
-          </a:p>
-        </p:txBody>
-      </p:sp>
-      <p:sp>
-        <p:nvSpPr>
-          <p:cNvPr id="5" name="TextBox 4">
-            <a:extLst>
-              <a:ext uri="{FF2B5EF4-FFF2-40B4-BE49-F238E27FC236}">
-                <a16:creationId xmlns:a16="http://schemas.microsoft.com/office/drawing/2014/main" id="{A34AAE17-27CE-D7A3-C663-11BB48ACBF5B}"/>
-              </a:ext>
-            </a:extLst>
-          </p:cNvPr>
-          <p:cNvSpPr txBox="1"/>
-          <p:nvPr/>
-        </p:nvSpPr>
-        <p:spPr>
-          <a:xfrm>
-            <a:off x="762000" y="1879600"/>
-            <a:ext cx="10668000" cy="345440"/>
-          </a:xfrm>
-          <a:prstGeom prst="rect">
-            <a:avLst/>
-          </a:prstGeom>
-          <a:noFill/>
-        </p:spPr>
-        <p:txBody>
-          <a:bodyPr vert="horz" wrap="square" rtlCol="0">
-            <a:spAutoFit/>
-          </a:bodyPr>
-          <a:lstStyle/>
-          <a:p>
-            <a:pPr marL="304800" indent="-304800"/>
-            <a:r>
-              <a:rPr lang="en-US" sz="1600">
-                <a:solidFill>
-                  <a:srgbClr val="000000"/>
-                </a:solidFill>
-              </a:rPr>
-              <a:t>density curve  f(x)</a:t>
-            </a:r>
-          </a:p>
-        </p:txBody>
-      </p:sp>
-      <p:sp>
-        <p:nvSpPr>
-          <p:cNvPr id="6" name="TextBox 5">
-            <a:extLst>
-              <a:ext uri="{FF2B5EF4-FFF2-40B4-BE49-F238E27FC236}">
-                <a16:creationId xmlns:a16="http://schemas.microsoft.com/office/drawing/2014/main" id="{E410A0F8-5E1E-9A1D-B64C-50827EE6C9B2}"/>
-              </a:ext>
-            </a:extLst>
-          </p:cNvPr>
-          <p:cNvSpPr txBox="1"/>
-          <p:nvPr/>
-        </p:nvSpPr>
-        <p:spPr>
-          <a:xfrm>
-            <a:off x="1117600" y="2225040"/>
-            <a:ext cx="10312400" cy="338554"/>
-          </a:xfrm>
-          <a:prstGeom prst="rect">
-            <a:avLst/>
-          </a:prstGeom>
-          <a:noFill/>
-        </p:spPr>
-        <p:txBody>
-          <a:bodyPr vert="horz" wrap="square" rtlCol="0">
-            <a:spAutoFit/>
-          </a:bodyPr>
-          <a:lstStyle/>
-          <a:p>
-            <a:r>
-              <a:rPr lang="en-US" sz="1600" b="1">
-                <a:solidFill>
-                  <a:srgbClr val="C00000"/>
-                </a:solidFill>
-              </a:rPr>
-              <a:t>the curve for a continuous X:  it never goes below 0, and the total area under it is 1</a:t>
-            </a:r>
-          </a:p>
-        </p:txBody>
-      </p:sp>
-      <p:sp>
-        <p:nvSpPr>
-          <p:cNvPr id="7" name="TextBox 6">
-            <a:extLst>
-              <a:ext uri="{FF2B5EF4-FFF2-40B4-BE49-F238E27FC236}">
-                <a16:creationId xmlns:a16="http://schemas.microsoft.com/office/drawing/2014/main" id="{47D3CD95-D52E-5227-B663-7C0A72677B6E}"/>
-              </a:ext>
-            </a:extLst>
-          </p:cNvPr>
-          <p:cNvSpPr txBox="1"/>
-          <p:nvPr/>
-        </p:nvSpPr>
-        <p:spPr>
-          <a:xfrm>
-            <a:off x="762000" y="2741394"/>
-            <a:ext cx="10668000" cy="345440"/>
-          </a:xfrm>
-          <a:prstGeom prst="rect">
-            <a:avLst/>
-          </a:prstGeom>
-          <a:noFill/>
-        </p:spPr>
-        <p:txBody>
-          <a:bodyPr vert="horz" wrap="square" rtlCol="0">
-            <a:spAutoFit/>
-          </a:bodyPr>
-          <a:lstStyle/>
-          <a:p>
-            <a:pPr marL="304800" indent="-304800"/>
-            <a:r>
-              <a:rPr lang="en-US" sz="1600">
-                <a:solidFill>
-                  <a:srgbClr val="000000"/>
-                </a:solidFill>
-              </a:rPr>
-              <a:t>probability is area</a:t>
-            </a:r>
-          </a:p>
-        </p:txBody>
-      </p:sp>
-      <p:sp>
-        <p:nvSpPr>
-          <p:cNvPr id="8" name="TextBox 7">
-            <a:extLst>
-              <a:ext uri="{FF2B5EF4-FFF2-40B4-BE49-F238E27FC236}">
-                <a16:creationId xmlns:a16="http://schemas.microsoft.com/office/drawing/2014/main" id="{1CE3E601-601D-C6B1-8265-C079CB8C9269}"/>
-              </a:ext>
-            </a:extLst>
-          </p:cNvPr>
-          <p:cNvSpPr txBox="1"/>
-          <p:nvPr/>
-        </p:nvSpPr>
-        <p:spPr>
-          <a:xfrm>
-            <a:off x="1117600" y="3086834"/>
-            <a:ext cx="10312400" cy="338554"/>
-          </a:xfrm>
-          <a:prstGeom prst="rect">
-            <a:avLst/>
-          </a:prstGeom>
-          <a:noFill/>
-        </p:spPr>
-        <p:txBody>
-          <a:bodyPr vert="horz" wrap="square" rtlCol="0">
-            <a:spAutoFit/>
-          </a:bodyPr>
-          <a:lstStyle/>
-          <a:p>
-            <a:r>
-              <a:rPr lang="en-US" sz="1600" b="1">
-                <a:solidFill>
-                  <a:srgbClr val="C00000"/>
-                </a:solidFill>
-              </a:rPr>
-              <a:t>P(a &lt; X &lt; b) is the area under the curve between a and b;  the height is not a probability</a:t>
-            </a:r>
-          </a:p>
-        </p:txBody>
-      </p:sp>
-      <p:sp>
-        <p:nvSpPr>
-          <p:cNvPr id="9" name="TextBox 8">
-            <a:extLst>
-              <a:ext uri="{FF2B5EF4-FFF2-40B4-BE49-F238E27FC236}">
-                <a16:creationId xmlns:a16="http://schemas.microsoft.com/office/drawing/2014/main" id="{FB002BF4-8037-2F73-E27A-7A453477E389}"/>
-              </a:ext>
-            </a:extLst>
-          </p:cNvPr>
-          <p:cNvSpPr txBox="1"/>
-          <p:nvPr/>
-        </p:nvSpPr>
-        <p:spPr>
-          <a:xfrm>
-            <a:off x="762000" y="3603188"/>
-            <a:ext cx="10668000" cy="345440"/>
-          </a:xfrm>
-          <a:prstGeom prst="rect">
-            <a:avLst/>
-          </a:prstGeom>
-          <a:noFill/>
-        </p:spPr>
-        <p:txBody>
-          <a:bodyPr vert="horz" wrap="square" rtlCol="0">
-            <a:spAutoFit/>
-          </a:bodyPr>
-          <a:lstStyle/>
-          <a:p>
-            <a:pPr marL="304800" indent="-304800"/>
-            <a:r>
-              <a:rPr lang="en-US" sz="1600">
-                <a:solidFill>
-                  <a:srgbClr val="000000"/>
-                </a:solidFill>
-              </a:rPr>
-              <a:t>P(X = c) = 0</a:t>
-            </a:r>
-          </a:p>
-        </p:txBody>
-      </p:sp>
-      <p:sp>
-        <p:nvSpPr>
-          <p:cNvPr id="10" name="TextBox 9">
-            <a:extLst>
-              <a:ext uri="{FF2B5EF4-FFF2-40B4-BE49-F238E27FC236}">
-                <a16:creationId xmlns:a16="http://schemas.microsoft.com/office/drawing/2014/main" id="{10F3B3E3-D27C-E008-C93E-ED70BD2A4754}"/>
-              </a:ext>
-            </a:extLst>
-          </p:cNvPr>
-          <p:cNvSpPr txBox="1"/>
-          <p:nvPr/>
-        </p:nvSpPr>
-        <p:spPr>
-          <a:xfrm>
-            <a:off x="1117600" y="3948628"/>
-            <a:ext cx="10312400" cy="338554"/>
-          </a:xfrm>
-          <a:prstGeom prst="rect">
-            <a:avLst/>
-          </a:prstGeom>
-          <a:noFill/>
-        </p:spPr>
-        <p:txBody>
-          <a:bodyPr vert="horz" wrap="square" rtlCol="0">
-            <a:spAutoFit/>
-          </a:bodyPr>
-          <a:lstStyle/>
-          <a:p>
-            <a:r>
-              <a:rPr lang="en-US" sz="1600" b="1">
-                <a:solidFill>
-                  <a:srgbClr val="C00000"/>
-                </a:solidFill>
-              </a:rPr>
-              <a:t>a single value has no width, so P(X &lt; c) = P(X ≤ c)</a:t>
-            </a:r>
-            <a:endParaRPr lang="en-US" sz="1600" b="1" dirty="0">
-              <a:solidFill>
-                <a:srgbClr val="C00000"/>
-              </a:solidFill>
-            </a:endParaRPr>
-          </a:p>
-        </p:txBody>
-      </p:sp>
-      <p:sp>
-        <p:nvSpPr>
-          <p:cNvPr id="3" name="Title rule">
-            <a:extLst>
-              <a:ext uri="{FF2B5EF4-FFF2-40B4-BE49-F238E27FC236}">
-                <a16:creationId xmlns:a16="http://schemas.microsoft.com/office/drawing/2014/main" id="{B469CAAB-2B69-6863-7C28-0C5959E5734B}"/>
-              </a:ext>
-            </a:extLst>
-          </p:cNvPr>
-          <p:cNvSpPr/>
-          <p:nvPr/>
-        </p:nvSpPr>
-        <p:spPr>
-          <a:xfrm>
-            <a:off x="838200" y="1600200"/>
-            <a:ext cx="10515600" cy="38100"/>
-          </a:xfrm>
-          <a:prstGeom prst="rect">
-            <a:avLst/>
-          </a:prstGeom>
-          <a:solidFill>
-            <a:srgbClr val="4472C4"/>
-          </a:solidFill>
-          <a:ln w="12700" cap="flat" cmpd="sng" algn="ctr">
-            <a:noFill/>
-            <a:prstDash val="solid"/>
-            <a:miter lim="800000"/>
-          </a:ln>
-          <a:effectLst/>
-          <a:extLst>
-            <a:ext uri="{91240B29-F687-4F45-9708-019B960494DF}">
-              <a14:hiddenLine xmlns:a14="http://schemas.microsoft.com/office/drawing/2010/main" w="12700" cap="flat" cmpd="sng" algn="ctr">
-                <a:solidFill>
-                  <a:schemeClr val="accent1">
-                    <a:shade val="15000"/>
-                  </a:schemeClr>
-                </a:solidFill>
-                <a:prstDash val="solid"/>
-                <a:miter lim="800000"/>
-              </a14:hiddenLine>
-            </a:ext>
-          </a:extLst>
-        </p:spPr>
-        <p:style>
-          <a:lnRef idx="2">
-            <a:schemeClr val="accent1">
-              <a:shade val="15000"/>
-            </a:schemeClr>
-          </a:lnRef>
-          <a:fillRef idx="1">
-            <a:schemeClr val="accent1"/>
-          </a:fillRef>
-          <a:effectRef idx="0">
-            <a:schemeClr val="accent1"/>
-          </a:effectRef>
-          <a:fontRef idx="minor">
-            <a:schemeClr val="lt1"/>
-          </a:fontRef>
-        </p:style>
-        <p:txBody>
-          <a:bodyPr rtlCol="0" anchor="ctr"/>
-          <a:lstStyle/>
-          <a:p>
-            <a:pPr algn="ctr"/>
-            <a:endParaRPr lang="en-US"/>
-          </a:p>
-        </p:txBody>
-      </p:sp>
-    </p:spTree>
-    <p:extLst>
-      <p:ext uri="{BB962C8B-B14F-4D97-AF65-F5344CB8AC3E}">
-        <p14:creationId xmlns:p14="http://schemas.microsoft.com/office/powerpoint/2010/main" val="3867227488"/>
-      </p:ext>
-    </p:extLst>
-  </p:cSld>
-  <p:clrMapOvr>
-    <a:masterClrMapping/>
-  </p:clrMapOvr>
-  <p:timing>
-    <p:tnLst>
-      <p:par>
-        <p:cTn id="1" dur="indefinite" restart="never" nodeType="tmRoot">
-          <p:childTnLst>
-            <p:seq concurrent="1" nextAc="seek">
-              <p:cTn id="2" dur="indefinite" nodeType="mainSeq">
-                <p:childTnLst>
-                  <p:par>
-                    <p:cTn id="3" fill="hold">
-                      <p:stCondLst>
-                        <p:cond delay="indefinite"/>
-                      </p:stCondLst>
-                      <p:childTnLst>
-                        <p:par>
-                          <p:cTn id="4" fill="hold">
-                            <p:stCondLst>
-                              <p:cond delay="0"/>
-                            </p:stCondLst>
-                            <p:childTnLst>
-                              <p:par>
-                                <p:cTn id="5" presetID="34" presetClass="entr" presetSubtype="0" fill="hold" grpId="0" nodeType="clickEffect">
-                                  <p:stCondLst>
-                                    <p:cond delay="0"/>
-                                  </p:stCondLst>
-                                  <p:childTnLst>
-                                    <p:set>
-                                      <p:cBhvr>
-                                        <p:cTn id="6" dur="1" fill="hold">
-                                          <p:stCondLst>
-                                            <p:cond delay="0"/>
-                                          </p:stCondLst>
-                                        </p:cTn>
-                                        <p:tgtEl>
-                                          <p:spTgt spid="6"/>
-                                        </p:tgtEl>
-                                        <p:attrNameLst>
-                                          <p:attrName>style.visibility</p:attrName>
-                                        </p:attrNameLst>
-                                      </p:cBhvr>
-                                      <p:to>
-                                        <p:strVal val="visible"/>
-                                      </p:to>
-                                    </p:set>
-                                    <p:anim from="(-#ppt_w/2)" to="(#ppt_x)" calcmode="lin" valueType="num">
-                                      <p:cBhvr>
-                                        <p:cTn id="7" dur="600" fill="hold">
-                                          <p:stCondLst>
-                                            <p:cond delay="0"/>
-                                          </p:stCondLst>
-                                        </p:cTn>
-                                        <p:tgtEl>
-                                          <p:spTgt spid="6"/>
-                                        </p:tgtEl>
-                                        <p:attrNameLst>
-                                          <p:attrName>ppt_x</p:attrName>
-                                        </p:attrNameLst>
-                                      </p:cBhvr>
-                                    </p:anim>
-                                    <p:anim from="0" to="-1.0" calcmode="lin" valueType="num">
-                                      <p:cBhvr>
-                                        <p:cTn id="8" dur="200" decel="50000" autoRev="1" fill="hold">
-                                          <p:stCondLst>
-                                            <p:cond delay="600"/>
-                                          </p:stCondLst>
-                                        </p:cTn>
-                                        <p:tgtEl>
-                                          <p:spTgt spid="6"/>
-                                        </p:tgtEl>
-                                        <p:attrNameLst>
-                                          <p:attrName>xshear</p:attrName>
-                                        </p:attrNameLst>
-                                      </p:cBhvr>
-                                    </p:anim>
-                                    <p:animScale>
-                                      <p:cBhvr>
-                                        <p:cTn id="9" dur="200" decel="100000" autoRev="1" fill="hold">
-                                          <p:stCondLst>
-                                            <p:cond delay="600"/>
-                                          </p:stCondLst>
-                                        </p:cTn>
-                                        <p:tgtEl>
-                                          <p:spTgt spid="6"/>
-                                        </p:tgtEl>
-                                      </p:cBhvr>
-                                      <p:from x="100000" y="100000"/>
-                                      <p:to x="80000" y="100000"/>
-                                    </p:animScale>
-                                    <p:anim by="(#ppt_h/3+#ppt_w*0.1)" calcmode="lin" valueType="num">
-                                      <p:cBhvr additive="sum">
-                                        <p:cTn id="10" dur="200" decel="100000" autoRev="1" fill="hold">
-                                          <p:stCondLst>
-                                            <p:cond delay="600"/>
-                                          </p:stCondLst>
-                                        </p:cTn>
-                                        <p:tgtEl>
-                                          <p:spTgt spid="6"/>
-                                        </p:tgtEl>
-                                        <p:attrNameLst>
-                                          <p:attrName>ppt_x</p:attrName>
-                                        </p:attrNameLst>
-                                      </p:cBhvr>
-                                    </p:anim>
-                                  </p:childTnLst>
-                                </p:cTn>
-                              </p:par>
-                            </p:childTnLst>
-                          </p:cTn>
-                        </p:par>
-                      </p:childTnLst>
-                    </p:cTn>
-                  </p:par>
-                  <p:par>
-                    <p:cTn id="11" fill="hold">
-                      <p:stCondLst>
-                        <p:cond delay="indefinite"/>
-                      </p:stCondLst>
-                      <p:childTnLst>
-                        <p:par>
-                          <p:cTn id="12" fill="hold">
-                            <p:stCondLst>
-                              <p:cond delay="0"/>
-                            </p:stCondLst>
-                            <p:childTnLst>
-                              <p:par>
-                                <p:cTn id="13" presetID="34" presetClass="entr" presetSubtype="0" fill="hold" grpId="0" nodeType="clickEffect">
-                                  <p:stCondLst>
-                                    <p:cond delay="0"/>
-                                  </p:stCondLst>
-                                  <p:childTnLst>
-                                    <p:set>
-                                      <p:cBhvr>
-                                        <p:cTn id="14" dur="1" fill="hold">
-                                          <p:stCondLst>
-                                            <p:cond delay="0"/>
-                                          </p:stCondLst>
-                                        </p:cTn>
-                                        <p:tgtEl>
-                                          <p:spTgt spid="8"/>
-                                        </p:tgtEl>
-                                        <p:attrNameLst>
-                                          <p:attrName>style.visibility</p:attrName>
-                                        </p:attrNameLst>
-                                      </p:cBhvr>
-                                      <p:to>
-                                        <p:strVal val="visible"/>
-                                      </p:to>
-                                    </p:set>
-                                    <p:anim from="(-#ppt_w/2)" to="(#ppt_x)" calcmode="lin" valueType="num">
-                                      <p:cBhvr>
-                                        <p:cTn id="15" dur="600" fill="hold">
-                                          <p:stCondLst>
-                                            <p:cond delay="0"/>
-                                          </p:stCondLst>
-                                        </p:cTn>
-                                        <p:tgtEl>
-                                          <p:spTgt spid="8"/>
-                                        </p:tgtEl>
-                                        <p:attrNameLst>
-                                          <p:attrName>ppt_x</p:attrName>
-                                        </p:attrNameLst>
-                                      </p:cBhvr>
-                                    </p:anim>
-                                    <p:anim from="0" to="-1.0" calcmode="lin" valueType="num">
-                                      <p:cBhvr>
-                                        <p:cTn id="16" dur="200" decel="50000" autoRev="1" fill="hold">
-                                          <p:stCondLst>
-                                            <p:cond delay="600"/>
-                                          </p:stCondLst>
-                                        </p:cTn>
-                                        <p:tgtEl>
-                                          <p:spTgt spid="8"/>
-                                        </p:tgtEl>
-                                        <p:attrNameLst>
-                                          <p:attrName>xshear</p:attrName>
-                                        </p:attrNameLst>
-                                      </p:cBhvr>
-                                    </p:anim>
-                                    <p:animScale>
-                                      <p:cBhvr>
-                                        <p:cTn id="17" dur="200" decel="100000" autoRev="1" fill="hold">
-                                          <p:stCondLst>
-                                            <p:cond delay="600"/>
-                                          </p:stCondLst>
-                                        </p:cTn>
-                                        <p:tgtEl>
-                                          <p:spTgt spid="8"/>
-                                        </p:tgtEl>
-                                      </p:cBhvr>
-                                      <p:from x="100000" y="100000"/>
-                                      <p:to x="80000" y="100000"/>
-                                    </p:animScale>
-                                    <p:anim by="(#ppt_h/3+#ppt_w*0.1)" calcmode="lin" valueType="num">
-                                      <p:cBhvr additive="sum">
-                                        <p:cTn id="18" dur="200" decel="100000" autoRev="1" fill="hold">
-                                          <p:stCondLst>
-                                            <p:cond delay="600"/>
-                                          </p:stCondLst>
-                                        </p:cTn>
-                                        <p:tgtEl>
-                                          <p:spTgt spid="8"/>
-                                        </p:tgtEl>
-                                        <p:attrNameLst>
-                                          <p:attrName>ppt_x</p:attrName>
-                                        </p:attrNameLst>
-                                      </p:cBhvr>
-                                    </p:anim>
-                                  </p:childTnLst>
-                                </p:cTn>
-                              </p:par>
-                            </p:childTnLst>
-                          </p:cTn>
-                        </p:par>
-                      </p:childTnLst>
-                    </p:cTn>
-                  </p:par>
-                  <p:par>
-                    <p:cTn id="19" fill="hold">
-                      <p:stCondLst>
-                        <p:cond delay="indefinite"/>
-                      </p:stCondLst>
-                      <p:childTnLst>
-                        <p:par>
-                          <p:cTn id="20" fill="hold">
-                            <p:stCondLst>
-                              <p:cond delay="0"/>
-                            </p:stCondLst>
-                            <p:childTnLst>
-                              <p:par>
-                                <p:cTn id="21" presetID="34" presetClass="entr" presetSubtype="0" fill="hold" grpId="0" nodeType="clickEffect">
-                                  <p:stCondLst>
-                                    <p:cond delay="0"/>
-                                  </p:stCondLst>
-                                  <p:childTnLst>
-                                    <p:set>
-                                      <p:cBhvr>
-                                        <p:cTn id="22" dur="1" fill="hold">
-                                          <p:stCondLst>
-                                            <p:cond delay="0"/>
-                                          </p:stCondLst>
-                                        </p:cTn>
-                                        <p:tgtEl>
-                                          <p:spTgt spid="10"/>
-                                        </p:tgtEl>
-                                        <p:attrNameLst>
-                                          <p:attrName>style.visibility</p:attrName>
-                                        </p:attrNameLst>
-                                      </p:cBhvr>
-                                      <p:to>
-                                        <p:strVal val="visible"/>
-                                      </p:to>
-                                    </p:set>
-                                    <p:anim from="(-#ppt_w/2)" to="(#ppt_x)" calcmode="lin" valueType="num">
-                                      <p:cBhvr>
-                                        <p:cTn id="23" dur="600" fill="hold">
-                                          <p:stCondLst>
-                                            <p:cond delay="0"/>
-                                          </p:stCondLst>
-                                        </p:cTn>
-                                        <p:tgtEl>
-                                          <p:spTgt spid="10"/>
-                                        </p:tgtEl>
-                                        <p:attrNameLst>
-                                          <p:attrName>ppt_x</p:attrName>
-                                        </p:attrNameLst>
-                                      </p:cBhvr>
-                                    </p:anim>
-                                    <p:anim from="0" to="-1.0" calcmode="lin" valueType="num">
-                                      <p:cBhvr>
-                                        <p:cTn id="24" dur="200" decel="50000" autoRev="1" fill="hold">
-                                          <p:stCondLst>
-                                            <p:cond delay="600"/>
-                                          </p:stCondLst>
-                                        </p:cTn>
-                                        <p:tgtEl>
-                                          <p:spTgt spid="10"/>
-                                        </p:tgtEl>
-                                        <p:attrNameLst>
-                                          <p:attrName>xshear</p:attrName>
-                                        </p:attrNameLst>
-                                      </p:cBhvr>
-                                    </p:anim>
-                                    <p:animScale>
-                                      <p:cBhvr>
-                                        <p:cTn id="25" dur="200" decel="100000" autoRev="1" fill="hold">
-                                          <p:stCondLst>
-                                            <p:cond delay="600"/>
-                                          </p:stCondLst>
-                                        </p:cTn>
-                                        <p:tgtEl>
-                                          <p:spTgt spid="10"/>
-                                        </p:tgtEl>
-                                      </p:cBhvr>
-                                      <p:from x="100000" y="100000"/>
-                                      <p:to x="80000" y="100000"/>
-                                    </p:animScale>
-                                    <p:anim by="(#ppt_h/3+#ppt_w*0.1)" calcmode="lin" valueType="num">
-                                      <p:cBhvr additive="sum">
-                                        <p:cTn id="26" dur="200" decel="100000" autoRev="1" fill="hold">
-                                          <p:stCondLst>
-                                            <p:cond delay="600"/>
-                                          </p:stCondLst>
-                                        </p:cTn>
-                                        <p:tgtEl>
-                                          <p:spTgt spid="10"/>
-                                        </p:tgtEl>
-                                        <p:attrNameLst>
-                                          <p:attrName>ppt_x</p:attrName>
-                                        </p:attrNameLst>
-                                      </p:cBhvr>
-                                    </p:anim>
-                                  </p:childTnLst>
-                                </p:cTn>
-                              </p:par>
-                            </p:childTnLst>
-                          </p:cTn>
-                        </p:par>
-                      </p:childTnLst>
-                    </p:cTn>
-                  </p:par>
-                </p:childTnLst>
-              </p:cTn>
-              <p:prevCondLst>
-                <p:cond evt="onPrev" delay="0">
-                  <p:tgtEl>
-                    <p:sldTgt/>
-                  </p:tgtEl>
-                </p:cond>
-              </p:prevCondLst>
-              <p:nextCondLst>
-                <p:cond evt="onNext" delay="0">
-                  <p:tgtEl>
-                    <p:sldTgt/>
-                  </p:tgtEl>
-                </p:cond>
-              </p:nextCondLst>
-            </p:seq>
-          </p:childTnLst>
-        </p:cTn>
-      </p:par>
-    </p:tnLst>
-    <p:bldLst>
-      <p:bldP spid="6" grpId="0"/>
-      <p:bldP spid="8" grpId="0"/>
-      <p:bldP spid="10" grpId="0"/>
-    </p:bldLst>
-  </p:timing>
-</p:sld>
-</file>
-
-<file path=ppt/slides/slide18.xml><?xml version="1.0" encoding="utf-8"?>
-<p:sld xmlns:a="http://schemas.openxmlformats.org/drawingml/2006/main" xmlns:r="http://schemas.openxmlformats.org/officeDocument/2006/relationships" xmlns:p="http://schemas.openxmlformats.org/presentationml/2006/main">
-  <p:cSld>
-    <p:spTree>
-      <p:nvGrpSpPr>
-        <p:cNvPr id="1" name=""/>
-        <p:cNvGrpSpPr/>
-        <p:nvPr/>
-      </p:nvGrpSpPr>
-      <p:grpSpPr>
-        <a:xfrm>
-          <a:off x="0" y="0"/>
-          <a:ext cx="0" cy="0"/>
-          <a:chOff x="0" y="0"/>
-          <a:chExt cx="0" cy="0"/>
-        </a:xfrm>
-      </p:grpSpPr>
-      <p:sp>
-        <p:nvSpPr>
-          <p:cNvPr id="2" name="Title 1">
-            <a:extLst>
-              <a:ext uri="{FF2B5EF4-FFF2-40B4-BE49-F238E27FC236}">
-                <a16:creationId xmlns:a16="http://schemas.microsoft.com/office/drawing/2014/main" id="{C08D30B1-1864-30EF-7EAB-9BEE656C0012}"/>
-              </a:ext>
-            </a:extLst>
-          </p:cNvPr>
-          <p:cNvSpPr>
-            <a:spLocks noGrp="1"/>
-          </p:cNvSpPr>
-          <p:nvPr>
-            <p:ph type="title"/>
-          </p:nvPr>
-        </p:nvSpPr>
-        <p:spPr/>
-        <p:txBody>
-          <a:bodyPr>
-            <a:noAutofit/>
-          </a:bodyPr>
-          <a:lstStyle/>
-          <a:p>
-            <a:r>
-              <a:rPr lang="en-US">
-                <a:solidFill>
-                  <a:srgbClr val="1F3864"/>
-                </a:solidFill>
-              </a:rPr>
-              <a:t>Example: waiting for the shuttle</a:t>
-            </a:r>
-          </a:p>
-        </p:txBody>
-      </p:sp>
-      <p:sp>
-        <p:nvSpPr>
-          <p:cNvPr id="4" name="Slide Number Placeholder 3">
-            <a:extLst>
-              <a:ext uri="{FF2B5EF4-FFF2-40B4-BE49-F238E27FC236}">
-                <a16:creationId xmlns:a16="http://schemas.microsoft.com/office/drawing/2014/main" id="{3F875068-D051-44AE-498E-1BEBEDE3A7C8}"/>
-              </a:ext>
-            </a:extLst>
-          </p:cNvPr>
-          <p:cNvSpPr>
-            <a:spLocks noGrp="1"/>
-          </p:cNvSpPr>
-          <p:nvPr>
-            <p:ph type="sldNum" sz="quarter" idx="12"/>
-          </p:nvPr>
-        </p:nvSpPr>
-        <p:spPr/>
-        <p:txBody>
-          <a:bodyPr/>
-          <a:lstStyle/>
-          <a:p>
-            <a:fld id="{A80A81DD-F10A-4B1C-963A-0ABBB4865886}" type="slidenum">
-              <a:rPr lang="en-US" sz="1600" smtClean="0"/>
-              <a:t>18</a:t>
-            </a:fld>
-            <a:endParaRPr lang="en-US" sz="1600"/>
-          </a:p>
-        </p:txBody>
-      </p:sp>
-      <p:sp>
-        <p:nvSpPr>
-          <p:cNvPr id="3" name="Title rule">
-            <a:extLst>
-              <a:ext uri="{FF2B5EF4-FFF2-40B4-BE49-F238E27FC236}">
-                <a16:creationId xmlns:a16="http://schemas.microsoft.com/office/drawing/2014/main" id="{30656AA8-9645-F028-C769-A313710853CC}"/>
-              </a:ext>
-            </a:extLst>
-          </p:cNvPr>
-          <p:cNvSpPr/>
-          <p:nvPr/>
-        </p:nvSpPr>
-        <p:spPr>
-          <a:xfrm>
-            <a:off x="838200" y="1600200"/>
-            <a:ext cx="10515600" cy="38100"/>
-          </a:xfrm>
-          <a:prstGeom prst="rect">
-            <a:avLst/>
-          </a:prstGeom>
-          <a:solidFill>
-            <a:srgbClr val="4472C4"/>
-          </a:solidFill>
-          <a:ln w="12700" cap="flat" cmpd="sng" algn="ctr">
-            <a:noFill/>
-            <a:prstDash val="solid"/>
-            <a:miter lim="800000"/>
-          </a:ln>
-          <a:effectLst/>
-          <a:extLst>
-            <a:ext uri="{91240B29-F687-4F45-9708-019B960494DF}">
-              <a14:hiddenLine xmlns:a14="http://schemas.microsoft.com/office/drawing/2010/main" w="12700" cap="flat" cmpd="sng" algn="ctr">
-                <a:solidFill>
-                  <a:schemeClr val="accent1">
-                    <a:shade val="15000"/>
-                  </a:schemeClr>
-                </a:solidFill>
-                <a:prstDash val="solid"/>
-                <a:miter lim="800000"/>
-              </a14:hiddenLine>
-            </a:ext>
-          </a:extLst>
-        </p:spPr>
-        <p:style>
-          <a:lnRef idx="2">
-            <a:schemeClr val="accent1">
-              <a:shade val="15000"/>
-            </a:schemeClr>
-          </a:lnRef>
-          <a:fillRef idx="1">
-            <a:schemeClr val="accent1"/>
-          </a:fillRef>
-          <a:effectRef idx="0">
-            <a:schemeClr val="accent1"/>
-          </a:effectRef>
-          <a:fontRef idx="minor">
-            <a:schemeClr val="lt1"/>
-          </a:fontRef>
-        </p:style>
-        <p:txBody>
-          <a:bodyPr rtlCol="0" anchor="ctr"/>
-          <a:lstStyle/>
-          <a:p>
-            <a:pPr algn="ctr"/>
-            <a:endParaRPr lang="en-US"/>
-          </a:p>
-        </p:txBody>
-      </p:sp>
-      <p:sp>
-        <p:nvSpPr>
-          <p:cNvPr id="8" name="Context">
-            <a:extLst>
-              <a:ext uri="{FF2B5EF4-FFF2-40B4-BE49-F238E27FC236}">
-                <a16:creationId xmlns:a16="http://schemas.microsoft.com/office/drawing/2014/main" id="{71E3EA8C-31B4-DAD4-BC4A-65D72E59AD46}"/>
-              </a:ext>
-            </a:extLst>
-          </p:cNvPr>
-          <p:cNvSpPr txBox="1"/>
-          <p:nvPr/>
-        </p:nvSpPr>
-        <p:spPr>
-          <a:xfrm>
-            <a:off x="762000" y="1879600"/>
-            <a:ext cx="10668000" cy="381000"/>
-          </a:xfrm>
-          <a:prstGeom prst="rect">
-            <a:avLst/>
-          </a:prstGeom>
-          <a:noFill/>
-        </p:spPr>
-        <p:txBody>
-          <a:bodyPr vert="horz" wrap="square" rtlCol="0">
-            <a:spAutoFit/>
-          </a:bodyPr>
-          <a:lstStyle/>
-          <a:p>
-            <a:pPr>
-              <a:spcAft>
-                <a:spcPts val="200"/>
-              </a:spcAft>
-            </a:pPr>
-            <a:r>
-              <a:rPr lang="en-US">
-                <a:solidFill>
-                  <a:srgbClr val="000000"/>
-                </a:solidFill>
-                <a:latin typeface="Calibri" panose="020F0502020204030204" pitchFamily="34" charset="0"/>
-              </a:rPr>
-              <a:t>A campus shuttle comes every 20 minutes, and you arrive at a random time.</a:t>
-            </a:r>
-          </a:p>
-        </p:txBody>
-      </p:sp>
-      <p:sp>
-        <p:nvSpPr>
-          <p:cNvPr id="9" name="Numbers">
-            <a:extLst>
-              <a:ext uri="{FF2B5EF4-FFF2-40B4-BE49-F238E27FC236}">
-                <a16:creationId xmlns:a16="http://schemas.microsoft.com/office/drawing/2014/main" id="{C419F151-05B2-3E4B-BAE8-BB1F06D9D1FD}"/>
-              </a:ext>
-            </a:extLst>
-          </p:cNvPr>
-          <p:cNvSpPr txBox="1"/>
-          <p:nvPr/>
-        </p:nvSpPr>
-        <p:spPr>
-          <a:xfrm>
-            <a:off x="762000" y="2286000"/>
-            <a:ext cx="10668000" cy="400110"/>
-          </a:xfrm>
-          <a:prstGeom prst="rect">
-            <a:avLst/>
-          </a:prstGeom>
-          <a:noFill/>
-        </p:spPr>
-        <p:txBody>
-          <a:bodyPr vert="horz" wrap="square" rtlCol="0">
-            <a:spAutoFit/>
-          </a:bodyPr>
-          <a:lstStyle/>
-          <a:p>
-            <a:pPr>
-              <a:spcAft>
-                <a:spcPts val="200"/>
-              </a:spcAft>
-            </a:pPr>
-            <a:r>
-              <a:rPr lang="en-US" sz="2000" b="1">
-                <a:solidFill>
-                  <a:srgbClr val="000000"/>
-                </a:solidFill>
-                <a:latin typeface="Calibri" panose="020F0502020204030204" pitchFamily="34" charset="0"/>
-              </a:rPr>
-              <a:t>X = your wait in minutes:   f(x) = 1/20  for  0 ≤ x ≤ 20</a:t>
-            </a:r>
-          </a:p>
-        </p:txBody>
-      </p:sp>
-      <p:sp>
-        <p:nvSpPr>
-          <p:cNvPr id="10" name="Question">
-            <a:extLst>
-              <a:ext uri="{FF2B5EF4-FFF2-40B4-BE49-F238E27FC236}">
-                <a16:creationId xmlns:a16="http://schemas.microsoft.com/office/drawing/2014/main" id="{B31E395F-B84E-D1E9-D22A-222467FC4105}"/>
-              </a:ext>
-            </a:extLst>
-          </p:cNvPr>
-          <p:cNvSpPr txBox="1"/>
-          <p:nvPr/>
-        </p:nvSpPr>
-        <p:spPr>
-          <a:xfrm>
-            <a:off x="762000" y="2813110"/>
-            <a:ext cx="5461000" cy="974626"/>
-          </a:xfrm>
-          <a:prstGeom prst="rect">
-            <a:avLst/>
-          </a:prstGeom>
-          <a:noFill/>
-        </p:spPr>
-        <p:txBody>
-          <a:bodyPr vert="horz" wrap="square" rtlCol="0">
-            <a:spAutoFit/>
-          </a:bodyPr>
-          <a:lstStyle/>
-          <a:p>
-            <a:pPr>
-              <a:spcAft>
-                <a:spcPts val="200"/>
-              </a:spcAft>
-            </a:pPr>
-            <a:r>
-              <a:rPr lang="en-US" b="1">
-                <a:solidFill>
-                  <a:srgbClr val="C00000"/>
-                </a:solidFill>
-                <a:latin typeface="Calibri" panose="020F0502020204030204" pitchFamily="34" charset="0"/>
-              </a:rPr>
-              <a:t>(a)  What is P(X &lt; 5)?</a:t>
-            </a:r>
-          </a:p>
-          <a:p>
-            <a:pPr>
-              <a:spcAft>
-                <a:spcPts val="200"/>
-              </a:spcAft>
-            </a:pPr>
-            <a:r>
-              <a:rPr lang="en-US" b="1">
-                <a:solidFill>
-                  <a:srgbClr val="C00000"/>
-                </a:solidFill>
-                <a:latin typeface="Calibri" panose="020F0502020204030204" pitchFamily="34" charset="0"/>
-              </a:rPr>
-              <a:t>(b)  What is P(4 &lt; X &lt; 15)?</a:t>
-            </a:r>
-          </a:p>
-          <a:p>
-            <a:pPr>
-              <a:spcAft>
-                <a:spcPts val="200"/>
-              </a:spcAft>
-            </a:pPr>
-            <a:r>
-              <a:rPr lang="en-US" b="1">
-                <a:solidFill>
-                  <a:srgbClr val="C00000"/>
-                </a:solidFill>
-                <a:latin typeface="Calibri" panose="020F0502020204030204" pitchFamily="34" charset="0"/>
-              </a:rPr>
-              <a:t>(c)  What is P(X = 15)?</a:t>
-            </a:r>
-          </a:p>
-        </p:txBody>
-      </p:sp>
-      <p:sp>
-        <p:nvSpPr>
-          <p:cNvPr id="11" name="Result">
-            <a:extLst>
-              <a:ext uri="{FF2B5EF4-FFF2-40B4-BE49-F238E27FC236}">
-                <a16:creationId xmlns:a16="http://schemas.microsoft.com/office/drawing/2014/main" id="{5A70F68E-0D93-07B8-82B2-4D8F2F681D0D}"/>
-              </a:ext>
-            </a:extLst>
-          </p:cNvPr>
-          <p:cNvSpPr/>
-          <p:nvPr/>
-        </p:nvSpPr>
-        <p:spPr>
-          <a:xfrm>
-            <a:off x="762000" y="5035610"/>
-            <a:ext cx="10668000" cy="1098054"/>
-          </a:xfrm>
-          <a:prstGeom prst="roundRect">
-            <a:avLst>
-              <a:gd name="adj" fmla="val 4000"/>
-            </a:avLst>
-          </a:prstGeom>
-          <a:solidFill>
-            <a:srgbClr val="F2F6FC"/>
-          </a:solidFill>
-          <a:ln w="15875">
-            <a:solidFill>
-              <a:srgbClr val="4472C4"/>
-            </a:solidFill>
-          </a:ln>
-        </p:spPr>
-        <p:style>
-          <a:lnRef idx="2">
-            <a:schemeClr val="accent1">
-              <a:shade val="15000"/>
-            </a:schemeClr>
-          </a:lnRef>
-          <a:fillRef idx="1">
-            <a:schemeClr val="accent1"/>
-          </a:fillRef>
-          <a:effectRef idx="0">
-            <a:schemeClr val="accent1"/>
-          </a:effectRef>
-          <a:fontRef idx="minor">
-            <a:schemeClr val="lt1"/>
-          </a:fontRef>
-        </p:style>
-        <p:txBody>
-          <a:bodyPr wrap="square" lIns="152400" tIns="76200" rIns="152400" bIns="76200" rtlCol="0" anchor="ctr">
-            <a:spAutoFit/>
-          </a:bodyPr>
-          <a:lstStyle/>
-          <a:p>
-            <a:r>
-              <a:rPr lang="en-US" sz="2000" b="1">
-                <a:solidFill>
-                  <a:srgbClr val="C00000"/>
-                </a:solidFill>
-                <a:latin typeface="Calibri" panose="020F0502020204030204" pitchFamily="34" charset="0"/>
-              </a:rPr>
-              <a:t>(a)  5 × 1/20 = 0.25</a:t>
-            </a:r>
-          </a:p>
-          <a:p>
-            <a:r>
-              <a:rPr lang="en-US" sz="2000" b="1">
-                <a:solidFill>
-                  <a:srgbClr val="C00000"/>
-                </a:solidFill>
-                <a:latin typeface="Calibri" panose="020F0502020204030204" pitchFamily="34" charset="0"/>
-              </a:rPr>
-              <a:t>(b)  (15 − 4) × 1/20 = 0.55</a:t>
-            </a:r>
-          </a:p>
-          <a:p>
-            <a:r>
-              <a:rPr lang="en-US" sz="2000" b="1">
-                <a:solidFill>
-                  <a:srgbClr val="C00000"/>
-                </a:solidFill>
-                <a:latin typeface="Calibri" panose="020F0502020204030204" pitchFamily="34" charset="0"/>
-              </a:rPr>
-              <a:t>(c)  0:  a single point has no width</a:t>
-            </a:r>
-          </a:p>
-        </p:txBody>
-      </p:sp>
-      <p:pic>
-        <p:nvPicPr>
-          <p:cNvPr id="6" name="l16_uniform_wait.png">
-            <a:extLst>
-              <a:ext uri="{FF2B5EF4-FFF2-40B4-BE49-F238E27FC236}">
-                <a16:creationId xmlns:a16="http://schemas.microsoft.com/office/drawing/2014/main" id="{99F6A862-7AEA-085B-FEE9-523A534A0BAE}"/>
-              </a:ext>
-            </a:extLst>
-          </p:cNvPr>
-          <p:cNvPicPr>
-            <a:picLocks/>
-          </p:cNvPicPr>
-          <p:nvPr/>
-        </p:nvPicPr>
-        <p:blipFill>
-          <a:blip r:embed="rId2">
-            <a:extLst>
-              <a:ext uri="{28A0092B-C50C-407E-A947-70E740481C1C}">
-                <a14:useLocalDpi xmlns:a14="http://schemas.microsoft.com/office/drawing/2010/main" val="0"/>
-              </a:ext>
-            </a:extLst>
-          </a:blip>
-          <a:stretch>
-            <a:fillRect/>
-          </a:stretch>
-        </p:blipFill>
-        <p:spPr>
-          <a:xfrm>
-            <a:off x="6350000" y="2711510"/>
-            <a:ext cx="5080000" cy="2222500"/>
-          </a:xfrm>
-          <a:prstGeom prst="rect">
-            <a:avLst/>
-          </a:prstGeom>
-        </p:spPr>
-      </p:pic>
-    </p:spTree>
-    <p:extLst>
-      <p:ext uri="{BB962C8B-B14F-4D97-AF65-F5344CB8AC3E}">
-        <p14:creationId xmlns:p14="http://schemas.microsoft.com/office/powerpoint/2010/main" val="2653490257"/>
-      </p:ext>
-    </p:extLst>
-  </p:cSld>
-  <p:clrMapOvr>
-    <a:masterClrMapping/>
-  </p:clrMapOvr>
-  <p:timing>
-    <p:tnLst>
-      <p:par>
-        <p:cTn id="1" dur="indefinite" restart="never" nodeType="tmRoot">
-          <p:childTnLst>
-            <p:seq concurrent="1" nextAc="seek">
-              <p:cTn id="2" dur="indefinite" nodeType="mainSeq">
-                <p:childTnLst>
-                  <p:par>
-                    <p:cTn id="3" fill="hold">
-                      <p:stCondLst>
-                        <p:cond delay="indefinite"/>
-                      </p:stCondLst>
-                      <p:childTnLst>
-                        <p:par>
-                          <p:cTn id="4" fill="hold">
-                            <p:stCondLst>
-                              <p:cond delay="0"/>
-                            </p:stCondLst>
-                            <p:childTnLst>
-                              <p:par>
-                                <p:cTn id="5" presetID="1" presetClass="entr" presetSubtype="0" fill="hold" grpId="0" nodeType="clickEffect">
-                                  <p:stCondLst>
-                                    <p:cond delay="0"/>
-                                  </p:stCondLst>
-                                  <p:childTnLst>
-                                    <p:set>
-                                      <p:cBhvr>
-                                        <p:cTn id="6" dur="1" fill="hold">
-                                          <p:stCondLst>
-                                            <p:cond delay="0"/>
-                                          </p:stCondLst>
-                                        </p:cTn>
-                                        <p:tgtEl>
-                                          <p:spTgt spid="11"/>
-                                        </p:tgtEl>
-                                        <p:attrNameLst>
-                                          <p:attrName>style.visibility</p:attrName>
-                                        </p:attrNameLst>
-                                      </p:cBhvr>
-                                      <p:to>
-                                        <p:strVal val="visible"/>
-                                      </p:to>
-                                    </p:set>
-                                  </p:childTnLst>
-                                </p:cTn>
-                              </p:par>
-                            </p:childTnLst>
-                          </p:cTn>
-                        </p:par>
-                      </p:childTnLst>
-                    </p:cTn>
-                  </p:par>
-                </p:childTnLst>
-              </p:cTn>
-              <p:prevCondLst>
-                <p:cond evt="onPrev" delay="0">
-                  <p:tgtEl>
-                    <p:sldTgt/>
-                  </p:tgtEl>
-                </p:cond>
-              </p:prevCondLst>
-              <p:nextCondLst>
-                <p:cond evt="onNext" delay="0">
-                  <p:tgtEl>
-                    <p:sldTgt/>
-                  </p:tgtEl>
-                </p:cond>
-              </p:nextCondLst>
-            </p:seq>
-          </p:childTnLst>
-        </p:cTn>
-      </p:par>
-    </p:tnLst>
-    <p:bldLst>
-      <p:bldP spid="11" grpId="0" animBg="1"/>
-    </p:bldLst>
-  </p:timing>
-</p:sld>
-</file>
-
-<file path=ppt/slides/slide19.xml><?xml version="1.0" encoding="utf-8"?>
-<p:sld xmlns:a="http://schemas.openxmlformats.org/drawingml/2006/main" xmlns:r="http://schemas.openxmlformats.org/officeDocument/2006/relationships" xmlns:p="http://schemas.openxmlformats.org/presentationml/2006/main">
-  <p:cSld>
-    <p:spTree>
-      <p:nvGrpSpPr>
-        <p:cNvPr id="1" name=""/>
-        <p:cNvGrpSpPr/>
-        <p:nvPr/>
-      </p:nvGrpSpPr>
-      <p:grpSpPr>
-        <a:xfrm>
-          <a:off x="0" y="0"/>
-          <a:ext cx="0" cy="0"/>
-          <a:chOff x="0" y="0"/>
-          <a:chExt cx="0" cy="0"/>
-        </a:xfrm>
-      </p:grpSpPr>
-      <p:sp>
-        <p:nvSpPr>
-          <p:cNvPr id="2" name="Title 1">
-            <a:extLst>
-              <a:ext uri="{FF2B5EF4-FFF2-40B4-BE49-F238E27FC236}">
-                <a16:creationId xmlns:a16="http://schemas.microsoft.com/office/drawing/2014/main" id="{C08D30B1-1864-30EF-7EAB-9BEE656C0012}"/>
-              </a:ext>
-            </a:extLst>
-          </p:cNvPr>
-          <p:cNvSpPr>
-            <a:spLocks noGrp="1"/>
-          </p:cNvSpPr>
-          <p:nvPr>
-            <p:ph type="title"/>
-          </p:nvPr>
-        </p:nvSpPr>
-        <p:spPr/>
-        <p:txBody>
-          <a:bodyPr>
-            <a:noAutofit/>
-          </a:bodyPr>
-          <a:lstStyle/>
-          <a:p>
-            <a:r>
-              <a:rPr lang="en-US">
-                <a:solidFill>
-                  <a:srgbClr val="1F3864"/>
-                </a:solidFill>
-              </a:rPr>
-              <a:t>Example: a triangle</a:t>
-            </a:r>
-          </a:p>
-        </p:txBody>
-      </p:sp>
-      <p:sp>
-        <p:nvSpPr>
-          <p:cNvPr id="4" name="Slide Number Placeholder 3">
-            <a:extLst>
-              <a:ext uri="{FF2B5EF4-FFF2-40B4-BE49-F238E27FC236}">
-                <a16:creationId xmlns:a16="http://schemas.microsoft.com/office/drawing/2014/main" id="{3F875068-D051-44AE-498E-1BEBEDE3A7C8}"/>
-              </a:ext>
-            </a:extLst>
-          </p:cNvPr>
-          <p:cNvSpPr>
-            <a:spLocks noGrp="1"/>
-          </p:cNvSpPr>
-          <p:nvPr>
-            <p:ph type="sldNum" sz="quarter" idx="12"/>
-          </p:nvPr>
-        </p:nvSpPr>
-        <p:spPr/>
-        <p:txBody>
-          <a:bodyPr/>
-          <a:lstStyle/>
-          <a:p>
-            <a:fld id="{A80A81DD-F10A-4B1C-963A-0ABBB4865886}" type="slidenum">
-              <a:rPr lang="en-US" sz="1600" smtClean="0"/>
-              <a:t>19</a:t>
-            </a:fld>
-            <a:endParaRPr lang="en-US" sz="1600"/>
-          </a:p>
-        </p:txBody>
-      </p:sp>
-      <p:sp>
-        <p:nvSpPr>
-          <p:cNvPr id="3" name="Title rule">
-            <a:extLst>
-              <a:ext uri="{FF2B5EF4-FFF2-40B4-BE49-F238E27FC236}">
-                <a16:creationId xmlns:a16="http://schemas.microsoft.com/office/drawing/2014/main" id="{30656AA8-9645-F028-C769-A313710853CC}"/>
-              </a:ext>
-            </a:extLst>
-          </p:cNvPr>
-          <p:cNvSpPr/>
-          <p:nvPr/>
-        </p:nvSpPr>
-        <p:spPr>
-          <a:xfrm>
-            <a:off x="838200" y="1600200"/>
-            <a:ext cx="10515600" cy="38100"/>
-          </a:xfrm>
-          <a:prstGeom prst="rect">
-            <a:avLst/>
-          </a:prstGeom>
-          <a:solidFill>
-            <a:srgbClr val="4472C4"/>
-          </a:solidFill>
-          <a:ln w="12700" cap="flat" cmpd="sng" algn="ctr">
-            <a:noFill/>
-            <a:prstDash val="solid"/>
-            <a:miter lim="800000"/>
-          </a:ln>
-          <a:effectLst/>
-          <a:extLst>
-            <a:ext uri="{91240B29-F687-4F45-9708-019B960494DF}">
-              <a14:hiddenLine xmlns:a14="http://schemas.microsoft.com/office/drawing/2010/main" w="12700" cap="flat" cmpd="sng" algn="ctr">
-                <a:solidFill>
-                  <a:schemeClr val="accent1">
-                    <a:shade val="15000"/>
-                  </a:schemeClr>
-                </a:solidFill>
-                <a:prstDash val="solid"/>
-                <a:miter lim="800000"/>
-              </a14:hiddenLine>
-            </a:ext>
-          </a:extLst>
-        </p:spPr>
-        <p:style>
-          <a:lnRef idx="2">
-            <a:schemeClr val="accent1">
-              <a:shade val="15000"/>
-            </a:schemeClr>
-          </a:lnRef>
-          <a:fillRef idx="1">
-            <a:schemeClr val="accent1"/>
-          </a:fillRef>
-          <a:effectRef idx="0">
-            <a:schemeClr val="accent1"/>
-          </a:effectRef>
-          <a:fontRef idx="minor">
-            <a:schemeClr val="lt1"/>
-          </a:fontRef>
-        </p:style>
-        <p:txBody>
-          <a:bodyPr rtlCol="0" anchor="ctr"/>
-          <a:lstStyle/>
-          <a:p>
-            <a:pPr algn="ctr"/>
-            <a:endParaRPr lang="en-US"/>
-          </a:p>
-        </p:txBody>
-      </p:sp>
-      <p:sp>
-        <p:nvSpPr>
-          <p:cNvPr id="8" name="Context">
-            <a:extLst>
-              <a:ext uri="{FF2B5EF4-FFF2-40B4-BE49-F238E27FC236}">
-                <a16:creationId xmlns:a16="http://schemas.microsoft.com/office/drawing/2014/main" id="{71E3EA8C-31B4-DAD4-BC4A-65D72E59AD46}"/>
-              </a:ext>
-            </a:extLst>
-          </p:cNvPr>
-          <p:cNvSpPr txBox="1"/>
-          <p:nvPr/>
-        </p:nvSpPr>
-        <p:spPr>
-          <a:xfrm>
-            <a:off x="762000" y="1879600"/>
-            <a:ext cx="10668000" cy="381000"/>
-          </a:xfrm>
-          <a:prstGeom prst="rect">
-            <a:avLst/>
-          </a:prstGeom>
-          <a:noFill/>
-        </p:spPr>
-        <p:txBody>
-          <a:bodyPr vert="horz" wrap="square" rtlCol="0">
-            <a:spAutoFit/>
-          </a:bodyPr>
-          <a:lstStyle/>
-          <a:p>
-            <a:pPr>
-              <a:spcAft>
-                <a:spcPts val="200"/>
-              </a:spcAft>
-            </a:pPr>
-            <a:r>
-              <a:rPr lang="en-US">
-                <a:solidFill>
-                  <a:srgbClr val="000000"/>
-                </a:solidFill>
-                <a:latin typeface="Calibri" panose="020F0502020204030204" pitchFamily="34" charset="0"/>
-              </a:rPr>
-              <a:t>The density of W rises in a straight line to 0.4 at w = 2, then falls to 0 at w = 5.</a:t>
-            </a:r>
-          </a:p>
-        </p:txBody>
-      </p:sp>
-      <p:sp>
-        <p:nvSpPr>
-          <p:cNvPr id="10" name="Question">
-            <a:extLst>
-              <a:ext uri="{FF2B5EF4-FFF2-40B4-BE49-F238E27FC236}">
-                <a16:creationId xmlns:a16="http://schemas.microsoft.com/office/drawing/2014/main" id="{B31E395F-B84E-D1E9-D22A-222467FC4105}"/>
-              </a:ext>
-            </a:extLst>
-          </p:cNvPr>
-          <p:cNvSpPr txBox="1"/>
-          <p:nvPr/>
-        </p:nvSpPr>
-        <p:spPr>
-          <a:xfrm>
-            <a:off x="762000" y="2387600"/>
-            <a:ext cx="5461000" cy="974626"/>
-          </a:xfrm>
-          <a:prstGeom prst="rect">
-            <a:avLst/>
-          </a:prstGeom>
-          <a:noFill/>
-        </p:spPr>
-        <p:txBody>
-          <a:bodyPr vert="horz" wrap="square" rtlCol="0">
-            <a:spAutoFit/>
-          </a:bodyPr>
-          <a:lstStyle/>
-          <a:p>
-            <a:pPr>
-              <a:spcAft>
-                <a:spcPts val="200"/>
-              </a:spcAft>
-            </a:pPr>
-            <a:r>
-              <a:rPr lang="en-US" b="1">
-                <a:solidFill>
-                  <a:srgbClr val="C00000"/>
-                </a:solidFill>
-                <a:latin typeface="Calibri" panose="020F0502020204030204" pitchFamily="34" charset="0"/>
-              </a:rPr>
-              <a:t>(a)  Is the total area 1?</a:t>
-            </a:r>
-          </a:p>
-          <a:p>
-            <a:pPr>
-              <a:spcAft>
-                <a:spcPts val="200"/>
-              </a:spcAft>
-            </a:pPr>
-            <a:r>
-              <a:rPr lang="en-US" b="1">
-                <a:solidFill>
-                  <a:srgbClr val="C00000"/>
-                </a:solidFill>
-                <a:latin typeface="Calibri" panose="020F0502020204030204" pitchFamily="34" charset="0"/>
-              </a:rPr>
-              <a:t>(b)  What is P(W ≤ 1)?</a:t>
-            </a:r>
-          </a:p>
-          <a:p>
-            <a:pPr>
-              <a:spcAft>
-                <a:spcPts val="200"/>
-              </a:spcAft>
-            </a:pPr>
-            <a:r>
-              <a:rPr lang="en-US" b="1">
-                <a:solidFill>
-                  <a:srgbClr val="C00000"/>
-                </a:solidFill>
-                <a:latin typeface="Calibri" panose="020F0502020204030204" pitchFamily="34" charset="0"/>
-              </a:rPr>
-              <a:t>(c)  What is P(W &gt; 2)?</a:t>
-            </a:r>
-          </a:p>
-        </p:txBody>
-      </p:sp>
-      <p:sp>
-        <p:nvSpPr>
-          <p:cNvPr id="11" name="Result">
-            <a:extLst>
-              <a:ext uri="{FF2B5EF4-FFF2-40B4-BE49-F238E27FC236}">
-                <a16:creationId xmlns:a16="http://schemas.microsoft.com/office/drawing/2014/main" id="{5A70F68E-0D93-07B8-82B2-4D8F2F681D0D}"/>
-              </a:ext>
-            </a:extLst>
-          </p:cNvPr>
-          <p:cNvSpPr/>
-          <p:nvPr/>
-        </p:nvSpPr>
-        <p:spPr>
-          <a:xfrm>
-            <a:off x="762000" y="4927600"/>
-            <a:ext cx="10668000" cy="1098054"/>
-          </a:xfrm>
-          <a:prstGeom prst="roundRect">
-            <a:avLst>
-              <a:gd name="adj" fmla="val 4000"/>
-            </a:avLst>
-          </a:prstGeom>
-          <a:solidFill>
-            <a:srgbClr val="F2F6FC"/>
-          </a:solidFill>
-          <a:ln w="15875">
-            <a:solidFill>
-              <a:srgbClr val="4472C4"/>
-            </a:solidFill>
-          </a:ln>
-        </p:spPr>
-        <p:style>
-          <a:lnRef idx="2">
-            <a:schemeClr val="accent1">
-              <a:shade val="15000"/>
-            </a:schemeClr>
-          </a:lnRef>
-          <a:fillRef idx="1">
-            <a:schemeClr val="accent1"/>
-          </a:fillRef>
-          <a:effectRef idx="0">
-            <a:schemeClr val="accent1"/>
-          </a:effectRef>
-          <a:fontRef idx="minor">
-            <a:schemeClr val="lt1"/>
-          </a:fontRef>
-        </p:style>
-        <p:txBody>
-          <a:bodyPr wrap="square" lIns="152400" tIns="76200" rIns="152400" bIns="76200" rtlCol="0" anchor="ctr">
-            <a:spAutoFit/>
-          </a:bodyPr>
-          <a:lstStyle/>
-          <a:p>
-            <a:r>
-              <a:rPr lang="en-US" sz="2000" b="1">
-                <a:solidFill>
-                  <a:srgbClr val="C00000"/>
-                </a:solidFill>
-                <a:latin typeface="Calibri" panose="020F0502020204030204" pitchFamily="34" charset="0"/>
-              </a:rPr>
-              <a:t>(a)  ½ × 5 × 0.4 = 1</a:t>
-            </a:r>
-          </a:p>
-          <a:p>
-            <a:r>
-              <a:rPr lang="en-US" sz="2000" b="1">
-                <a:solidFill>
-                  <a:srgbClr val="C00000"/>
-                </a:solidFill>
-                <a:latin typeface="Calibri" panose="020F0502020204030204" pitchFamily="34" charset="0"/>
-              </a:rPr>
-              <a:t>(b)  ½ × 1 × 0.2 = 0.1   (the height at w = 1 is 0.2)</a:t>
-            </a:r>
-          </a:p>
-          <a:p>
-            <a:r>
-              <a:rPr lang="en-US" sz="2000" b="1">
-                <a:solidFill>
-                  <a:srgbClr val="C00000"/>
-                </a:solidFill>
-                <a:latin typeface="Calibri" panose="020F0502020204030204" pitchFamily="34" charset="0"/>
-              </a:rPr>
-              <a:t>(c)  ½ × 3 × 0.4 = 0.6</a:t>
-            </a:r>
-          </a:p>
-        </p:txBody>
-      </p:sp>
-      <p:pic>
-        <p:nvPicPr>
-          <p:cNvPr id="6" name="l16_triangle.png">
-            <a:extLst>
-              <a:ext uri="{FF2B5EF4-FFF2-40B4-BE49-F238E27FC236}">
-                <a16:creationId xmlns:a16="http://schemas.microsoft.com/office/drawing/2014/main" id="{7A4140BE-2DEB-3085-AFFD-5246C4570410}"/>
-              </a:ext>
-            </a:extLst>
-          </p:cNvPr>
-          <p:cNvPicPr>
-            <a:picLocks/>
-          </p:cNvPicPr>
-          <p:nvPr/>
-        </p:nvPicPr>
-        <p:blipFill>
-          <a:blip r:embed="rId2">
-            <a:extLst>
-              <a:ext uri="{28A0092B-C50C-407E-A947-70E740481C1C}">
-                <a14:useLocalDpi xmlns:a14="http://schemas.microsoft.com/office/drawing/2010/main" val="0"/>
-              </a:ext>
-            </a:extLst>
-          </a:blip>
-          <a:stretch>
-            <a:fillRect/>
-          </a:stretch>
-        </p:blipFill>
-        <p:spPr>
-          <a:xfrm>
-            <a:off x="6350000" y="2286000"/>
-            <a:ext cx="5080000" cy="2540000"/>
-          </a:xfrm>
-          <a:prstGeom prst="rect">
-            <a:avLst/>
-          </a:prstGeom>
-        </p:spPr>
-      </p:pic>
-    </p:spTree>
-    <p:extLst>
-      <p:ext uri="{BB962C8B-B14F-4D97-AF65-F5344CB8AC3E}">
-        <p14:creationId xmlns:p14="http://schemas.microsoft.com/office/powerpoint/2010/main" val="3882488250"/>
       </p:ext>
     </p:extLst>
   </p:cSld>
@@ -9768,2178 +5259,6 @@
         </p:cTn>
       </p:par>
     </p:tnLst>
-  </p:timing>
-</p:sld>
-</file>
-
-<file path=ppt/slides/slide20.xml><?xml version="1.0" encoding="utf-8"?>
-<p:sld xmlns:a="http://schemas.openxmlformats.org/drawingml/2006/main" xmlns:r="http://schemas.openxmlformats.org/officeDocument/2006/relationships" xmlns:p="http://schemas.openxmlformats.org/presentationml/2006/main">
-  <p:cSld>
-    <p:spTree>
-      <p:nvGrpSpPr>
-        <p:cNvPr id="1" name=""/>
-        <p:cNvGrpSpPr/>
-        <p:nvPr/>
-      </p:nvGrpSpPr>
-      <p:grpSpPr>
-        <a:xfrm>
-          <a:off x="0" y="0"/>
-          <a:ext cx="0" cy="0"/>
-          <a:chOff x="0" y="0"/>
-          <a:chExt cx="0" cy="0"/>
-        </a:xfrm>
-      </p:grpSpPr>
-      <p:sp>
-        <p:nvSpPr>
-          <p:cNvPr id="2" name="Title 1">
-            <a:extLst>
-              <a:ext uri="{FF2B5EF4-FFF2-40B4-BE49-F238E27FC236}">
-                <a16:creationId xmlns:a16="http://schemas.microsoft.com/office/drawing/2014/main" id="{D617AB41-6AD1-9EF2-7F95-46A904399681}"/>
-              </a:ext>
-            </a:extLst>
-          </p:cNvPr>
-          <p:cNvSpPr>
-            <a:spLocks noGrp="1"/>
-          </p:cNvSpPr>
-          <p:nvPr>
-            <p:ph type="title"/>
-          </p:nvPr>
-        </p:nvSpPr>
-        <p:spPr/>
-        <p:txBody>
-          <a:bodyPr>
-            <a:noAutofit/>
-          </a:bodyPr>
-          <a:lstStyle/>
-          <a:p>
-            <a:r>
-              <a:rPr lang="en-US">
-                <a:solidFill>
-                  <a:srgbClr val="1F3864"/>
-                </a:solidFill>
-              </a:rPr>
-              <a:t>Cumulative probability</a:t>
-            </a:r>
-          </a:p>
-        </p:txBody>
-      </p:sp>
-      <p:sp>
-        <p:nvSpPr>
-          <p:cNvPr id="4" name="Slide Number Placeholder 3">
-            <a:extLst>
-              <a:ext uri="{FF2B5EF4-FFF2-40B4-BE49-F238E27FC236}">
-                <a16:creationId xmlns:a16="http://schemas.microsoft.com/office/drawing/2014/main" id="{97D44AE5-98B5-B840-6B8A-D345C7C2E2F0}"/>
-              </a:ext>
-            </a:extLst>
-          </p:cNvPr>
-          <p:cNvSpPr>
-            <a:spLocks noGrp="1"/>
-          </p:cNvSpPr>
-          <p:nvPr>
-            <p:ph type="sldNum" sz="quarter" idx="12"/>
-          </p:nvPr>
-        </p:nvSpPr>
-        <p:spPr/>
-        <p:txBody>
-          <a:bodyPr/>
-          <a:lstStyle/>
-          <a:p>
-            <a:fld id="{A80A81DD-F10A-4B1C-963A-0ABBB4865886}" type="slidenum">
-              <a:rPr lang="en-US" sz="1600" smtClean="0"/>
-              <a:t>20</a:t>
-            </a:fld>
-            <a:endParaRPr lang="en-US" sz="1600"/>
-          </a:p>
-        </p:txBody>
-      </p:sp>
-      <p:sp>
-        <p:nvSpPr>
-          <p:cNvPr id="5" name="TextBox 4">
-            <a:extLst>
-              <a:ext uri="{FF2B5EF4-FFF2-40B4-BE49-F238E27FC236}">
-                <a16:creationId xmlns:a16="http://schemas.microsoft.com/office/drawing/2014/main" id="{A34AAE17-27CE-D7A3-C663-11BB48ACBF5B}"/>
-              </a:ext>
-            </a:extLst>
-          </p:cNvPr>
-          <p:cNvSpPr txBox="1"/>
-          <p:nvPr/>
-        </p:nvSpPr>
-        <p:spPr>
-          <a:xfrm>
-            <a:off x="762000" y="1879600"/>
-            <a:ext cx="10668000" cy="345440"/>
-          </a:xfrm>
-          <a:prstGeom prst="rect">
-            <a:avLst/>
-          </a:prstGeom>
-          <a:noFill/>
-        </p:spPr>
-        <p:txBody>
-          <a:bodyPr vert="horz" wrap="square" rtlCol="0">
-            <a:spAutoFit/>
-          </a:bodyPr>
-          <a:lstStyle/>
-          <a:p>
-            <a:pPr marL="304800" indent="-304800"/>
-            <a:r>
-              <a:rPr lang="en-US" sz="1600">
-                <a:solidFill>
-                  <a:srgbClr val="000000"/>
-                </a:solidFill>
-              </a:rPr>
-              <a:t>P(X ≤ x)</a:t>
-            </a:r>
-          </a:p>
-        </p:txBody>
-      </p:sp>
-      <p:sp>
-        <p:nvSpPr>
-          <p:cNvPr id="6" name="TextBox 5">
-            <a:extLst>
-              <a:ext uri="{FF2B5EF4-FFF2-40B4-BE49-F238E27FC236}">
-                <a16:creationId xmlns:a16="http://schemas.microsoft.com/office/drawing/2014/main" id="{E410A0F8-5E1E-9A1D-B64C-50827EE6C9B2}"/>
-              </a:ext>
-            </a:extLst>
-          </p:cNvPr>
-          <p:cNvSpPr txBox="1"/>
-          <p:nvPr/>
-        </p:nvSpPr>
-        <p:spPr>
-          <a:xfrm>
-            <a:off x="1117600" y="2225040"/>
-            <a:ext cx="10312400" cy="338554"/>
-          </a:xfrm>
-          <a:prstGeom prst="rect">
-            <a:avLst/>
-          </a:prstGeom>
-          <a:noFill/>
-        </p:spPr>
-        <p:txBody>
-          <a:bodyPr vert="horz" wrap="square" rtlCol="0">
-            <a:spAutoFit/>
-          </a:bodyPr>
-          <a:lstStyle/>
-          <a:p>
-            <a:r>
-              <a:rPr lang="en-US" sz="1600" b="1">
-                <a:solidFill>
-                  <a:srgbClr val="C00000"/>
-                </a:solidFill>
-              </a:rPr>
-              <a:t>the area to the left of x:  what the z-table and pnorm give</a:t>
-            </a:r>
-          </a:p>
-        </p:txBody>
-      </p:sp>
-      <p:sp>
-        <p:nvSpPr>
-          <p:cNvPr id="7" name="TextBox 6">
-            <a:extLst>
-              <a:ext uri="{FF2B5EF4-FFF2-40B4-BE49-F238E27FC236}">
-                <a16:creationId xmlns:a16="http://schemas.microsoft.com/office/drawing/2014/main" id="{47D3CD95-D52E-5227-B663-7C0A72677B6E}"/>
-              </a:ext>
-            </a:extLst>
-          </p:cNvPr>
-          <p:cNvSpPr txBox="1"/>
-          <p:nvPr/>
-        </p:nvSpPr>
-        <p:spPr>
-          <a:xfrm>
-            <a:off x="762000" y="2741394"/>
-            <a:ext cx="10668000" cy="345440"/>
-          </a:xfrm>
-          <a:prstGeom prst="rect">
-            <a:avLst/>
-          </a:prstGeom>
-          <a:noFill/>
-        </p:spPr>
-        <p:txBody>
-          <a:bodyPr vert="horz" wrap="square" rtlCol="0">
-            <a:spAutoFit/>
-          </a:bodyPr>
-          <a:lstStyle/>
-          <a:p>
-            <a:pPr marL="304800" indent="-304800"/>
-            <a:r>
-              <a:rPr lang="en-US" sz="1600">
-                <a:solidFill>
-                  <a:srgbClr val="000000"/>
-                </a:solidFill>
-              </a:rPr>
-              <a:t>area to the right</a:t>
-            </a:r>
-          </a:p>
-        </p:txBody>
-      </p:sp>
-      <p:sp>
-        <p:nvSpPr>
-          <p:cNvPr id="8" name="TextBox 7">
-            <a:extLst>
-              <a:ext uri="{FF2B5EF4-FFF2-40B4-BE49-F238E27FC236}">
-                <a16:creationId xmlns:a16="http://schemas.microsoft.com/office/drawing/2014/main" id="{1CE3E601-601D-C6B1-8265-C079CB8C9269}"/>
-              </a:ext>
-            </a:extLst>
-          </p:cNvPr>
-          <p:cNvSpPr txBox="1"/>
-          <p:nvPr/>
-        </p:nvSpPr>
-        <p:spPr>
-          <a:xfrm>
-            <a:off x="1117600" y="3086834"/>
-            <a:ext cx="10312400" cy="338554"/>
-          </a:xfrm>
-          <a:prstGeom prst="rect">
-            <a:avLst/>
-          </a:prstGeom>
-          <a:noFill/>
-        </p:spPr>
-        <p:txBody>
-          <a:bodyPr vert="horz" wrap="square" rtlCol="0">
-            <a:spAutoFit/>
-          </a:bodyPr>
-          <a:lstStyle/>
-          <a:p>
-            <a:r>
-              <a:rPr lang="en-US" sz="1600" b="1">
-                <a:solidFill>
-                  <a:srgbClr val="C00000"/>
-                </a:solidFill>
-              </a:rPr>
-              <a:t>P(X &gt; x) = 1 − P(X ≤ x)</a:t>
-            </a:r>
-          </a:p>
-        </p:txBody>
-      </p:sp>
-      <p:sp>
-        <p:nvSpPr>
-          <p:cNvPr id="9" name="TextBox 8">
-            <a:extLst>
-              <a:ext uri="{FF2B5EF4-FFF2-40B4-BE49-F238E27FC236}">
-                <a16:creationId xmlns:a16="http://schemas.microsoft.com/office/drawing/2014/main" id="{FB002BF4-8037-2F73-E27A-7A453477E389}"/>
-              </a:ext>
-            </a:extLst>
-          </p:cNvPr>
-          <p:cNvSpPr txBox="1"/>
-          <p:nvPr/>
-        </p:nvSpPr>
-        <p:spPr>
-          <a:xfrm>
-            <a:off x="762000" y="3603188"/>
-            <a:ext cx="10668000" cy="345440"/>
-          </a:xfrm>
-          <a:prstGeom prst="rect">
-            <a:avLst/>
-          </a:prstGeom>
-          <a:noFill/>
-        </p:spPr>
-        <p:txBody>
-          <a:bodyPr vert="horz" wrap="square" rtlCol="0">
-            <a:spAutoFit/>
-          </a:bodyPr>
-          <a:lstStyle/>
-          <a:p>
-            <a:pPr marL="304800" indent="-304800"/>
-            <a:r>
-              <a:rPr lang="en-US" sz="1600">
-                <a:solidFill>
-                  <a:srgbClr val="000000"/>
-                </a:solidFill>
-              </a:rPr>
-              <a:t>area between</a:t>
-            </a:r>
-          </a:p>
-        </p:txBody>
-      </p:sp>
-      <p:sp>
-        <p:nvSpPr>
-          <p:cNvPr id="10" name="TextBox 9">
-            <a:extLst>
-              <a:ext uri="{FF2B5EF4-FFF2-40B4-BE49-F238E27FC236}">
-                <a16:creationId xmlns:a16="http://schemas.microsoft.com/office/drawing/2014/main" id="{10F3B3E3-D27C-E008-C93E-ED70BD2A4754}"/>
-              </a:ext>
-            </a:extLst>
-          </p:cNvPr>
-          <p:cNvSpPr txBox="1"/>
-          <p:nvPr/>
-        </p:nvSpPr>
-        <p:spPr>
-          <a:xfrm>
-            <a:off x="1117600" y="3948628"/>
-            <a:ext cx="10312400" cy="338554"/>
-          </a:xfrm>
-          <a:prstGeom prst="rect">
-            <a:avLst/>
-          </a:prstGeom>
-          <a:noFill/>
-        </p:spPr>
-        <p:txBody>
-          <a:bodyPr vert="horz" wrap="square" rtlCol="0">
-            <a:spAutoFit/>
-          </a:bodyPr>
-          <a:lstStyle/>
-          <a:p>
-            <a:r>
-              <a:rPr lang="en-US" sz="1600" b="1">
-                <a:solidFill>
-                  <a:srgbClr val="C00000"/>
-                </a:solidFill>
-              </a:rPr>
-              <a:t>P(a &lt; X &lt; b) = P(X ≤ b) − P(X ≤ a)</a:t>
-            </a:r>
-            <a:endParaRPr lang="en-US" sz="1600" b="1" dirty="0">
-              <a:solidFill>
-                <a:srgbClr val="C00000"/>
-              </a:solidFill>
-            </a:endParaRPr>
-          </a:p>
-        </p:txBody>
-      </p:sp>
-      <p:sp>
-        <p:nvSpPr>
-          <p:cNvPr id="3" name="Title rule">
-            <a:extLst>
-              <a:ext uri="{FF2B5EF4-FFF2-40B4-BE49-F238E27FC236}">
-                <a16:creationId xmlns:a16="http://schemas.microsoft.com/office/drawing/2014/main" id="{B469CAAB-2B69-6863-7C28-0C5959E5734B}"/>
-              </a:ext>
-            </a:extLst>
-          </p:cNvPr>
-          <p:cNvSpPr/>
-          <p:nvPr/>
-        </p:nvSpPr>
-        <p:spPr>
-          <a:xfrm>
-            <a:off x="838200" y="1600200"/>
-            <a:ext cx="10515600" cy="38100"/>
-          </a:xfrm>
-          <a:prstGeom prst="rect">
-            <a:avLst/>
-          </a:prstGeom>
-          <a:solidFill>
-            <a:srgbClr val="4472C4"/>
-          </a:solidFill>
-          <a:ln w="12700" cap="flat" cmpd="sng" algn="ctr">
-            <a:noFill/>
-            <a:prstDash val="solid"/>
-            <a:miter lim="800000"/>
-          </a:ln>
-          <a:effectLst/>
-          <a:extLst>
-            <a:ext uri="{91240B29-F687-4F45-9708-019B960494DF}">
-              <a14:hiddenLine xmlns:a14="http://schemas.microsoft.com/office/drawing/2010/main" w="12700" cap="flat" cmpd="sng" algn="ctr">
-                <a:solidFill>
-                  <a:schemeClr val="accent1">
-                    <a:shade val="15000"/>
-                  </a:schemeClr>
-                </a:solidFill>
-                <a:prstDash val="solid"/>
-                <a:miter lim="800000"/>
-              </a14:hiddenLine>
-            </a:ext>
-          </a:extLst>
-        </p:spPr>
-        <p:style>
-          <a:lnRef idx="2">
-            <a:schemeClr val="accent1">
-              <a:shade val="15000"/>
-            </a:schemeClr>
-          </a:lnRef>
-          <a:fillRef idx="1">
-            <a:schemeClr val="accent1"/>
-          </a:fillRef>
-          <a:effectRef idx="0">
-            <a:schemeClr val="accent1"/>
-          </a:effectRef>
-          <a:fontRef idx="minor">
-            <a:schemeClr val="lt1"/>
-          </a:fontRef>
-        </p:style>
-        <p:txBody>
-          <a:bodyPr rtlCol="0" anchor="ctr"/>
-          <a:lstStyle/>
-          <a:p>
-            <a:pPr algn="ctr"/>
-            <a:endParaRPr lang="en-US"/>
-          </a:p>
-        </p:txBody>
-      </p:sp>
-    </p:spTree>
-    <p:extLst>
-      <p:ext uri="{BB962C8B-B14F-4D97-AF65-F5344CB8AC3E}">
-        <p14:creationId xmlns:p14="http://schemas.microsoft.com/office/powerpoint/2010/main" val="1385793674"/>
-      </p:ext>
-    </p:extLst>
-  </p:cSld>
-  <p:clrMapOvr>
-    <a:masterClrMapping/>
-  </p:clrMapOvr>
-  <p:timing>
-    <p:tnLst>
-      <p:par>
-        <p:cTn id="1" dur="indefinite" restart="never" nodeType="tmRoot">
-          <p:childTnLst>
-            <p:seq concurrent="1" nextAc="seek">
-              <p:cTn id="2" dur="indefinite" nodeType="mainSeq">
-                <p:childTnLst>
-                  <p:par>
-                    <p:cTn id="3" fill="hold">
-                      <p:stCondLst>
-                        <p:cond delay="indefinite"/>
-                      </p:stCondLst>
-                      <p:childTnLst>
-                        <p:par>
-                          <p:cTn id="4" fill="hold">
-                            <p:stCondLst>
-                              <p:cond delay="0"/>
-                            </p:stCondLst>
-                            <p:childTnLst>
-                              <p:par>
-                                <p:cTn id="5" presetID="34" presetClass="entr" presetSubtype="0" fill="hold" grpId="0" nodeType="clickEffect">
-                                  <p:stCondLst>
-                                    <p:cond delay="0"/>
-                                  </p:stCondLst>
-                                  <p:childTnLst>
-                                    <p:set>
-                                      <p:cBhvr>
-                                        <p:cTn id="6" dur="1" fill="hold">
-                                          <p:stCondLst>
-                                            <p:cond delay="0"/>
-                                          </p:stCondLst>
-                                        </p:cTn>
-                                        <p:tgtEl>
-                                          <p:spTgt spid="6"/>
-                                        </p:tgtEl>
-                                        <p:attrNameLst>
-                                          <p:attrName>style.visibility</p:attrName>
-                                        </p:attrNameLst>
-                                      </p:cBhvr>
-                                      <p:to>
-                                        <p:strVal val="visible"/>
-                                      </p:to>
-                                    </p:set>
-                                    <p:anim from="(-#ppt_w/2)" to="(#ppt_x)" calcmode="lin" valueType="num">
-                                      <p:cBhvr>
-                                        <p:cTn id="7" dur="600" fill="hold">
-                                          <p:stCondLst>
-                                            <p:cond delay="0"/>
-                                          </p:stCondLst>
-                                        </p:cTn>
-                                        <p:tgtEl>
-                                          <p:spTgt spid="6"/>
-                                        </p:tgtEl>
-                                        <p:attrNameLst>
-                                          <p:attrName>ppt_x</p:attrName>
-                                        </p:attrNameLst>
-                                      </p:cBhvr>
-                                    </p:anim>
-                                    <p:anim from="0" to="-1.0" calcmode="lin" valueType="num">
-                                      <p:cBhvr>
-                                        <p:cTn id="8" dur="200" decel="50000" autoRev="1" fill="hold">
-                                          <p:stCondLst>
-                                            <p:cond delay="600"/>
-                                          </p:stCondLst>
-                                        </p:cTn>
-                                        <p:tgtEl>
-                                          <p:spTgt spid="6"/>
-                                        </p:tgtEl>
-                                        <p:attrNameLst>
-                                          <p:attrName>xshear</p:attrName>
-                                        </p:attrNameLst>
-                                      </p:cBhvr>
-                                    </p:anim>
-                                    <p:animScale>
-                                      <p:cBhvr>
-                                        <p:cTn id="9" dur="200" decel="100000" autoRev="1" fill="hold">
-                                          <p:stCondLst>
-                                            <p:cond delay="600"/>
-                                          </p:stCondLst>
-                                        </p:cTn>
-                                        <p:tgtEl>
-                                          <p:spTgt spid="6"/>
-                                        </p:tgtEl>
-                                      </p:cBhvr>
-                                      <p:from x="100000" y="100000"/>
-                                      <p:to x="80000" y="100000"/>
-                                    </p:animScale>
-                                    <p:anim by="(#ppt_h/3+#ppt_w*0.1)" calcmode="lin" valueType="num">
-                                      <p:cBhvr additive="sum">
-                                        <p:cTn id="10" dur="200" decel="100000" autoRev="1" fill="hold">
-                                          <p:stCondLst>
-                                            <p:cond delay="600"/>
-                                          </p:stCondLst>
-                                        </p:cTn>
-                                        <p:tgtEl>
-                                          <p:spTgt spid="6"/>
-                                        </p:tgtEl>
-                                        <p:attrNameLst>
-                                          <p:attrName>ppt_x</p:attrName>
-                                        </p:attrNameLst>
-                                      </p:cBhvr>
-                                    </p:anim>
-                                  </p:childTnLst>
-                                </p:cTn>
-                              </p:par>
-                            </p:childTnLst>
-                          </p:cTn>
-                        </p:par>
-                      </p:childTnLst>
-                    </p:cTn>
-                  </p:par>
-                  <p:par>
-                    <p:cTn id="11" fill="hold">
-                      <p:stCondLst>
-                        <p:cond delay="indefinite"/>
-                      </p:stCondLst>
-                      <p:childTnLst>
-                        <p:par>
-                          <p:cTn id="12" fill="hold">
-                            <p:stCondLst>
-                              <p:cond delay="0"/>
-                            </p:stCondLst>
-                            <p:childTnLst>
-                              <p:par>
-                                <p:cTn id="13" presetID="34" presetClass="entr" presetSubtype="0" fill="hold" grpId="0" nodeType="clickEffect">
-                                  <p:stCondLst>
-                                    <p:cond delay="0"/>
-                                  </p:stCondLst>
-                                  <p:childTnLst>
-                                    <p:set>
-                                      <p:cBhvr>
-                                        <p:cTn id="14" dur="1" fill="hold">
-                                          <p:stCondLst>
-                                            <p:cond delay="0"/>
-                                          </p:stCondLst>
-                                        </p:cTn>
-                                        <p:tgtEl>
-                                          <p:spTgt spid="8"/>
-                                        </p:tgtEl>
-                                        <p:attrNameLst>
-                                          <p:attrName>style.visibility</p:attrName>
-                                        </p:attrNameLst>
-                                      </p:cBhvr>
-                                      <p:to>
-                                        <p:strVal val="visible"/>
-                                      </p:to>
-                                    </p:set>
-                                    <p:anim from="(-#ppt_w/2)" to="(#ppt_x)" calcmode="lin" valueType="num">
-                                      <p:cBhvr>
-                                        <p:cTn id="15" dur="600" fill="hold">
-                                          <p:stCondLst>
-                                            <p:cond delay="0"/>
-                                          </p:stCondLst>
-                                        </p:cTn>
-                                        <p:tgtEl>
-                                          <p:spTgt spid="8"/>
-                                        </p:tgtEl>
-                                        <p:attrNameLst>
-                                          <p:attrName>ppt_x</p:attrName>
-                                        </p:attrNameLst>
-                                      </p:cBhvr>
-                                    </p:anim>
-                                    <p:anim from="0" to="-1.0" calcmode="lin" valueType="num">
-                                      <p:cBhvr>
-                                        <p:cTn id="16" dur="200" decel="50000" autoRev="1" fill="hold">
-                                          <p:stCondLst>
-                                            <p:cond delay="600"/>
-                                          </p:stCondLst>
-                                        </p:cTn>
-                                        <p:tgtEl>
-                                          <p:spTgt spid="8"/>
-                                        </p:tgtEl>
-                                        <p:attrNameLst>
-                                          <p:attrName>xshear</p:attrName>
-                                        </p:attrNameLst>
-                                      </p:cBhvr>
-                                    </p:anim>
-                                    <p:animScale>
-                                      <p:cBhvr>
-                                        <p:cTn id="17" dur="200" decel="100000" autoRev="1" fill="hold">
-                                          <p:stCondLst>
-                                            <p:cond delay="600"/>
-                                          </p:stCondLst>
-                                        </p:cTn>
-                                        <p:tgtEl>
-                                          <p:spTgt spid="8"/>
-                                        </p:tgtEl>
-                                      </p:cBhvr>
-                                      <p:from x="100000" y="100000"/>
-                                      <p:to x="80000" y="100000"/>
-                                    </p:animScale>
-                                    <p:anim by="(#ppt_h/3+#ppt_w*0.1)" calcmode="lin" valueType="num">
-                                      <p:cBhvr additive="sum">
-                                        <p:cTn id="18" dur="200" decel="100000" autoRev="1" fill="hold">
-                                          <p:stCondLst>
-                                            <p:cond delay="600"/>
-                                          </p:stCondLst>
-                                        </p:cTn>
-                                        <p:tgtEl>
-                                          <p:spTgt spid="8"/>
-                                        </p:tgtEl>
-                                        <p:attrNameLst>
-                                          <p:attrName>ppt_x</p:attrName>
-                                        </p:attrNameLst>
-                                      </p:cBhvr>
-                                    </p:anim>
-                                  </p:childTnLst>
-                                </p:cTn>
-                              </p:par>
-                            </p:childTnLst>
-                          </p:cTn>
-                        </p:par>
-                      </p:childTnLst>
-                    </p:cTn>
-                  </p:par>
-                  <p:par>
-                    <p:cTn id="19" fill="hold">
-                      <p:stCondLst>
-                        <p:cond delay="indefinite"/>
-                      </p:stCondLst>
-                      <p:childTnLst>
-                        <p:par>
-                          <p:cTn id="20" fill="hold">
-                            <p:stCondLst>
-                              <p:cond delay="0"/>
-                            </p:stCondLst>
-                            <p:childTnLst>
-                              <p:par>
-                                <p:cTn id="21" presetID="34" presetClass="entr" presetSubtype="0" fill="hold" grpId="0" nodeType="clickEffect">
-                                  <p:stCondLst>
-                                    <p:cond delay="0"/>
-                                  </p:stCondLst>
-                                  <p:childTnLst>
-                                    <p:set>
-                                      <p:cBhvr>
-                                        <p:cTn id="22" dur="1" fill="hold">
-                                          <p:stCondLst>
-                                            <p:cond delay="0"/>
-                                          </p:stCondLst>
-                                        </p:cTn>
-                                        <p:tgtEl>
-                                          <p:spTgt spid="10"/>
-                                        </p:tgtEl>
-                                        <p:attrNameLst>
-                                          <p:attrName>style.visibility</p:attrName>
-                                        </p:attrNameLst>
-                                      </p:cBhvr>
-                                      <p:to>
-                                        <p:strVal val="visible"/>
-                                      </p:to>
-                                    </p:set>
-                                    <p:anim from="(-#ppt_w/2)" to="(#ppt_x)" calcmode="lin" valueType="num">
-                                      <p:cBhvr>
-                                        <p:cTn id="23" dur="600" fill="hold">
-                                          <p:stCondLst>
-                                            <p:cond delay="0"/>
-                                          </p:stCondLst>
-                                        </p:cTn>
-                                        <p:tgtEl>
-                                          <p:spTgt spid="10"/>
-                                        </p:tgtEl>
-                                        <p:attrNameLst>
-                                          <p:attrName>ppt_x</p:attrName>
-                                        </p:attrNameLst>
-                                      </p:cBhvr>
-                                    </p:anim>
-                                    <p:anim from="0" to="-1.0" calcmode="lin" valueType="num">
-                                      <p:cBhvr>
-                                        <p:cTn id="24" dur="200" decel="50000" autoRev="1" fill="hold">
-                                          <p:stCondLst>
-                                            <p:cond delay="600"/>
-                                          </p:stCondLst>
-                                        </p:cTn>
-                                        <p:tgtEl>
-                                          <p:spTgt spid="10"/>
-                                        </p:tgtEl>
-                                        <p:attrNameLst>
-                                          <p:attrName>xshear</p:attrName>
-                                        </p:attrNameLst>
-                                      </p:cBhvr>
-                                    </p:anim>
-                                    <p:animScale>
-                                      <p:cBhvr>
-                                        <p:cTn id="25" dur="200" decel="100000" autoRev="1" fill="hold">
-                                          <p:stCondLst>
-                                            <p:cond delay="600"/>
-                                          </p:stCondLst>
-                                        </p:cTn>
-                                        <p:tgtEl>
-                                          <p:spTgt spid="10"/>
-                                        </p:tgtEl>
-                                      </p:cBhvr>
-                                      <p:from x="100000" y="100000"/>
-                                      <p:to x="80000" y="100000"/>
-                                    </p:animScale>
-                                    <p:anim by="(#ppt_h/3+#ppt_w*0.1)" calcmode="lin" valueType="num">
-                                      <p:cBhvr additive="sum">
-                                        <p:cTn id="26" dur="200" decel="100000" autoRev="1" fill="hold">
-                                          <p:stCondLst>
-                                            <p:cond delay="600"/>
-                                          </p:stCondLst>
-                                        </p:cTn>
-                                        <p:tgtEl>
-                                          <p:spTgt spid="10"/>
-                                        </p:tgtEl>
-                                        <p:attrNameLst>
-                                          <p:attrName>ppt_x</p:attrName>
-                                        </p:attrNameLst>
-                                      </p:cBhvr>
-                                    </p:anim>
-                                  </p:childTnLst>
-                                </p:cTn>
-                              </p:par>
-                            </p:childTnLst>
-                          </p:cTn>
-                        </p:par>
-                      </p:childTnLst>
-                    </p:cTn>
-                  </p:par>
-                </p:childTnLst>
-              </p:cTn>
-              <p:prevCondLst>
-                <p:cond evt="onPrev" delay="0">
-                  <p:tgtEl>
-                    <p:sldTgt/>
-                  </p:tgtEl>
-                </p:cond>
-              </p:prevCondLst>
-              <p:nextCondLst>
-                <p:cond evt="onNext" delay="0">
-                  <p:tgtEl>
-                    <p:sldTgt/>
-                  </p:tgtEl>
-                </p:cond>
-              </p:nextCondLst>
-            </p:seq>
-          </p:childTnLst>
-        </p:cTn>
-      </p:par>
-    </p:tnLst>
-    <p:bldLst>
-      <p:bldP spid="6" grpId="0"/>
-      <p:bldP spid="8" grpId="0"/>
-      <p:bldP spid="10" grpId="0"/>
-    </p:bldLst>
-  </p:timing>
-</p:sld>
-</file>
-
-<file path=ppt/slides/slide21.xml><?xml version="1.0" encoding="utf-8"?>
-<p:sld xmlns:a="http://schemas.openxmlformats.org/drawingml/2006/main" xmlns:r="http://schemas.openxmlformats.org/officeDocument/2006/relationships" xmlns:p="http://schemas.openxmlformats.org/presentationml/2006/main">
-  <p:cSld>
-    <p:spTree>
-      <p:nvGrpSpPr>
-        <p:cNvPr id="1" name=""/>
-        <p:cNvGrpSpPr/>
-        <p:nvPr/>
-      </p:nvGrpSpPr>
-      <p:grpSpPr>
-        <a:xfrm>
-          <a:off x="0" y="0"/>
-          <a:ext cx="0" cy="0"/>
-          <a:chOff x="0" y="0"/>
-          <a:chExt cx="0" cy="0"/>
-        </a:xfrm>
-      </p:grpSpPr>
-      <p:sp>
-        <p:nvSpPr>
-          <p:cNvPr id="2" name="Title 1">
-            <a:extLst>
-              <a:ext uri="{FF2B5EF4-FFF2-40B4-BE49-F238E27FC236}">
-                <a16:creationId xmlns:a16="http://schemas.microsoft.com/office/drawing/2014/main" id="{C08D30B1-1864-30EF-7EAB-9BEE656C0012}"/>
-              </a:ext>
-            </a:extLst>
-          </p:cNvPr>
-          <p:cNvSpPr>
-            <a:spLocks noGrp="1"/>
-          </p:cNvSpPr>
-          <p:nvPr>
-            <p:ph type="title"/>
-          </p:nvPr>
-        </p:nvSpPr>
-        <p:spPr/>
-        <p:txBody>
-          <a:bodyPr>
-            <a:noAutofit/>
-          </a:bodyPr>
-          <a:lstStyle/>
-          <a:p>
-            <a:r>
-              <a:rPr lang="en-US">
-                <a:solidFill>
-                  <a:srgbClr val="1F3864"/>
-                </a:solidFill>
-              </a:rPr>
-              <a:t>Example: area between</a:t>
-            </a:r>
-          </a:p>
-        </p:txBody>
-      </p:sp>
-      <p:sp>
-        <p:nvSpPr>
-          <p:cNvPr id="4" name="Slide Number Placeholder 3">
-            <a:extLst>
-              <a:ext uri="{FF2B5EF4-FFF2-40B4-BE49-F238E27FC236}">
-                <a16:creationId xmlns:a16="http://schemas.microsoft.com/office/drawing/2014/main" id="{3F875068-D051-44AE-498E-1BEBEDE3A7C8}"/>
-              </a:ext>
-            </a:extLst>
-          </p:cNvPr>
-          <p:cNvSpPr>
-            <a:spLocks noGrp="1"/>
-          </p:cNvSpPr>
-          <p:nvPr>
-            <p:ph type="sldNum" sz="quarter" idx="12"/>
-          </p:nvPr>
-        </p:nvSpPr>
-        <p:spPr/>
-        <p:txBody>
-          <a:bodyPr/>
-          <a:lstStyle/>
-          <a:p>
-            <a:fld id="{A80A81DD-F10A-4B1C-963A-0ABBB4865886}" type="slidenum">
-              <a:rPr lang="en-US" sz="1600" smtClean="0"/>
-              <a:t>21</a:t>
-            </a:fld>
-            <a:endParaRPr lang="en-US" sz="1600"/>
-          </a:p>
-        </p:txBody>
-      </p:sp>
-      <p:sp>
-        <p:nvSpPr>
-          <p:cNvPr id="3" name="Title rule">
-            <a:extLst>
-              <a:ext uri="{FF2B5EF4-FFF2-40B4-BE49-F238E27FC236}">
-                <a16:creationId xmlns:a16="http://schemas.microsoft.com/office/drawing/2014/main" id="{30656AA8-9645-F028-C769-A313710853CC}"/>
-              </a:ext>
-            </a:extLst>
-          </p:cNvPr>
-          <p:cNvSpPr/>
-          <p:nvPr/>
-        </p:nvSpPr>
-        <p:spPr>
-          <a:xfrm>
-            <a:off x="838200" y="1600200"/>
-            <a:ext cx="10515600" cy="38100"/>
-          </a:xfrm>
-          <a:prstGeom prst="rect">
-            <a:avLst/>
-          </a:prstGeom>
-          <a:solidFill>
-            <a:srgbClr val="4472C4"/>
-          </a:solidFill>
-          <a:ln w="12700" cap="flat" cmpd="sng" algn="ctr">
-            <a:noFill/>
-            <a:prstDash val="solid"/>
-            <a:miter lim="800000"/>
-          </a:ln>
-          <a:effectLst/>
-          <a:extLst>
-            <a:ext uri="{91240B29-F687-4F45-9708-019B960494DF}">
-              <a14:hiddenLine xmlns:a14="http://schemas.microsoft.com/office/drawing/2010/main" w="12700" cap="flat" cmpd="sng" algn="ctr">
-                <a:solidFill>
-                  <a:schemeClr val="accent1">
-                    <a:shade val="15000"/>
-                  </a:schemeClr>
-                </a:solidFill>
-                <a:prstDash val="solid"/>
-                <a:miter lim="800000"/>
-              </a14:hiddenLine>
-            </a:ext>
-          </a:extLst>
-        </p:spPr>
-        <p:style>
-          <a:lnRef idx="2">
-            <a:schemeClr val="accent1">
-              <a:shade val="15000"/>
-            </a:schemeClr>
-          </a:lnRef>
-          <a:fillRef idx="1">
-            <a:schemeClr val="accent1"/>
-          </a:fillRef>
-          <a:effectRef idx="0">
-            <a:schemeClr val="accent1"/>
-          </a:effectRef>
-          <a:fontRef idx="minor">
-            <a:schemeClr val="lt1"/>
-          </a:fontRef>
-        </p:style>
-        <p:txBody>
-          <a:bodyPr rtlCol="0" anchor="ctr"/>
-          <a:lstStyle/>
-          <a:p>
-            <a:pPr algn="ctr"/>
-            <a:endParaRPr lang="en-US"/>
-          </a:p>
-        </p:txBody>
-      </p:sp>
-      <p:sp>
-        <p:nvSpPr>
-          <p:cNvPr id="8" name="Context">
-            <a:extLst>
-              <a:ext uri="{FF2B5EF4-FFF2-40B4-BE49-F238E27FC236}">
-                <a16:creationId xmlns:a16="http://schemas.microsoft.com/office/drawing/2014/main" id="{71E3EA8C-31B4-DAD4-BC4A-65D72E59AD46}"/>
-              </a:ext>
-            </a:extLst>
-          </p:cNvPr>
-          <p:cNvSpPr txBox="1"/>
-          <p:nvPr/>
-        </p:nvSpPr>
-        <p:spPr>
-          <a:xfrm>
-            <a:off x="762000" y="1879600"/>
-            <a:ext cx="10668000" cy="381000"/>
-          </a:xfrm>
-          <a:prstGeom prst="rect">
-            <a:avLst/>
-          </a:prstGeom>
-          <a:noFill/>
-        </p:spPr>
-        <p:txBody>
-          <a:bodyPr vert="horz" wrap="square" rtlCol="0">
-            <a:spAutoFit/>
-          </a:bodyPr>
-          <a:lstStyle/>
-          <a:p>
-            <a:pPr>
-              <a:spcAft>
-                <a:spcPts val="200"/>
-              </a:spcAft>
-            </a:pPr>
-            <a:r>
-              <a:rPr lang="en-US">
-                <a:solidFill>
-                  <a:srgbClr val="000000"/>
-                </a:solidFill>
-                <a:latin typeface="Calibri" panose="020F0502020204030204" pitchFamily="34" charset="0"/>
-              </a:rPr>
-              <a:t>X = the height of a woman in the student heights data, modeled as normal.</a:t>
-            </a:r>
-          </a:p>
-        </p:txBody>
-      </p:sp>
-      <p:sp>
-        <p:nvSpPr>
-          <p:cNvPr id="9" name="Numbers">
-            <a:extLst>
-              <a:ext uri="{FF2B5EF4-FFF2-40B4-BE49-F238E27FC236}">
-                <a16:creationId xmlns:a16="http://schemas.microsoft.com/office/drawing/2014/main" id="{C419F151-05B2-3E4B-BAE8-BB1F06D9D1FD}"/>
-              </a:ext>
-            </a:extLst>
-          </p:cNvPr>
-          <p:cNvSpPr txBox="1"/>
-          <p:nvPr/>
-        </p:nvSpPr>
-        <p:spPr>
-          <a:xfrm>
-            <a:off x="762000" y="2286000"/>
-            <a:ext cx="10668000" cy="400110"/>
-          </a:xfrm>
-          <a:prstGeom prst="rect">
-            <a:avLst/>
-          </a:prstGeom>
-          <a:noFill/>
-        </p:spPr>
-        <p:txBody>
-          <a:bodyPr vert="horz" wrap="square" rtlCol="0">
-            <a:spAutoFit/>
-          </a:bodyPr>
-          <a:lstStyle/>
-          <a:p>
-            <a:pPr>
-              <a:spcAft>
-                <a:spcPts val="200"/>
-              </a:spcAft>
-            </a:pPr>
-            <a:r>
-              <a:rPr lang="en-US" sz="2000" b="1">
-                <a:solidFill>
-                  <a:srgbClr val="000000"/>
-                </a:solidFill>
-                <a:latin typeface="Calibri" panose="020F0502020204030204" pitchFamily="34" charset="0"/>
-              </a:rPr>
-              <a:t>X ~ N(65.4, 3.38);     Week 6:  P(X &lt; 70) = 0.9131</a:t>
-            </a:r>
-          </a:p>
-        </p:txBody>
-      </p:sp>
-      <p:sp>
-        <p:nvSpPr>
-          <p:cNvPr id="10" name="Question">
-            <a:extLst>
-              <a:ext uri="{FF2B5EF4-FFF2-40B4-BE49-F238E27FC236}">
-                <a16:creationId xmlns:a16="http://schemas.microsoft.com/office/drawing/2014/main" id="{B31E395F-B84E-D1E9-D22A-222467FC4105}"/>
-              </a:ext>
-            </a:extLst>
-          </p:cNvPr>
-          <p:cNvSpPr txBox="1"/>
-          <p:nvPr/>
-        </p:nvSpPr>
-        <p:spPr>
-          <a:xfrm>
-            <a:off x="762000" y="2711510"/>
-            <a:ext cx="10668000" cy="974626"/>
-          </a:xfrm>
-          <a:prstGeom prst="rect">
-            <a:avLst/>
-          </a:prstGeom>
-          <a:noFill/>
-        </p:spPr>
-        <p:txBody>
-          <a:bodyPr vert="horz" wrap="square" rtlCol="0">
-            <a:spAutoFit/>
-          </a:bodyPr>
-          <a:lstStyle/>
-          <a:p>
-            <a:pPr>
-              <a:spcAft>
-                <a:spcPts val="200"/>
-              </a:spcAft>
-            </a:pPr>
-            <a:r>
-              <a:rPr lang="en-US" b="1">
-                <a:solidFill>
-                  <a:srgbClr val="C00000"/>
-                </a:solidFill>
-                <a:latin typeface="Calibri" panose="020F0502020204030204" pitchFamily="34" charset="0"/>
-              </a:rPr>
-              <a:t>(a)  What is P(X &gt; 70)?</a:t>
-            </a:r>
-          </a:p>
-          <a:p>
-            <a:pPr>
-              <a:spcAft>
-                <a:spcPts val="200"/>
-              </a:spcAft>
-            </a:pPr>
-            <a:r>
-              <a:rPr lang="en-US" b="1">
-                <a:solidFill>
-                  <a:srgbClr val="C00000"/>
-                </a:solidFill>
-                <a:latin typeface="Calibri" panose="020F0502020204030204" pitchFamily="34" charset="0"/>
-              </a:rPr>
-              <a:t>(b)  What is P(X &lt; 62)?</a:t>
-            </a:r>
-          </a:p>
-          <a:p>
-            <a:pPr>
-              <a:spcAft>
-                <a:spcPts val="200"/>
-              </a:spcAft>
-            </a:pPr>
-            <a:r>
-              <a:rPr lang="en-US" b="1">
-                <a:solidFill>
-                  <a:srgbClr val="C00000"/>
-                </a:solidFill>
-                <a:latin typeface="Calibri" panose="020F0502020204030204" pitchFamily="34" charset="0"/>
-              </a:rPr>
-              <a:t>(c)  What is P(62 &lt; X &lt; 70)?</a:t>
-            </a:r>
-          </a:p>
-        </p:txBody>
-      </p:sp>
-      <p:sp>
-        <p:nvSpPr>
-          <p:cNvPr id="11" name="Result">
-            <a:extLst>
-              <a:ext uri="{FF2B5EF4-FFF2-40B4-BE49-F238E27FC236}">
-                <a16:creationId xmlns:a16="http://schemas.microsoft.com/office/drawing/2014/main" id="{5A70F68E-0D93-07B8-82B2-4D8F2F681D0D}"/>
-              </a:ext>
-            </a:extLst>
-          </p:cNvPr>
-          <p:cNvSpPr/>
-          <p:nvPr/>
-        </p:nvSpPr>
-        <p:spPr>
-          <a:xfrm>
-            <a:off x="762000" y="3838536"/>
-            <a:ext cx="10668000" cy="1098054"/>
-          </a:xfrm>
-          <a:prstGeom prst="roundRect">
-            <a:avLst>
-              <a:gd name="adj" fmla="val 4000"/>
-            </a:avLst>
-          </a:prstGeom>
-          <a:solidFill>
-            <a:srgbClr val="F2F6FC"/>
-          </a:solidFill>
-          <a:ln w="15875">
-            <a:solidFill>
-              <a:srgbClr val="4472C4"/>
-            </a:solidFill>
-          </a:ln>
-        </p:spPr>
-        <p:style>
-          <a:lnRef idx="2">
-            <a:schemeClr val="accent1">
-              <a:shade val="15000"/>
-            </a:schemeClr>
-          </a:lnRef>
-          <a:fillRef idx="1">
-            <a:schemeClr val="accent1"/>
-          </a:fillRef>
-          <a:effectRef idx="0">
-            <a:schemeClr val="accent1"/>
-          </a:effectRef>
-          <a:fontRef idx="minor">
-            <a:schemeClr val="lt1"/>
-          </a:fontRef>
-        </p:style>
-        <p:txBody>
-          <a:bodyPr wrap="square" lIns="152400" tIns="76200" rIns="152400" bIns="76200" rtlCol="0" anchor="ctr">
-            <a:spAutoFit/>
-          </a:bodyPr>
-          <a:lstStyle/>
-          <a:p>
-            <a:r>
-              <a:rPr lang="en-US" sz="2000" b="1">
-                <a:solidFill>
-                  <a:srgbClr val="C00000"/>
-                </a:solidFill>
-                <a:latin typeface="Calibri" panose="020F0502020204030204" pitchFamily="34" charset="0"/>
-              </a:rPr>
-              <a:t>(a)  1 − 0.9131 = 0.0869</a:t>
-            </a:r>
-          </a:p>
-          <a:p>
-            <a:r>
-              <a:rPr lang="en-US" sz="2000" b="1">
-                <a:solidFill>
-                  <a:srgbClr val="C00000"/>
-                </a:solidFill>
-                <a:latin typeface="Calibri" panose="020F0502020204030204" pitchFamily="34" charset="0"/>
-              </a:rPr>
-              <a:t>(b)  z = (62 − 65.4) / 3.38 = −1.01:   table gives 0.1562</a:t>
-            </a:r>
-          </a:p>
-          <a:p>
-            <a:r>
-              <a:rPr lang="en-US" sz="2000" b="1">
-                <a:solidFill>
-                  <a:srgbClr val="C00000"/>
-                </a:solidFill>
-                <a:latin typeface="Calibri" panose="020F0502020204030204" pitchFamily="34" charset="0"/>
-              </a:rPr>
-              <a:t>(c)  0.9131 − 0.1562 = 0.7569 ≈ 0.76</a:t>
-            </a:r>
-          </a:p>
-        </p:txBody>
-      </p:sp>
-    </p:spTree>
-    <p:extLst>
-      <p:ext uri="{BB962C8B-B14F-4D97-AF65-F5344CB8AC3E}">
-        <p14:creationId xmlns:p14="http://schemas.microsoft.com/office/powerpoint/2010/main" val="1449616950"/>
-      </p:ext>
-    </p:extLst>
-  </p:cSld>
-  <p:clrMapOvr>
-    <a:masterClrMapping/>
-  </p:clrMapOvr>
-  <p:timing>
-    <p:tnLst>
-      <p:par>
-        <p:cTn id="1" dur="indefinite" restart="never" nodeType="tmRoot">
-          <p:childTnLst>
-            <p:seq concurrent="1" nextAc="seek">
-              <p:cTn id="2" dur="indefinite" nodeType="mainSeq">
-                <p:childTnLst>
-                  <p:par>
-                    <p:cTn id="3" fill="hold">
-                      <p:stCondLst>
-                        <p:cond delay="indefinite"/>
-                      </p:stCondLst>
-                      <p:childTnLst>
-                        <p:par>
-                          <p:cTn id="4" fill="hold">
-                            <p:stCondLst>
-                              <p:cond delay="0"/>
-                            </p:stCondLst>
-                            <p:childTnLst>
-                              <p:par>
-                                <p:cTn id="5" presetID="1" presetClass="entr" presetSubtype="0" fill="hold" grpId="0" nodeType="clickEffect">
-                                  <p:stCondLst>
-                                    <p:cond delay="0"/>
-                                  </p:stCondLst>
-                                  <p:childTnLst>
-                                    <p:set>
-                                      <p:cBhvr>
-                                        <p:cTn id="6" dur="1" fill="hold">
-                                          <p:stCondLst>
-                                            <p:cond delay="0"/>
-                                          </p:stCondLst>
-                                        </p:cTn>
-                                        <p:tgtEl>
-                                          <p:spTgt spid="11"/>
-                                        </p:tgtEl>
-                                        <p:attrNameLst>
-                                          <p:attrName>style.visibility</p:attrName>
-                                        </p:attrNameLst>
-                                      </p:cBhvr>
-                                      <p:to>
-                                        <p:strVal val="visible"/>
-                                      </p:to>
-                                    </p:set>
-                                  </p:childTnLst>
-                                </p:cTn>
-                              </p:par>
-                            </p:childTnLst>
-                          </p:cTn>
-                        </p:par>
-                      </p:childTnLst>
-                    </p:cTn>
-                  </p:par>
-                </p:childTnLst>
-              </p:cTn>
-              <p:prevCondLst>
-                <p:cond evt="onPrev" delay="0">
-                  <p:tgtEl>
-                    <p:sldTgt/>
-                  </p:tgtEl>
-                </p:cond>
-              </p:prevCondLst>
-              <p:nextCondLst>
-                <p:cond evt="onNext" delay="0">
-                  <p:tgtEl>
-                    <p:sldTgt/>
-                  </p:tgtEl>
-                </p:cond>
-              </p:nextCondLst>
-            </p:seq>
-          </p:childTnLst>
-        </p:cTn>
-      </p:par>
-    </p:tnLst>
-    <p:bldLst>
-      <p:bldP spid="11" grpId="0" animBg="1"/>
-    </p:bldLst>
-  </p:timing>
-</p:sld>
-</file>
-
-<file path=ppt/slides/slide22.xml><?xml version="1.0" encoding="utf-8"?>
-<p:sld xmlns:a="http://schemas.openxmlformats.org/drawingml/2006/main" xmlns:r="http://schemas.openxmlformats.org/officeDocument/2006/relationships" xmlns:p="http://schemas.openxmlformats.org/presentationml/2006/main">
-  <p:cSld>
-    <p:spTree>
-      <p:nvGrpSpPr>
-        <p:cNvPr id="1" name=""/>
-        <p:cNvGrpSpPr/>
-        <p:nvPr/>
-      </p:nvGrpSpPr>
-      <p:grpSpPr>
-        <a:xfrm>
-          <a:off x="0" y="0"/>
-          <a:ext cx="0" cy="0"/>
-          <a:chOff x="0" y="0"/>
-          <a:chExt cx="0" cy="0"/>
-        </a:xfrm>
-      </p:grpSpPr>
-      <p:sp>
-        <p:nvSpPr>
-          <p:cNvPr id="2" name="Title 1">
-            <a:extLst>
-              <a:ext uri="{FF2B5EF4-FFF2-40B4-BE49-F238E27FC236}">
-                <a16:creationId xmlns:a16="http://schemas.microsoft.com/office/drawing/2014/main" id="{D617AB41-6AD1-9EF2-7F95-46A904399681}"/>
-              </a:ext>
-            </a:extLst>
-          </p:cNvPr>
-          <p:cNvSpPr>
-            <a:spLocks noGrp="1"/>
-          </p:cNvSpPr>
-          <p:nvPr>
-            <p:ph type="title"/>
-          </p:nvPr>
-        </p:nvSpPr>
-        <p:spPr/>
-        <p:txBody>
-          <a:bodyPr>
-            <a:noAutofit/>
-          </a:bodyPr>
-          <a:lstStyle/>
-          <a:p>
-            <a:r>
-              <a:rPr lang="en-US">
-                <a:solidFill>
-                  <a:srgbClr val="1F3864"/>
-                </a:solidFill>
-              </a:rPr>
-              <a:t>What you should know: distributions</a:t>
-            </a:r>
-          </a:p>
-        </p:txBody>
-      </p:sp>
-      <p:sp>
-        <p:nvSpPr>
-          <p:cNvPr id="4" name="Slide Number Placeholder 3">
-            <a:extLst>
-              <a:ext uri="{FF2B5EF4-FFF2-40B4-BE49-F238E27FC236}">
-                <a16:creationId xmlns:a16="http://schemas.microsoft.com/office/drawing/2014/main" id="{97D44AE5-98B5-B840-6B8A-D345C7C2E2F0}"/>
-              </a:ext>
-            </a:extLst>
-          </p:cNvPr>
-          <p:cNvSpPr>
-            <a:spLocks noGrp="1"/>
-          </p:cNvSpPr>
-          <p:nvPr>
-            <p:ph type="sldNum" sz="quarter" idx="12"/>
-          </p:nvPr>
-        </p:nvSpPr>
-        <p:spPr/>
-        <p:txBody>
-          <a:bodyPr/>
-          <a:lstStyle/>
-          <a:p>
-            <a:fld id="{A80A81DD-F10A-4B1C-963A-0ABBB4865886}" type="slidenum">
-              <a:rPr lang="en-US" sz="1600" smtClean="0"/>
-              <a:t>22</a:t>
-            </a:fld>
-            <a:endParaRPr lang="en-US" sz="1600"/>
-          </a:p>
-        </p:txBody>
-      </p:sp>
-      <p:sp>
-        <p:nvSpPr>
-          <p:cNvPr id="5" name="TextBox 4">
-            <a:extLst>
-              <a:ext uri="{FF2B5EF4-FFF2-40B4-BE49-F238E27FC236}">
-                <a16:creationId xmlns:a16="http://schemas.microsoft.com/office/drawing/2014/main" id="{A34AAE17-27CE-D7A3-C663-11BB48ACBF5B}"/>
-              </a:ext>
-            </a:extLst>
-          </p:cNvPr>
-          <p:cNvSpPr txBox="1"/>
-          <p:nvPr/>
-        </p:nvSpPr>
-        <p:spPr>
-          <a:xfrm>
-            <a:off x="762000" y="1879600"/>
-            <a:ext cx="10668000" cy="345440"/>
-          </a:xfrm>
-          <a:prstGeom prst="rect">
-            <a:avLst/>
-          </a:prstGeom>
-          <a:noFill/>
-        </p:spPr>
-        <p:txBody>
-          <a:bodyPr vert="horz" wrap="square" rtlCol="0">
-            <a:spAutoFit/>
-          </a:bodyPr>
-          <a:lstStyle/>
-          <a:p>
-            <a:pPr marL="304800" indent="-304800"/>
-            <a:r>
-              <a:rPr lang="en-US" sz="1600">
-                <a:solidFill>
-                  <a:srgbClr val="000000"/>
-                </a:solidFill>
-              </a:rPr>
-              <a:t>expected value</a:t>
-            </a:r>
-          </a:p>
-        </p:txBody>
-      </p:sp>
-      <p:sp>
-        <p:nvSpPr>
-          <p:cNvPr id="6" name="TextBox 5">
-            <a:extLst>
-              <a:ext uri="{FF2B5EF4-FFF2-40B4-BE49-F238E27FC236}">
-                <a16:creationId xmlns:a16="http://schemas.microsoft.com/office/drawing/2014/main" id="{E410A0F8-5E1E-9A1D-B64C-50827EE6C9B2}"/>
-              </a:ext>
-            </a:extLst>
-          </p:cNvPr>
-          <p:cNvSpPr txBox="1"/>
-          <p:nvPr/>
-        </p:nvSpPr>
-        <p:spPr>
-          <a:xfrm>
-            <a:off x="1117600" y="2225040"/>
-            <a:ext cx="10312400" cy="338554"/>
-          </a:xfrm>
-          <a:prstGeom prst="rect">
-            <a:avLst/>
-          </a:prstGeom>
-          <a:noFill/>
-        </p:spPr>
-        <p:txBody>
-          <a:bodyPr vert="horz" wrap="square" rtlCol="0">
-            <a:spAutoFit/>
-          </a:bodyPr>
-          <a:lstStyle/>
-          <a:p>
-            <a:r>
-              <a:rPr lang="en-US" sz="1600" b="1">
-                <a:solidFill>
-                  <a:srgbClr val="C00000"/>
-                </a:solidFill>
-              </a:rPr>
-              <a:t>μ = Σ x P(x):  the long-run average of X</a:t>
-            </a:r>
-          </a:p>
-        </p:txBody>
-      </p:sp>
-      <p:sp>
-        <p:nvSpPr>
-          <p:cNvPr id="7" name="TextBox 6">
-            <a:extLst>
-              <a:ext uri="{FF2B5EF4-FFF2-40B4-BE49-F238E27FC236}">
-                <a16:creationId xmlns:a16="http://schemas.microsoft.com/office/drawing/2014/main" id="{47D3CD95-D52E-5227-B663-7C0A72677B6E}"/>
-              </a:ext>
-            </a:extLst>
-          </p:cNvPr>
-          <p:cNvSpPr txBox="1"/>
-          <p:nvPr/>
-        </p:nvSpPr>
-        <p:spPr>
-          <a:xfrm>
-            <a:off x="762000" y="2741394"/>
-            <a:ext cx="10668000" cy="345440"/>
-          </a:xfrm>
-          <a:prstGeom prst="rect">
-            <a:avLst/>
-          </a:prstGeom>
-          <a:noFill/>
-        </p:spPr>
-        <p:txBody>
-          <a:bodyPr vert="horz" wrap="square" rtlCol="0">
-            <a:spAutoFit/>
-          </a:bodyPr>
-          <a:lstStyle/>
-          <a:p>
-            <a:pPr marL="304800" indent="-304800"/>
-            <a:r>
-              <a:rPr lang="en-US" sz="1600">
-                <a:solidFill>
-                  <a:srgbClr val="000000"/>
-                </a:solidFill>
-              </a:rPr>
-              <a:t>binomial</a:t>
-            </a:r>
-          </a:p>
-        </p:txBody>
-      </p:sp>
-      <p:sp>
-        <p:nvSpPr>
-          <p:cNvPr id="8" name="TextBox 7">
-            <a:extLst>
-              <a:ext uri="{FF2B5EF4-FFF2-40B4-BE49-F238E27FC236}">
-                <a16:creationId xmlns:a16="http://schemas.microsoft.com/office/drawing/2014/main" id="{1CE3E601-601D-C6B1-8265-C079CB8C9269}"/>
-              </a:ext>
-            </a:extLst>
-          </p:cNvPr>
-          <p:cNvSpPr txBox="1"/>
-          <p:nvPr/>
-        </p:nvSpPr>
-        <p:spPr>
-          <a:xfrm>
-            <a:off x="1117600" y="3086834"/>
-            <a:ext cx="10312400" cy="338554"/>
-          </a:xfrm>
-          <a:prstGeom prst="rect">
-            <a:avLst/>
-          </a:prstGeom>
-          <a:noFill/>
-        </p:spPr>
-        <p:txBody>
-          <a:bodyPr vert="horz" wrap="square" rtlCol="0">
-            <a:spAutoFit/>
-          </a:bodyPr>
-          <a:lstStyle/>
-          <a:p>
-            <a:r>
-              <a:rPr lang="en-US" sz="1600" b="1">
-                <a:solidFill>
-                  <a:srgbClr val="C00000"/>
-                </a:solidFill>
-              </a:rPr>
-              <a:t>successes in n independent trials with the same p:   μ = np,   σ² = np(1 − p);   Bernoulli is n = 1</a:t>
-            </a:r>
-          </a:p>
-        </p:txBody>
-      </p:sp>
-      <p:sp>
-        <p:nvSpPr>
-          <p:cNvPr id="9" name="TextBox 8">
-            <a:extLst>
-              <a:ext uri="{FF2B5EF4-FFF2-40B4-BE49-F238E27FC236}">
-                <a16:creationId xmlns:a16="http://schemas.microsoft.com/office/drawing/2014/main" id="{FB002BF4-8037-2F73-E27A-7A453477E389}"/>
-              </a:ext>
-            </a:extLst>
-          </p:cNvPr>
-          <p:cNvSpPr txBox="1"/>
-          <p:nvPr/>
-        </p:nvSpPr>
-        <p:spPr>
-          <a:xfrm>
-            <a:off x="762000" y="3603188"/>
-            <a:ext cx="10668000" cy="345440"/>
-          </a:xfrm>
-          <a:prstGeom prst="rect">
-            <a:avLst/>
-          </a:prstGeom>
-          <a:noFill/>
-        </p:spPr>
-        <p:txBody>
-          <a:bodyPr vert="horz" wrap="square" rtlCol="0">
-            <a:spAutoFit/>
-          </a:bodyPr>
-          <a:lstStyle/>
-          <a:p>
-            <a:pPr marL="304800" indent="-304800"/>
-            <a:r>
-              <a:rPr lang="en-US" sz="1600">
-                <a:solidFill>
-                  <a:srgbClr val="000000"/>
-                </a:solidFill>
-              </a:rPr>
-              <a:t>Poisson</a:t>
-            </a:r>
-          </a:p>
-        </p:txBody>
-      </p:sp>
-      <p:sp>
-        <p:nvSpPr>
-          <p:cNvPr id="10" name="TextBox 9">
-            <a:extLst>
-              <a:ext uri="{FF2B5EF4-FFF2-40B4-BE49-F238E27FC236}">
-                <a16:creationId xmlns:a16="http://schemas.microsoft.com/office/drawing/2014/main" id="{10F3B3E3-D27C-E008-C93E-ED70BD2A4754}"/>
-              </a:ext>
-            </a:extLst>
-          </p:cNvPr>
-          <p:cNvSpPr txBox="1"/>
-          <p:nvPr/>
-        </p:nvSpPr>
-        <p:spPr>
-          <a:xfrm>
-            <a:off x="1117600" y="3948628"/>
-            <a:ext cx="10312400" cy="338554"/>
-          </a:xfrm>
-          <a:prstGeom prst="rect">
-            <a:avLst/>
-          </a:prstGeom>
-          <a:noFill/>
-        </p:spPr>
-        <p:txBody>
-          <a:bodyPr vert="horz" wrap="square" rtlCol="0">
-            <a:spAutoFit/>
-          </a:bodyPr>
-          <a:lstStyle/>
-          <a:p>
-            <a:r>
-              <a:rPr lang="en-US" sz="1600" b="1">
-                <a:solidFill>
-                  <a:srgbClr val="C00000"/>
-                </a:solidFill>
-              </a:rPr>
-              <a:t>events in a fixed interval at an average rate λ:   μ = σ² = λ</a:t>
-            </a:r>
-          </a:p>
-        </p:txBody>
-      </p:sp>
-      <p:sp>
-        <p:nvSpPr>
-          <p:cNvPr id="3" name="Title rule">
-            <a:extLst>
-              <a:ext uri="{FF2B5EF4-FFF2-40B4-BE49-F238E27FC236}">
-                <a16:creationId xmlns:a16="http://schemas.microsoft.com/office/drawing/2014/main" id="{B469CAAB-2B69-6863-7C28-0C5959E5734B}"/>
-              </a:ext>
-            </a:extLst>
-          </p:cNvPr>
-          <p:cNvSpPr/>
-          <p:nvPr/>
-        </p:nvSpPr>
-        <p:spPr>
-          <a:xfrm>
-            <a:off x="838200" y="1600200"/>
-            <a:ext cx="10515600" cy="38100"/>
-          </a:xfrm>
-          <a:prstGeom prst="rect">
-            <a:avLst/>
-          </a:prstGeom>
-          <a:solidFill>
-            <a:srgbClr val="4472C4"/>
-          </a:solidFill>
-          <a:ln w="12700" cap="flat" cmpd="sng" algn="ctr">
-            <a:noFill/>
-            <a:prstDash val="solid"/>
-            <a:miter lim="800000"/>
-          </a:ln>
-          <a:effectLst/>
-          <a:extLst>
-            <a:ext uri="{91240B29-F687-4F45-9708-019B960494DF}">
-              <a14:hiddenLine xmlns:a14="http://schemas.microsoft.com/office/drawing/2010/main" w="12700" cap="flat" cmpd="sng" algn="ctr">
-                <a:solidFill>
-                  <a:schemeClr val="accent1">
-                    <a:shade val="15000"/>
-                  </a:schemeClr>
-                </a:solidFill>
-                <a:prstDash val="solid"/>
-                <a:miter lim="800000"/>
-              </a14:hiddenLine>
-            </a:ext>
-          </a:extLst>
-        </p:spPr>
-        <p:style>
-          <a:lnRef idx="2">
-            <a:schemeClr val="accent1">
-              <a:shade val="15000"/>
-            </a:schemeClr>
-          </a:lnRef>
-          <a:fillRef idx="1">
-            <a:schemeClr val="accent1"/>
-          </a:fillRef>
-          <a:effectRef idx="0">
-            <a:schemeClr val="accent1"/>
-          </a:effectRef>
-          <a:fontRef idx="minor">
-            <a:schemeClr val="lt1"/>
-          </a:fontRef>
-        </p:style>
-        <p:txBody>
-          <a:bodyPr rtlCol="0" anchor="ctr"/>
-          <a:lstStyle/>
-          <a:p>
-            <a:pPr algn="ctr"/>
-            <a:endParaRPr lang="en-US"/>
-          </a:p>
-        </p:txBody>
-      </p:sp>
-      <p:sp>
-        <p:nvSpPr>
-          <p:cNvPr id="11" name="TextBox 10">
-            <a:extLst>
-              <a:ext uri="{FF2B5EF4-FFF2-40B4-BE49-F238E27FC236}">
-                <a16:creationId xmlns:a16="http://schemas.microsoft.com/office/drawing/2014/main" id="{7E252B31-0A80-8297-9AB5-9AED735ACDE2}"/>
-              </a:ext>
-            </a:extLst>
-          </p:cNvPr>
-          <p:cNvSpPr txBox="1"/>
-          <p:nvPr/>
-        </p:nvSpPr>
-        <p:spPr>
-          <a:xfrm>
-            <a:off x="762000" y="4464982"/>
-            <a:ext cx="10668000" cy="345440"/>
-          </a:xfrm>
-          <a:prstGeom prst="rect">
-            <a:avLst/>
-          </a:prstGeom>
-          <a:noFill/>
-        </p:spPr>
-        <p:txBody>
-          <a:bodyPr vert="horz" wrap="square" rtlCol="0">
-            <a:spAutoFit/>
-          </a:bodyPr>
-          <a:lstStyle/>
-          <a:p>
-            <a:pPr marL="304800" indent="-304800"/>
-            <a:r>
-              <a:rPr lang="en-US" sz="1600">
-                <a:solidFill>
-                  <a:srgbClr val="000000"/>
-                </a:solidFill>
-              </a:rPr>
-              <a:t>continuous</a:t>
-            </a:r>
-          </a:p>
-        </p:txBody>
-      </p:sp>
-      <p:sp>
-        <p:nvSpPr>
-          <p:cNvPr id="12" name="TextBox 11">
-            <a:extLst>
-              <a:ext uri="{FF2B5EF4-FFF2-40B4-BE49-F238E27FC236}">
-                <a16:creationId xmlns:a16="http://schemas.microsoft.com/office/drawing/2014/main" id="{A1980B2D-2D53-A814-88AF-46C2FDF3E298}"/>
-              </a:ext>
-            </a:extLst>
-          </p:cNvPr>
-          <p:cNvSpPr txBox="1"/>
-          <p:nvPr/>
-        </p:nvSpPr>
-        <p:spPr>
-          <a:xfrm>
-            <a:off x="1117600" y="4810422"/>
-            <a:ext cx="10312400" cy="338554"/>
-          </a:xfrm>
-          <a:prstGeom prst="rect">
-            <a:avLst/>
-          </a:prstGeom>
-          <a:noFill/>
-        </p:spPr>
-        <p:txBody>
-          <a:bodyPr vert="horz" wrap="square" rtlCol="0">
-            <a:spAutoFit/>
-          </a:bodyPr>
-          <a:lstStyle/>
-          <a:p>
-            <a:r>
-              <a:rPr lang="en-US" sz="1600" b="1">
-                <a:solidFill>
-                  <a:srgbClr val="C00000"/>
-                </a:solidFill>
-              </a:rPr>
-              <a:t>probability is area under the density curve;   P(X = c) = 0;   P(a &lt; X &lt; b) = P(X ≤ b) − P(X ≤ a)</a:t>
-            </a:r>
-          </a:p>
-        </p:txBody>
-      </p:sp>
-    </p:spTree>
-    <p:extLst>
-      <p:ext uri="{BB962C8B-B14F-4D97-AF65-F5344CB8AC3E}">
-        <p14:creationId xmlns:p14="http://schemas.microsoft.com/office/powerpoint/2010/main" val="3324539635"/>
-      </p:ext>
-    </p:extLst>
-  </p:cSld>
-  <p:clrMapOvr>
-    <a:masterClrMapping/>
-  </p:clrMapOvr>
-  <p:timing>
-    <p:tnLst>
-      <p:par>
-        <p:cTn id="1" dur="indefinite" restart="never" nodeType="tmRoot">
-          <p:childTnLst>
-            <p:seq concurrent="1" nextAc="seek">
-              <p:cTn id="2" dur="indefinite" nodeType="mainSeq">
-                <p:childTnLst>
-                  <p:par>
-                    <p:cTn id="3" fill="hold">
-                      <p:stCondLst>
-                        <p:cond delay="indefinite"/>
-                      </p:stCondLst>
-                      <p:childTnLst>
-                        <p:par>
-                          <p:cTn id="4" fill="hold">
-                            <p:stCondLst>
-                              <p:cond delay="0"/>
-                            </p:stCondLst>
-                            <p:childTnLst>
-                              <p:par>
-                                <p:cTn id="5" presetID="34" presetClass="entr" presetSubtype="0" fill="hold" grpId="0" nodeType="clickEffect">
-                                  <p:stCondLst>
-                                    <p:cond delay="0"/>
-                                  </p:stCondLst>
-                                  <p:childTnLst>
-                                    <p:set>
-                                      <p:cBhvr>
-                                        <p:cTn id="6" dur="1" fill="hold">
-                                          <p:stCondLst>
-                                            <p:cond delay="0"/>
-                                          </p:stCondLst>
-                                        </p:cTn>
-                                        <p:tgtEl>
-                                          <p:spTgt spid="6"/>
-                                        </p:tgtEl>
-                                        <p:attrNameLst>
-                                          <p:attrName>style.visibility</p:attrName>
-                                        </p:attrNameLst>
-                                      </p:cBhvr>
-                                      <p:to>
-                                        <p:strVal val="visible"/>
-                                      </p:to>
-                                    </p:set>
-                                    <p:anim from="(-#ppt_w/2)" to="(#ppt_x)" calcmode="lin" valueType="num">
-                                      <p:cBhvr>
-                                        <p:cTn id="7" dur="600" fill="hold">
-                                          <p:stCondLst>
-                                            <p:cond delay="0"/>
-                                          </p:stCondLst>
-                                        </p:cTn>
-                                        <p:tgtEl>
-                                          <p:spTgt spid="6"/>
-                                        </p:tgtEl>
-                                        <p:attrNameLst>
-                                          <p:attrName>ppt_x</p:attrName>
-                                        </p:attrNameLst>
-                                      </p:cBhvr>
-                                    </p:anim>
-                                    <p:anim from="0" to="-1.0" calcmode="lin" valueType="num">
-                                      <p:cBhvr>
-                                        <p:cTn id="8" dur="200" decel="50000" autoRev="1" fill="hold">
-                                          <p:stCondLst>
-                                            <p:cond delay="600"/>
-                                          </p:stCondLst>
-                                        </p:cTn>
-                                        <p:tgtEl>
-                                          <p:spTgt spid="6"/>
-                                        </p:tgtEl>
-                                        <p:attrNameLst>
-                                          <p:attrName>xshear</p:attrName>
-                                        </p:attrNameLst>
-                                      </p:cBhvr>
-                                    </p:anim>
-                                    <p:animScale>
-                                      <p:cBhvr>
-                                        <p:cTn id="9" dur="200" decel="100000" autoRev="1" fill="hold">
-                                          <p:stCondLst>
-                                            <p:cond delay="600"/>
-                                          </p:stCondLst>
-                                        </p:cTn>
-                                        <p:tgtEl>
-                                          <p:spTgt spid="6"/>
-                                        </p:tgtEl>
-                                      </p:cBhvr>
-                                      <p:from x="100000" y="100000"/>
-                                      <p:to x="80000" y="100000"/>
-                                    </p:animScale>
-                                    <p:anim by="(#ppt_h/3+#ppt_w*0.1)" calcmode="lin" valueType="num">
-                                      <p:cBhvr additive="sum">
-                                        <p:cTn id="10" dur="200" decel="100000" autoRev="1" fill="hold">
-                                          <p:stCondLst>
-                                            <p:cond delay="600"/>
-                                          </p:stCondLst>
-                                        </p:cTn>
-                                        <p:tgtEl>
-                                          <p:spTgt spid="6"/>
-                                        </p:tgtEl>
-                                        <p:attrNameLst>
-                                          <p:attrName>ppt_x</p:attrName>
-                                        </p:attrNameLst>
-                                      </p:cBhvr>
-                                    </p:anim>
-                                  </p:childTnLst>
-                                </p:cTn>
-                              </p:par>
-                            </p:childTnLst>
-                          </p:cTn>
-                        </p:par>
-                      </p:childTnLst>
-                    </p:cTn>
-                  </p:par>
-                  <p:par>
-                    <p:cTn id="11" fill="hold">
-                      <p:stCondLst>
-                        <p:cond delay="indefinite"/>
-                      </p:stCondLst>
-                      <p:childTnLst>
-                        <p:par>
-                          <p:cTn id="12" fill="hold">
-                            <p:stCondLst>
-                              <p:cond delay="0"/>
-                            </p:stCondLst>
-                            <p:childTnLst>
-                              <p:par>
-                                <p:cTn id="13" presetID="34" presetClass="entr" presetSubtype="0" fill="hold" grpId="0" nodeType="clickEffect">
-                                  <p:stCondLst>
-                                    <p:cond delay="0"/>
-                                  </p:stCondLst>
-                                  <p:childTnLst>
-                                    <p:set>
-                                      <p:cBhvr>
-                                        <p:cTn id="14" dur="1" fill="hold">
-                                          <p:stCondLst>
-                                            <p:cond delay="0"/>
-                                          </p:stCondLst>
-                                        </p:cTn>
-                                        <p:tgtEl>
-                                          <p:spTgt spid="8"/>
-                                        </p:tgtEl>
-                                        <p:attrNameLst>
-                                          <p:attrName>style.visibility</p:attrName>
-                                        </p:attrNameLst>
-                                      </p:cBhvr>
-                                      <p:to>
-                                        <p:strVal val="visible"/>
-                                      </p:to>
-                                    </p:set>
-                                    <p:anim from="(-#ppt_w/2)" to="(#ppt_x)" calcmode="lin" valueType="num">
-                                      <p:cBhvr>
-                                        <p:cTn id="15" dur="600" fill="hold">
-                                          <p:stCondLst>
-                                            <p:cond delay="0"/>
-                                          </p:stCondLst>
-                                        </p:cTn>
-                                        <p:tgtEl>
-                                          <p:spTgt spid="8"/>
-                                        </p:tgtEl>
-                                        <p:attrNameLst>
-                                          <p:attrName>ppt_x</p:attrName>
-                                        </p:attrNameLst>
-                                      </p:cBhvr>
-                                    </p:anim>
-                                    <p:anim from="0" to="-1.0" calcmode="lin" valueType="num">
-                                      <p:cBhvr>
-                                        <p:cTn id="16" dur="200" decel="50000" autoRev="1" fill="hold">
-                                          <p:stCondLst>
-                                            <p:cond delay="600"/>
-                                          </p:stCondLst>
-                                        </p:cTn>
-                                        <p:tgtEl>
-                                          <p:spTgt spid="8"/>
-                                        </p:tgtEl>
-                                        <p:attrNameLst>
-                                          <p:attrName>xshear</p:attrName>
-                                        </p:attrNameLst>
-                                      </p:cBhvr>
-                                    </p:anim>
-                                    <p:animScale>
-                                      <p:cBhvr>
-                                        <p:cTn id="17" dur="200" decel="100000" autoRev="1" fill="hold">
-                                          <p:stCondLst>
-                                            <p:cond delay="600"/>
-                                          </p:stCondLst>
-                                        </p:cTn>
-                                        <p:tgtEl>
-                                          <p:spTgt spid="8"/>
-                                        </p:tgtEl>
-                                      </p:cBhvr>
-                                      <p:from x="100000" y="100000"/>
-                                      <p:to x="80000" y="100000"/>
-                                    </p:animScale>
-                                    <p:anim by="(#ppt_h/3+#ppt_w*0.1)" calcmode="lin" valueType="num">
-                                      <p:cBhvr additive="sum">
-                                        <p:cTn id="18" dur="200" decel="100000" autoRev="1" fill="hold">
-                                          <p:stCondLst>
-                                            <p:cond delay="600"/>
-                                          </p:stCondLst>
-                                        </p:cTn>
-                                        <p:tgtEl>
-                                          <p:spTgt spid="8"/>
-                                        </p:tgtEl>
-                                        <p:attrNameLst>
-                                          <p:attrName>ppt_x</p:attrName>
-                                        </p:attrNameLst>
-                                      </p:cBhvr>
-                                    </p:anim>
-                                  </p:childTnLst>
-                                </p:cTn>
-                              </p:par>
-                            </p:childTnLst>
-                          </p:cTn>
-                        </p:par>
-                      </p:childTnLst>
-                    </p:cTn>
-                  </p:par>
-                  <p:par>
-                    <p:cTn id="19" fill="hold">
-                      <p:stCondLst>
-                        <p:cond delay="indefinite"/>
-                      </p:stCondLst>
-                      <p:childTnLst>
-                        <p:par>
-                          <p:cTn id="20" fill="hold">
-                            <p:stCondLst>
-                              <p:cond delay="0"/>
-                            </p:stCondLst>
-                            <p:childTnLst>
-                              <p:par>
-                                <p:cTn id="21" presetID="34" presetClass="entr" presetSubtype="0" fill="hold" grpId="0" nodeType="clickEffect">
-                                  <p:stCondLst>
-                                    <p:cond delay="0"/>
-                                  </p:stCondLst>
-                                  <p:childTnLst>
-                                    <p:set>
-                                      <p:cBhvr>
-                                        <p:cTn id="22" dur="1" fill="hold">
-                                          <p:stCondLst>
-                                            <p:cond delay="0"/>
-                                          </p:stCondLst>
-                                        </p:cTn>
-                                        <p:tgtEl>
-                                          <p:spTgt spid="10"/>
-                                        </p:tgtEl>
-                                        <p:attrNameLst>
-                                          <p:attrName>style.visibility</p:attrName>
-                                        </p:attrNameLst>
-                                      </p:cBhvr>
-                                      <p:to>
-                                        <p:strVal val="visible"/>
-                                      </p:to>
-                                    </p:set>
-                                    <p:anim from="(-#ppt_w/2)" to="(#ppt_x)" calcmode="lin" valueType="num">
-                                      <p:cBhvr>
-                                        <p:cTn id="23" dur="600" fill="hold">
-                                          <p:stCondLst>
-                                            <p:cond delay="0"/>
-                                          </p:stCondLst>
-                                        </p:cTn>
-                                        <p:tgtEl>
-                                          <p:spTgt spid="10"/>
-                                        </p:tgtEl>
-                                        <p:attrNameLst>
-                                          <p:attrName>ppt_x</p:attrName>
-                                        </p:attrNameLst>
-                                      </p:cBhvr>
-                                    </p:anim>
-                                    <p:anim from="0" to="-1.0" calcmode="lin" valueType="num">
-                                      <p:cBhvr>
-                                        <p:cTn id="24" dur="200" decel="50000" autoRev="1" fill="hold">
-                                          <p:stCondLst>
-                                            <p:cond delay="600"/>
-                                          </p:stCondLst>
-                                        </p:cTn>
-                                        <p:tgtEl>
-                                          <p:spTgt spid="10"/>
-                                        </p:tgtEl>
-                                        <p:attrNameLst>
-                                          <p:attrName>xshear</p:attrName>
-                                        </p:attrNameLst>
-                                      </p:cBhvr>
-                                    </p:anim>
-                                    <p:animScale>
-                                      <p:cBhvr>
-                                        <p:cTn id="25" dur="200" decel="100000" autoRev="1" fill="hold">
-                                          <p:stCondLst>
-                                            <p:cond delay="600"/>
-                                          </p:stCondLst>
-                                        </p:cTn>
-                                        <p:tgtEl>
-                                          <p:spTgt spid="10"/>
-                                        </p:tgtEl>
-                                      </p:cBhvr>
-                                      <p:from x="100000" y="100000"/>
-                                      <p:to x="80000" y="100000"/>
-                                    </p:animScale>
-                                    <p:anim by="(#ppt_h/3+#ppt_w*0.1)" calcmode="lin" valueType="num">
-                                      <p:cBhvr additive="sum">
-                                        <p:cTn id="26" dur="200" decel="100000" autoRev="1" fill="hold">
-                                          <p:stCondLst>
-                                            <p:cond delay="600"/>
-                                          </p:stCondLst>
-                                        </p:cTn>
-                                        <p:tgtEl>
-                                          <p:spTgt spid="10"/>
-                                        </p:tgtEl>
-                                        <p:attrNameLst>
-                                          <p:attrName>ppt_x</p:attrName>
-                                        </p:attrNameLst>
-                                      </p:cBhvr>
-                                    </p:anim>
-                                  </p:childTnLst>
-                                </p:cTn>
-                              </p:par>
-                            </p:childTnLst>
-                          </p:cTn>
-                        </p:par>
-                      </p:childTnLst>
-                    </p:cTn>
-                  </p:par>
-                  <p:par>
-                    <p:cTn id="27" fill="hold">
-                      <p:stCondLst>
-                        <p:cond delay="indefinite"/>
-                      </p:stCondLst>
-                      <p:childTnLst>
-                        <p:par>
-                          <p:cTn id="28" fill="hold">
-                            <p:stCondLst>
-                              <p:cond delay="0"/>
-                            </p:stCondLst>
-                            <p:childTnLst>
-                              <p:par>
-                                <p:cTn id="29" presetID="34" presetClass="entr" presetSubtype="0" fill="hold" grpId="1" nodeType="clickEffect">
-                                  <p:stCondLst>
-                                    <p:cond delay="0"/>
-                                  </p:stCondLst>
-                                  <p:childTnLst>
-                                    <p:set>
-                                      <p:cBhvr>
-                                        <p:cTn id="30" dur="1" fill="hold">
-                                          <p:stCondLst>
-                                            <p:cond delay="0"/>
-                                          </p:stCondLst>
-                                        </p:cTn>
-                                        <p:tgtEl>
-                                          <p:spTgt spid="12"/>
-                                        </p:tgtEl>
-                                        <p:attrNameLst>
-                                          <p:attrName>style.visibility</p:attrName>
-                                        </p:attrNameLst>
-                                      </p:cBhvr>
-                                      <p:to>
-                                        <p:strVal val="visible"/>
-                                      </p:to>
-                                    </p:set>
-                                    <p:anim from="(-#ppt_w/2)" to="(#ppt_x)" calcmode="lin" valueType="num">
-                                      <p:cBhvr>
-                                        <p:cTn id="31" dur="600" fill="hold">
-                                          <p:stCondLst>
-                                            <p:cond delay="0"/>
-                                          </p:stCondLst>
-                                        </p:cTn>
-                                        <p:tgtEl>
-                                          <p:spTgt spid="12"/>
-                                        </p:tgtEl>
-                                        <p:attrNameLst>
-                                          <p:attrName>ppt_x</p:attrName>
-                                        </p:attrNameLst>
-                                      </p:cBhvr>
-                                    </p:anim>
-                                    <p:anim from="0" to="-1.0" calcmode="lin" valueType="num">
-                                      <p:cBhvr>
-                                        <p:cTn id="32" dur="200" decel="50000" autoRev="1" fill="hold">
-                                          <p:stCondLst>
-                                            <p:cond delay="600"/>
-                                          </p:stCondLst>
-                                        </p:cTn>
-                                        <p:tgtEl>
-                                          <p:spTgt spid="12"/>
-                                        </p:tgtEl>
-                                        <p:attrNameLst>
-                                          <p:attrName>xshear</p:attrName>
-                                        </p:attrNameLst>
-                                      </p:cBhvr>
-                                    </p:anim>
-                                    <p:animScale>
-                                      <p:cBhvr>
-                                        <p:cTn id="33" dur="200" decel="100000" autoRev="1" fill="hold">
-                                          <p:stCondLst>
-                                            <p:cond delay="600"/>
-                                          </p:stCondLst>
-                                        </p:cTn>
-                                        <p:tgtEl>
-                                          <p:spTgt spid="12"/>
-                                        </p:tgtEl>
-                                      </p:cBhvr>
-                                      <p:from x="100000" y="100000"/>
-                                      <p:to x="80000" y="100000"/>
-                                    </p:animScale>
-                                    <p:anim by="(#ppt_h/3+#ppt_w*0.1)" calcmode="lin" valueType="num">
-                                      <p:cBhvr additive="sum">
-                                        <p:cTn id="34" dur="200" decel="100000" autoRev="1" fill="hold">
-                                          <p:stCondLst>
-                                            <p:cond delay="600"/>
-                                          </p:stCondLst>
-                                        </p:cTn>
-                                        <p:tgtEl>
-                                          <p:spTgt spid="12"/>
-                                        </p:tgtEl>
-                                        <p:attrNameLst>
-                                          <p:attrName>ppt_x</p:attrName>
-                                        </p:attrNameLst>
-                                      </p:cBhvr>
-                                    </p:anim>
-                                  </p:childTnLst>
-                                </p:cTn>
-                              </p:par>
-                            </p:childTnLst>
-                          </p:cTn>
-                        </p:par>
-                      </p:childTnLst>
-                    </p:cTn>
-                  </p:par>
-                </p:childTnLst>
-              </p:cTn>
-              <p:prevCondLst>
-                <p:cond evt="onPrev" delay="0">
-                  <p:tgtEl>
-                    <p:sldTgt/>
-                  </p:tgtEl>
-                </p:cond>
-              </p:prevCondLst>
-              <p:nextCondLst>
-                <p:cond evt="onNext" delay="0">
-                  <p:tgtEl>
-                    <p:sldTgt/>
-                  </p:tgtEl>
-                </p:cond>
-              </p:nextCondLst>
-            </p:seq>
-          </p:childTnLst>
-        </p:cTn>
-      </p:par>
-    </p:tnLst>
-    <p:bldLst>
-      <p:bldP spid="6" grpId="0"/>
-      <p:bldP spid="8" grpId="0"/>
-      <p:bldP spid="10" grpId="0"/>
-      <p:bldP spid="12" grpId="1"/>
-    </p:bldLst>
   </p:timing>
 </p:sld>
 </file>
@@ -13748,7 +7067,7 @@
           <a:lstStyle/>
           <a:p>
             <a:r>
-              <a:rPr lang="en-US" sz="1600" b="1">
+              <a:rPr lang="en-US" sz="1600" b="1" dirty="0">
                 <a:solidFill>
                   <a:srgbClr val="C00000"/>
                 </a:solidFill>
